--- a/Demonstration of progress/Demonstration of progress.pptx
+++ b/Demonstration of progress/Demonstration of progress.pptx
@@ -277,7 +277,7 @@
           <a:p>
             <a:fld id="{A2EFFBEB-722F-4692-B85C-F4E7F9767597}" type="datetimeFigureOut">
               <a:rPr lang="en-GB" smtClean="0"/>
-              <a:t>09/02/2026</a:t>
+              <a:t>11/02/2026</a:t>
             </a:fld>
             <a:endParaRPr lang="en-GB"/>
           </a:p>
@@ -477,7 +477,7 @@
           <a:p>
             <a:fld id="{A2EFFBEB-722F-4692-B85C-F4E7F9767597}" type="datetimeFigureOut">
               <a:rPr lang="en-GB" smtClean="0"/>
-              <a:t>09/02/2026</a:t>
+              <a:t>11/02/2026</a:t>
             </a:fld>
             <a:endParaRPr lang="en-GB"/>
           </a:p>
@@ -687,7 +687,7 @@
           <a:p>
             <a:fld id="{A2EFFBEB-722F-4692-B85C-F4E7F9767597}" type="datetimeFigureOut">
               <a:rPr lang="en-GB" smtClean="0"/>
-              <a:t>09/02/2026</a:t>
+              <a:t>11/02/2026</a:t>
             </a:fld>
             <a:endParaRPr lang="en-GB"/>
           </a:p>
@@ -887,7 +887,7 @@
           <a:p>
             <a:fld id="{A2EFFBEB-722F-4692-B85C-F4E7F9767597}" type="datetimeFigureOut">
               <a:rPr lang="en-GB" smtClean="0"/>
-              <a:t>09/02/2026</a:t>
+              <a:t>11/02/2026</a:t>
             </a:fld>
             <a:endParaRPr lang="en-GB"/>
           </a:p>
@@ -1163,7 +1163,7 @@
           <a:p>
             <a:fld id="{A2EFFBEB-722F-4692-B85C-F4E7F9767597}" type="datetimeFigureOut">
               <a:rPr lang="en-GB" smtClean="0"/>
-              <a:t>09/02/2026</a:t>
+              <a:t>11/02/2026</a:t>
             </a:fld>
             <a:endParaRPr lang="en-GB"/>
           </a:p>
@@ -1431,7 +1431,7 @@
           <a:p>
             <a:fld id="{A2EFFBEB-722F-4692-B85C-F4E7F9767597}" type="datetimeFigureOut">
               <a:rPr lang="en-GB" smtClean="0"/>
-              <a:t>09/02/2026</a:t>
+              <a:t>11/02/2026</a:t>
             </a:fld>
             <a:endParaRPr lang="en-GB"/>
           </a:p>
@@ -1846,7 +1846,7 @@
           <a:p>
             <a:fld id="{A2EFFBEB-722F-4692-B85C-F4E7F9767597}" type="datetimeFigureOut">
               <a:rPr lang="en-GB" smtClean="0"/>
-              <a:t>09/02/2026</a:t>
+              <a:t>11/02/2026</a:t>
             </a:fld>
             <a:endParaRPr lang="en-GB"/>
           </a:p>
@@ -1988,7 +1988,7 @@
           <a:p>
             <a:fld id="{A2EFFBEB-722F-4692-B85C-F4E7F9767597}" type="datetimeFigureOut">
               <a:rPr lang="en-GB" smtClean="0"/>
-              <a:t>09/02/2026</a:t>
+              <a:t>11/02/2026</a:t>
             </a:fld>
             <a:endParaRPr lang="en-GB"/>
           </a:p>
@@ -2101,7 +2101,7 @@
           <a:p>
             <a:fld id="{A2EFFBEB-722F-4692-B85C-F4E7F9767597}" type="datetimeFigureOut">
               <a:rPr lang="en-GB" smtClean="0"/>
-              <a:t>09/02/2026</a:t>
+              <a:t>11/02/2026</a:t>
             </a:fld>
             <a:endParaRPr lang="en-GB"/>
           </a:p>
@@ -2414,7 +2414,7 @@
           <a:p>
             <a:fld id="{A2EFFBEB-722F-4692-B85C-F4E7F9767597}" type="datetimeFigureOut">
               <a:rPr lang="en-GB" smtClean="0"/>
-              <a:t>09/02/2026</a:t>
+              <a:t>11/02/2026</a:t>
             </a:fld>
             <a:endParaRPr lang="en-GB"/>
           </a:p>
@@ -2703,7 +2703,7 @@
           <a:p>
             <a:fld id="{A2EFFBEB-722F-4692-B85C-F4E7F9767597}" type="datetimeFigureOut">
               <a:rPr lang="en-GB" smtClean="0"/>
-              <a:t>09/02/2026</a:t>
+              <a:t>11/02/2026</a:t>
             </a:fld>
             <a:endParaRPr lang="en-GB"/>
           </a:p>
@@ -2946,7 +2946,7 @@
           <a:p>
             <a:fld id="{A2EFFBEB-722F-4692-B85C-F4E7F9767597}" type="datetimeFigureOut">
               <a:rPr lang="en-GB" smtClean="0"/>
-              <a:t>09/02/2026</a:t>
+              <a:t>11/02/2026</a:t>
             </a:fld>
             <a:endParaRPr lang="en-GB"/>
           </a:p>
@@ -4496,15 +4496,7 @@
           <a:p>
             <a:r>
               <a:rPr lang="en-GB" dirty="0"/>
-              <a:t>Examples can include usage of 🅴 🅼 🅾 🅹 🅸 🆂 in place of regular text, appealing to any kindness such as making the request appear like its necessary to save a dying grandma or encoding such as base64 or </a:t>
-            </a:r>
-            <a:r>
-              <a:rPr lang="en-GB"/>
-              <a:t>replacing text with 🅴 🅼 🅾 🅹 🅸 🆂 </a:t>
-            </a:r>
-            <a:r>
-              <a:rPr lang="en-GB" dirty="0"/>
-              <a:t>as well as many other methods.</a:t>
+              <a:t>Examples can include framing such as making the request appear like its necessary to save a dying grandma, encoding such as base64 or replacing text with 🅴 🅼 🅾 🅹 🅸 🆂 or exploiting safety concerns such as self-harm protections as well as many other techniques.</a:t>
             </a:r>
           </a:p>
         </p:txBody>

--- a/Demonstration of progress/Demonstration of progress.pptx
+++ b/Demonstration of progress/Demonstration of progress.pptx
@@ -5,7 +5,7 @@
     <p:sldMasterId id="2147483648" r:id="rId1"/>
   </p:sldMasterIdLst>
   <p:notesMasterIdLst>
-    <p:notesMasterId r:id="rId19"/>
+    <p:notesMasterId r:id="rId20"/>
   </p:notesMasterIdLst>
   <p:sldIdLst>
     <p:sldId id="256" r:id="rId2"/>
@@ -21,10 +21,11 @@
     <p:sldId id="263" r:id="rId12"/>
     <p:sldId id="273" r:id="rId13"/>
     <p:sldId id="260" r:id="rId14"/>
-    <p:sldId id="261" r:id="rId15"/>
+    <p:sldId id="275" r:id="rId15"/>
     <p:sldId id="274" r:id="rId16"/>
     <p:sldId id="262" r:id="rId17"/>
-    <p:sldId id="265" r:id="rId18"/>
+    <p:sldId id="261" r:id="rId18"/>
+    <p:sldId id="265" r:id="rId19"/>
   </p:sldIdLst>
   <p:sldSz cx="12192000" cy="6858000"/>
   <p:notesSz cx="6858000" cy="9144000"/>
@@ -6090,7 +6091,7 @@
           </a:r>
           <a:r>
             <a:rPr lang="en-GB" sz="1400" dirty="0"/>
-            <a:t> et al</a:t>
+            <a:t> et al[1]</a:t>
           </a:r>
           <a:endParaRPr lang="en-US" sz="1400" dirty="0"/>
         </a:p>
@@ -6135,7 +6136,7 @@
           </a:r>
           <a:r>
             <a:rPr lang="en-GB" dirty="0"/>
-            <a:t> et al with some additionally being added in other papers along with some practical proof of concepts albeit quite limited</a:t>
+            <a:t> et al[1] with some additionally being added in other papers along with some practical proof of concepts albeit quite limited</a:t>
           </a:r>
           <a:endParaRPr lang="en-US" dirty="0"/>
         </a:p>
@@ -7834,7 +7835,7 @@
           </a:r>
           <a:r>
             <a:rPr lang="en-GB" sz="1400" kern="1200" dirty="0"/>
-            <a:t> et al</a:t>
+            <a:t> et al[1]</a:t>
           </a:r>
           <a:endParaRPr lang="en-US" sz="1400" kern="1200" dirty="0"/>
         </a:p>
@@ -7953,7 +7954,7 @@
           </a:r>
           <a:r>
             <a:rPr lang="en-GB" sz="1200" kern="1200" dirty="0"/>
-            <a:t> et al with some additionally being added in other papers along with some practical proof of concepts albeit quite limited</a:t>
+            <a:t> et al[1] with some additionally being added in other papers along with some practical proof of concepts albeit quite limited</a:t>
           </a:r>
           <a:endParaRPr lang="en-US" sz="1200" kern="1200" dirty="0"/>
         </a:p>
@@ -16203,7 +16204,7 @@
           <a:p>
             <a:fld id="{A2EFFBEB-722F-4692-B85C-F4E7F9767597}" type="datetimeFigureOut">
               <a:rPr lang="en-GB" smtClean="0"/>
-              <a:t>11/02/2026</a:t>
+              <a:t>12/02/2026</a:t>
             </a:fld>
             <a:endParaRPr lang="en-GB"/>
           </a:p>
@@ -16403,7 +16404,7 @@
           <a:p>
             <a:fld id="{A2EFFBEB-722F-4692-B85C-F4E7F9767597}" type="datetimeFigureOut">
               <a:rPr lang="en-GB" smtClean="0"/>
-              <a:t>11/02/2026</a:t>
+              <a:t>12/02/2026</a:t>
             </a:fld>
             <a:endParaRPr lang="en-GB"/>
           </a:p>
@@ -16613,7 +16614,7 @@
           <a:p>
             <a:fld id="{A2EFFBEB-722F-4692-B85C-F4E7F9767597}" type="datetimeFigureOut">
               <a:rPr lang="en-GB" smtClean="0"/>
-              <a:t>11/02/2026</a:t>
+              <a:t>12/02/2026</a:t>
             </a:fld>
             <a:endParaRPr lang="en-GB"/>
           </a:p>
@@ -16813,7 +16814,7 @@
           <a:p>
             <a:fld id="{A2EFFBEB-722F-4692-B85C-F4E7F9767597}" type="datetimeFigureOut">
               <a:rPr lang="en-GB" smtClean="0"/>
-              <a:t>11/02/2026</a:t>
+              <a:t>12/02/2026</a:t>
             </a:fld>
             <a:endParaRPr lang="en-GB"/>
           </a:p>
@@ -17089,7 +17090,7 @@
           <a:p>
             <a:fld id="{A2EFFBEB-722F-4692-B85C-F4E7F9767597}" type="datetimeFigureOut">
               <a:rPr lang="en-GB" smtClean="0"/>
-              <a:t>11/02/2026</a:t>
+              <a:t>12/02/2026</a:t>
             </a:fld>
             <a:endParaRPr lang="en-GB"/>
           </a:p>
@@ -17357,7 +17358,7 @@
           <a:p>
             <a:fld id="{A2EFFBEB-722F-4692-B85C-F4E7F9767597}" type="datetimeFigureOut">
               <a:rPr lang="en-GB" smtClean="0"/>
-              <a:t>11/02/2026</a:t>
+              <a:t>12/02/2026</a:t>
             </a:fld>
             <a:endParaRPr lang="en-GB"/>
           </a:p>
@@ -17772,7 +17773,7 @@
           <a:p>
             <a:fld id="{A2EFFBEB-722F-4692-B85C-F4E7F9767597}" type="datetimeFigureOut">
               <a:rPr lang="en-GB" smtClean="0"/>
-              <a:t>11/02/2026</a:t>
+              <a:t>12/02/2026</a:t>
             </a:fld>
             <a:endParaRPr lang="en-GB"/>
           </a:p>
@@ -17914,7 +17915,7 @@
           <a:p>
             <a:fld id="{A2EFFBEB-722F-4692-B85C-F4E7F9767597}" type="datetimeFigureOut">
               <a:rPr lang="en-GB" smtClean="0"/>
-              <a:t>11/02/2026</a:t>
+              <a:t>12/02/2026</a:t>
             </a:fld>
             <a:endParaRPr lang="en-GB"/>
           </a:p>
@@ -18027,7 +18028,7 @@
           <a:p>
             <a:fld id="{A2EFFBEB-722F-4692-B85C-F4E7F9767597}" type="datetimeFigureOut">
               <a:rPr lang="en-GB" smtClean="0"/>
-              <a:t>11/02/2026</a:t>
+              <a:t>12/02/2026</a:t>
             </a:fld>
             <a:endParaRPr lang="en-GB"/>
           </a:p>
@@ -18340,7 +18341,7 @@
           <a:p>
             <a:fld id="{A2EFFBEB-722F-4692-B85C-F4E7F9767597}" type="datetimeFigureOut">
               <a:rPr lang="en-GB" smtClean="0"/>
-              <a:t>11/02/2026</a:t>
+              <a:t>12/02/2026</a:t>
             </a:fld>
             <a:endParaRPr lang="en-GB"/>
           </a:p>
@@ -18629,7 +18630,7 @@
           <a:p>
             <a:fld id="{A2EFFBEB-722F-4692-B85C-F4E7F9767597}" type="datetimeFigureOut">
               <a:rPr lang="en-GB" smtClean="0"/>
-              <a:t>11/02/2026</a:t>
+              <a:t>12/02/2026</a:t>
             </a:fld>
             <a:endParaRPr lang="en-GB"/>
           </a:p>
@@ -18872,7 +18873,7 @@
           <a:p>
             <a:fld id="{A2EFFBEB-722F-4692-B85C-F4E7F9767597}" type="datetimeFigureOut">
               <a:rPr lang="en-GB" smtClean="0"/>
-              <a:t>11/02/2026</a:t>
+              <a:t>12/02/2026</a:t>
             </a:fld>
             <a:endParaRPr lang="en-GB"/>
           </a:p>
@@ -20716,8 +20717,8 @@
         </p:blipFill>
         <p:spPr>
           <a:xfrm>
-            <a:off x="1636489" y="2200459"/>
-            <a:ext cx="2642212" cy="2133001"/>
+            <a:off x="1221546" y="2200459"/>
+            <a:ext cx="3057155" cy="2467975"/>
           </a:xfrm>
           <a:prstGeom prst="rect">
             <a:avLst/>
@@ -20746,8 +20747,8 @@
         </p:blipFill>
         <p:spPr>
           <a:xfrm>
-            <a:off x="4746007" y="2200459"/>
-            <a:ext cx="2713581" cy="2133001"/>
+            <a:off x="4519205" y="2189566"/>
+            <a:ext cx="3153589" cy="2478868"/>
           </a:xfrm>
           <a:prstGeom prst="rect">
             <a:avLst/>
@@ -20777,8 +20778,8 @@
         </p:blipFill>
         <p:spPr>
           <a:xfrm>
-            <a:off x="7913295" y="2200459"/>
-            <a:ext cx="2820140" cy="2133001"/>
+            <a:off x="7913294" y="2200459"/>
+            <a:ext cx="3288105" cy="2486944"/>
           </a:xfrm>
           <a:prstGeom prst="rect">
             <a:avLst/>
@@ -20814,14 +20815,65 @@
           <a:lstStyle/>
           <a:p>
             <a:r>
-              <a:rPr lang="en-GB" sz="2000"/>
+              <a:rPr lang="en-GB" sz="2000" dirty="0"/>
               <a:t>The focus of my research will be surrounding web apps.</a:t>
             </a:r>
           </a:p>
           <a:p>
             <a:r>
-              <a:rPr lang="en-GB" sz="2000"/>
-              <a:t>Exploitation methods through web apps were largely shown in Greshake et al </a:t>
+              <a:rPr lang="en-GB" sz="2000" dirty="0"/>
+              <a:t>Exploitation methods through web apps were largely shown in </a:t>
+            </a:r>
+            <a:r>
+              <a:rPr lang="en-GB" sz="2000" dirty="0" err="1"/>
+              <a:t>Greshake</a:t>
+            </a:r>
+            <a:r>
+              <a:rPr lang="en-GB" sz="2000" dirty="0"/>
+              <a:t> et al[1] </a:t>
+            </a:r>
+          </a:p>
+        </p:txBody>
+      </p:sp>
+      <p:sp>
+        <p:nvSpPr>
+          <p:cNvPr id="4" name="TextBox 3">
+            <a:extLst>
+              <a:ext uri="{FF2B5EF4-FFF2-40B4-BE49-F238E27FC236}">
+                <a16:creationId xmlns:a16="http://schemas.microsoft.com/office/drawing/2014/main" id="{E229462D-3BFA-A13A-41B5-8E8C07515FD7}"/>
+              </a:ext>
+            </a:extLst>
+          </p:cNvPr>
+          <p:cNvSpPr txBox="1"/>
+          <p:nvPr/>
+        </p:nvSpPr>
+        <p:spPr>
+          <a:xfrm>
+            <a:off x="9784080" y="6336792"/>
+            <a:ext cx="2212848" cy="400110"/>
+          </a:xfrm>
+          <a:prstGeom prst="rect">
+            <a:avLst/>
+          </a:prstGeom>
+          <a:noFill/>
+        </p:spPr>
+        <p:txBody>
+          <a:bodyPr wrap="square" rtlCol="0">
+            <a:spAutoFit/>
+          </a:bodyPr>
+          <a:lstStyle/>
+          <a:p>
+            <a:r>
+              <a:rPr lang="en-GB" sz="1000" dirty="0"/>
+              <a:t>Diagrams taken from </a:t>
+            </a:r>
+            <a:r>
+              <a:rPr lang="en-GB" sz="1000" dirty="0" err="1"/>
+              <a:t>greshake</a:t>
+            </a:r>
+            <a:r>
+              <a:rPr lang="en-GB" sz="1000" dirty="0"/>
+              <a:t> et al [1]</a:t>
             </a:r>
           </a:p>
         </p:txBody>
@@ -21540,6 +21592,14 @@
 <file path=ppt/slides/slide13.xml><?xml version="1.0" encoding="utf-8"?>
 <p:sld xmlns:a="http://schemas.openxmlformats.org/drawingml/2006/main" xmlns:r="http://schemas.openxmlformats.org/officeDocument/2006/relationships" xmlns:p="http://schemas.openxmlformats.org/presentationml/2006/main">
   <p:cSld>
+    <p:bg>
+      <p:bgPr>
+        <a:solidFill>
+          <a:schemeClr val="bg1"/>
+        </a:solidFill>
+        <a:effectLst/>
+      </p:bgPr>
+    </p:bg>
     <p:spTree>
       <p:nvGrpSpPr>
         <p:cNvPr id="1" name=""/>
@@ -21554,6 +21614,334 @@
           <a:chExt cx="0" cy="0"/>
         </a:xfrm>
       </p:grpSpPr>
+      <p:sp useBgFill="1">
+        <p:nvSpPr>
+          <p:cNvPr id="12" name="Rectangle 11">
+            <a:extLst>
+              <a:ext uri="{FF2B5EF4-FFF2-40B4-BE49-F238E27FC236}">
+                <a16:creationId xmlns:a16="http://schemas.microsoft.com/office/drawing/2014/main" id="{B712E947-0734-45F9-9C4F-41114EC3A33E}"/>
+              </a:ext>
+              <a:ext uri="{C183D7F6-B498-43B3-948B-1728B52AA6E4}">
+                <adec:decorative xmlns:adec="http://schemas.microsoft.com/office/drawing/2017/decorative" val="1"/>
+              </a:ext>
+            </a:extLst>
+          </p:cNvPr>
+          <p:cNvSpPr>
+            <a:spLocks noGrp="1" noRot="1" noChangeAspect="1" noMove="1" noResize="1" noEditPoints="1" noAdjustHandles="1" noChangeArrowheads="1" noChangeShapeType="1" noTextEdit="1"/>
+          </p:cNvSpPr>
+          <p:nvPr>
+            <p:extLst>
+              <p:ext uri="{386F3935-93C4-4BCD-93E2-E3B085C9AB24}">
+                <p16:designElem xmlns:p16="http://schemas.microsoft.com/office/powerpoint/2015/main" val="1"/>
+              </p:ext>
+            </p:extLst>
+          </p:nvPr>
+        </p:nvSpPr>
+        <p:spPr>
+          <a:xfrm>
+            <a:off x="14285" y="0"/>
+            <a:ext cx="12192000" cy="6858000"/>
+          </a:xfrm>
+          <a:prstGeom prst="rect">
+            <a:avLst/>
+          </a:prstGeom>
+          <a:ln w="12700" cap="flat" cmpd="sng" algn="ctr">
+            <a:noFill/>
+            <a:prstDash val="solid"/>
+            <a:miter lim="800000"/>
+          </a:ln>
+          <a:effectLst/>
+          <a:extLst>
+            <a:ext uri="{91240B29-F687-4F45-9708-019B960494DF}">
+              <a14:hiddenLine xmlns:a14="http://schemas.microsoft.com/office/drawing/2010/main" w="12700" cap="flat" cmpd="sng" algn="ctr">
+                <a:solidFill>
+                  <a:schemeClr val="accent1">
+                    <a:shade val="50000"/>
+                  </a:schemeClr>
+                </a:solidFill>
+                <a:prstDash val="solid"/>
+                <a:miter lim="800000"/>
+              </a14:hiddenLine>
+            </a:ext>
+          </a:extLst>
+        </p:spPr>
+        <p:style>
+          <a:lnRef idx="2">
+            <a:schemeClr val="accent1">
+              <a:shade val="50000"/>
+            </a:schemeClr>
+          </a:lnRef>
+          <a:fillRef idx="1">
+            <a:schemeClr val="accent1"/>
+          </a:fillRef>
+          <a:effectRef idx="0">
+            <a:schemeClr val="accent1"/>
+          </a:effectRef>
+          <a:fontRef idx="minor">
+            <a:schemeClr val="lt1"/>
+          </a:fontRef>
+        </p:style>
+        <p:txBody>
+          <a:bodyPr rtlCol="0" anchor="ctr"/>
+          <a:lstStyle/>
+          <a:p>
+            <a:pPr algn="ctr"/>
+            <a:endParaRPr lang="en-US"/>
+          </a:p>
+        </p:txBody>
+      </p:sp>
+      <p:grpSp>
+        <p:nvGrpSpPr>
+          <p:cNvPr id="14" name="Group 13">
+            <a:extLst>
+              <a:ext uri="{FF2B5EF4-FFF2-40B4-BE49-F238E27FC236}">
+                <a16:creationId xmlns:a16="http://schemas.microsoft.com/office/drawing/2014/main" id="{12B3290A-D3BF-4B87-B55B-FD9A98B49727}"/>
+              </a:ext>
+              <a:ext uri="{C183D7F6-B498-43B3-948B-1728B52AA6E4}">
+                <adec:decorative xmlns:adec="http://schemas.microsoft.com/office/drawing/2017/decorative" val="1"/>
+              </a:ext>
+            </a:extLst>
+          </p:cNvPr>
+          <p:cNvGrpSpPr>
+            <a:grpSpLocks noGrp="1" noUngrp="1" noRot="1" noChangeAspect="1" noMove="1" noResize="1"/>
+          </p:cNvGrpSpPr>
+          <p:nvPr>
+            <p:extLst>
+              <p:ext uri="{386F3935-93C4-4BCD-93E2-E3B085C9AB24}">
+                <p16:designElem xmlns:p16="http://schemas.microsoft.com/office/powerpoint/2015/main" val="1"/>
+              </p:ext>
+            </p:extLst>
+          </p:nvPr>
+        </p:nvGrpSpPr>
+        <p:grpSpPr>
+          <a:xfrm>
+            <a:off x="0" y="0"/>
+            <a:ext cx="12199030" cy="1576446"/>
+            <a:chOff x="0" y="0"/>
+            <a:chExt cx="12192002" cy="1576446"/>
+          </a:xfrm>
+        </p:grpSpPr>
+        <p:sp>
+          <p:nvSpPr>
+            <p:cNvPr id="15" name="Rectangle 14">
+              <a:extLst>
+                <a:ext uri="{FF2B5EF4-FFF2-40B4-BE49-F238E27FC236}">
+                  <a16:creationId xmlns:a16="http://schemas.microsoft.com/office/drawing/2014/main" id="{033A715A-0686-440A-8F40-441B42A6605C}"/>
+                </a:ext>
+                <a:ext uri="{C183D7F6-B498-43B3-948B-1728B52AA6E4}">
+                  <adec:decorative xmlns:adec="http://schemas.microsoft.com/office/drawing/2017/decorative" val="1"/>
+                </a:ext>
+              </a:extLst>
+            </p:cNvPr>
+            <p:cNvSpPr/>
+            <p:nvPr>
+              <p:extLst>
+                <p:ext uri="{386F3935-93C4-4BCD-93E2-E3B085C9AB24}">
+                  <p16:designElem xmlns:p16="http://schemas.microsoft.com/office/powerpoint/2015/main" val="1"/>
+                </p:ext>
+              </p:extLst>
+            </p:nvPr>
+          </p:nvSpPr>
+          <p:spPr>
+            <a:xfrm rot="10800000" flipH="1">
+              <a:off x="2" y="0"/>
+              <a:ext cx="12191998" cy="1575955"/>
+            </a:xfrm>
+            <a:prstGeom prst="rect">
+              <a:avLst/>
+            </a:prstGeom>
+            <a:gradFill>
+              <a:gsLst>
+                <a:gs pos="0">
+                  <a:srgbClr val="000000">
+                    <a:alpha val="96000"/>
+                  </a:srgbClr>
+                </a:gs>
+                <a:gs pos="100000">
+                  <a:schemeClr val="accent1">
+                    <a:lumMod val="75000"/>
+                  </a:schemeClr>
+                </a:gs>
+              </a:gsLst>
+              <a:lin ang="8400000" scaled="0"/>
+            </a:gradFill>
+            <a:ln>
+              <a:noFill/>
+            </a:ln>
+          </p:spPr>
+          <p:style>
+            <a:lnRef idx="2">
+              <a:schemeClr val="accent1">
+                <a:shade val="50000"/>
+              </a:schemeClr>
+            </a:lnRef>
+            <a:fillRef idx="1">
+              <a:schemeClr val="accent1"/>
+            </a:fillRef>
+            <a:effectRef idx="0">
+              <a:schemeClr val="accent1"/>
+            </a:effectRef>
+            <a:fontRef idx="minor">
+              <a:schemeClr val="lt1"/>
+            </a:fontRef>
+          </p:style>
+          <p:txBody>
+            <a:bodyPr rtlCol="0" anchor="ctr"/>
+            <a:lstStyle/>
+            <a:p>
+              <a:pPr algn="ctr"/>
+              <a:endParaRPr lang="en-US"/>
+            </a:p>
+          </p:txBody>
+        </p:sp>
+        <p:sp>
+          <p:nvSpPr>
+            <p:cNvPr id="16" name="Rectangle 15">
+              <a:extLst>
+                <a:ext uri="{FF2B5EF4-FFF2-40B4-BE49-F238E27FC236}">
+                  <a16:creationId xmlns:a16="http://schemas.microsoft.com/office/drawing/2014/main" id="{4761657F-19F2-425B-B7E9-0118CD13C334}"/>
+                </a:ext>
+                <a:ext uri="{C183D7F6-B498-43B3-948B-1728B52AA6E4}">
+                  <adec:decorative xmlns:adec="http://schemas.microsoft.com/office/drawing/2017/decorative" val="1"/>
+                </a:ext>
+              </a:extLst>
+            </p:cNvPr>
+            <p:cNvSpPr/>
+            <p:nvPr>
+              <p:extLst>
+                <p:ext uri="{386F3935-93C4-4BCD-93E2-E3B085C9AB24}">
+                  <p16:designElem xmlns:p16="http://schemas.microsoft.com/office/powerpoint/2015/main" val="1"/>
+                </p:ext>
+              </p:extLst>
+            </p:nvPr>
+          </p:nvSpPr>
+          <p:spPr>
+            <a:xfrm rot="16200000">
+              <a:off x="5307778" y="-5307778"/>
+              <a:ext cx="1576446" cy="12192002"/>
+            </a:xfrm>
+            <a:prstGeom prst="rect">
+              <a:avLst/>
+            </a:prstGeom>
+            <a:gradFill>
+              <a:gsLst>
+                <a:gs pos="45000">
+                  <a:schemeClr val="accent1">
+                    <a:alpha val="0"/>
+                  </a:schemeClr>
+                </a:gs>
+                <a:gs pos="99000">
+                  <a:srgbClr val="000000">
+                    <a:alpha val="74000"/>
+                  </a:srgbClr>
+                </a:gs>
+              </a:gsLst>
+              <a:lin ang="11400000" scaled="0"/>
+            </a:gradFill>
+            <a:ln>
+              <a:noFill/>
+            </a:ln>
+          </p:spPr>
+          <p:style>
+            <a:lnRef idx="2">
+              <a:schemeClr val="accent1">
+                <a:shade val="50000"/>
+              </a:schemeClr>
+            </a:lnRef>
+            <a:fillRef idx="1">
+              <a:schemeClr val="accent1"/>
+            </a:fillRef>
+            <a:effectRef idx="0">
+              <a:schemeClr val="accent1"/>
+            </a:effectRef>
+            <a:fontRef idx="minor">
+              <a:schemeClr val="lt1"/>
+            </a:fontRef>
+          </p:style>
+          <p:txBody>
+            <a:bodyPr rtlCol="0" anchor="ctr"/>
+            <a:lstStyle/>
+            <a:p>
+              <a:pPr algn="ctr"/>
+              <a:endParaRPr lang="en-US" dirty="0"/>
+            </a:p>
+          </p:txBody>
+        </p:sp>
+        <p:sp>
+          <p:nvSpPr>
+            <p:cNvPr id="17" name="Rectangle 16">
+              <a:extLst>
+                <a:ext uri="{FF2B5EF4-FFF2-40B4-BE49-F238E27FC236}">
+                  <a16:creationId xmlns:a16="http://schemas.microsoft.com/office/drawing/2014/main" id="{E27B6634-79D3-4EDD-A77A-1065D6F3A4F2}"/>
+                </a:ext>
+                <a:ext uri="{C183D7F6-B498-43B3-948B-1728B52AA6E4}">
+                  <adec:decorative xmlns:adec="http://schemas.microsoft.com/office/drawing/2017/decorative" val="1"/>
+                </a:ext>
+              </a:extLst>
+            </p:cNvPr>
+            <p:cNvSpPr/>
+            <p:nvPr>
+              <p:extLst>
+                <p:ext uri="{386F3935-93C4-4BCD-93E2-E3B085C9AB24}">
+                  <p16:designElem xmlns:p16="http://schemas.microsoft.com/office/powerpoint/2015/main" val="1"/>
+                </p:ext>
+              </p:extLst>
+            </p:nvPr>
+          </p:nvSpPr>
+          <p:spPr>
+            <a:xfrm>
+              <a:off x="3825434" y="0"/>
+              <a:ext cx="4303422" cy="1575461"/>
+            </a:xfrm>
+            <a:prstGeom prst="rect">
+              <a:avLst/>
+            </a:prstGeom>
+            <a:gradFill>
+              <a:gsLst>
+                <a:gs pos="0">
+                  <a:schemeClr val="accent1">
+                    <a:alpha val="17000"/>
+                  </a:schemeClr>
+                </a:gs>
+                <a:gs pos="74000">
+                  <a:schemeClr val="accent1">
+                    <a:lumMod val="50000"/>
+                    <a:alpha val="0"/>
+                  </a:schemeClr>
+                </a:gs>
+              </a:gsLst>
+              <a:lin ang="14400000" scaled="0"/>
+            </a:gradFill>
+            <a:ln>
+              <a:noFill/>
+            </a:ln>
+          </p:spPr>
+          <p:style>
+            <a:lnRef idx="2">
+              <a:schemeClr val="accent1">
+                <a:shade val="50000"/>
+              </a:schemeClr>
+            </a:lnRef>
+            <a:fillRef idx="1">
+              <a:schemeClr val="accent1"/>
+            </a:fillRef>
+            <a:effectRef idx="0">
+              <a:schemeClr val="accent1"/>
+            </a:effectRef>
+            <a:fontRef idx="minor">
+              <a:schemeClr val="lt1"/>
+            </a:fontRef>
+          </p:style>
+          <p:txBody>
+            <a:bodyPr rtlCol="0" anchor="ctr"/>
+            <a:lstStyle/>
+            <a:p>
+              <a:pPr algn="ctr"/>
+              <a:endParaRPr lang="en-US"/>
+            </a:p>
+          </p:txBody>
+        </p:sp>
+      </p:grpSp>
       <p:sp>
         <p:nvSpPr>
           <p:cNvPr id="2" name="Title 1">
@@ -21570,18 +21958,89 @@
             <p:ph type="title"/>
           </p:nvPr>
         </p:nvSpPr>
-        <p:spPr/>
+        <p:spPr>
+          <a:xfrm>
+            <a:off x="1371598" y="319314"/>
+            <a:ext cx="9477377" cy="1030515"/>
+          </a:xfrm>
+        </p:spPr>
         <p:txBody>
-          <a:bodyPr/>
+          <a:bodyPr anchor="ctr">
+            <a:normAutofit/>
+          </a:bodyPr>
           <a:lstStyle/>
           <a:p>
             <a:r>
-              <a:rPr lang="en-GB" dirty="0"/>
+              <a:rPr lang="en-GB" sz="4000">
+                <a:solidFill>
+                  <a:srgbClr val="FFFFFF"/>
+                </a:solidFill>
+              </a:rPr>
               <a:t>Current progress</a:t>
             </a:r>
           </a:p>
         </p:txBody>
       </p:sp>
+      <p:pic>
+        <p:nvPicPr>
+          <p:cNvPr id="5" name="Picture 4">
+            <a:extLst>
+              <a:ext uri="{FF2B5EF4-FFF2-40B4-BE49-F238E27FC236}">
+                <a16:creationId xmlns:a16="http://schemas.microsoft.com/office/drawing/2014/main" id="{8A01E255-D57C-3DE8-B833-42015FC53BB9}"/>
+              </a:ext>
+            </a:extLst>
+          </p:cNvPr>
+          <p:cNvPicPr>
+            <a:picLocks noChangeAspect="1"/>
+          </p:cNvPicPr>
+          <p:nvPr/>
+        </p:nvPicPr>
+        <p:blipFill>
+          <a:blip r:embed="rId2"/>
+          <a:stretch>
+            <a:fillRect/>
+          </a:stretch>
+        </p:blipFill>
+        <p:spPr>
+          <a:xfrm>
+            <a:off x="6836978" y="1575461"/>
+            <a:ext cx="3493758" cy="3450086"/>
+          </a:xfrm>
+          <a:prstGeom prst="rect">
+            <a:avLst/>
+          </a:prstGeom>
+        </p:spPr>
+      </p:pic>
+      <p:pic>
+        <p:nvPicPr>
+          <p:cNvPr id="7" name="Picture 6">
+            <a:extLst>
+              <a:ext uri="{FF2B5EF4-FFF2-40B4-BE49-F238E27FC236}">
+                <a16:creationId xmlns:a16="http://schemas.microsoft.com/office/drawing/2014/main" id="{B00687B5-6F20-834D-1A1D-C64AF7077A53}"/>
+              </a:ext>
+            </a:extLst>
+          </p:cNvPr>
+          <p:cNvPicPr>
+            <a:picLocks noChangeAspect="1"/>
+          </p:cNvPicPr>
+          <p:nvPr/>
+        </p:nvPicPr>
+        <p:blipFill>
+          <a:blip r:embed="rId3"/>
+          <a:stretch>
+            <a:fillRect/>
+          </a:stretch>
+        </p:blipFill>
+        <p:spPr>
+          <a:xfrm>
+            <a:off x="1527462" y="3048729"/>
+            <a:ext cx="4600354" cy="760542"/>
+          </a:xfrm>
+          <a:prstGeom prst="rect">
+            <a:avLst/>
+          </a:prstGeom>
+        </p:spPr>
+      </p:pic>
       <p:sp>
         <p:nvSpPr>
           <p:cNvPr id="3" name="Content Placeholder 2">
@@ -21598,20 +22057,27 @@
             <p:ph idx="1"/>
           </p:nvPr>
         </p:nvSpPr>
-        <p:spPr/>
+        <p:spPr>
+          <a:xfrm>
+            <a:off x="1371598" y="5070346"/>
+            <a:ext cx="9496427" cy="1385266"/>
+          </a:xfrm>
+        </p:spPr>
         <p:txBody>
-          <a:bodyPr/>
+          <a:bodyPr>
+            <a:normAutofit/>
+          </a:bodyPr>
           <a:lstStyle/>
           <a:p>
             <a:r>
-              <a:rPr lang="en-GB" dirty="0"/>
+              <a:rPr lang="en-GB" sz="2000" dirty="0"/>
               <a:t>Currently my aim is to make a basic proof of concept of the idea.</a:t>
             </a:r>
           </a:p>
           <a:p>
             <a:r>
-              <a:rPr lang="en-GB" dirty="0"/>
-              <a:t>The proof of concept combines the idea of both </a:t>
+              <a:rPr lang="en-GB" sz="2000" dirty="0"/>
+              <a:t>So far, I have deployed a basic static website and instructed the LLM to take its title as the prompt</a:t>
             </a:r>
           </a:p>
         </p:txBody>
@@ -21632,9 +22098,23 @@
 <file path=ppt/slides/slide14.xml><?xml version="1.0" encoding="utf-8"?>
 <p:sld xmlns:a="http://schemas.openxmlformats.org/drawingml/2006/main" xmlns:r="http://schemas.openxmlformats.org/officeDocument/2006/relationships" xmlns:p="http://schemas.openxmlformats.org/presentationml/2006/main">
   <p:cSld>
+    <p:bg>
+      <p:bgPr>
+        <a:solidFill>
+          <a:schemeClr val="bg1"/>
+        </a:solidFill>
+        <a:effectLst/>
+      </p:bgPr>
+    </p:bg>
     <p:spTree>
       <p:nvGrpSpPr>
-        <p:cNvPr id="1" name=""/>
+        <p:cNvPr id="1" name="">
+          <a:extLst>
+            <a:ext uri="{FF2B5EF4-FFF2-40B4-BE49-F238E27FC236}">
+              <a16:creationId xmlns:a16="http://schemas.microsoft.com/office/drawing/2014/main" id="{FCD8152C-1E77-3791-D3C0-3622704393F5}"/>
+            </a:ext>
+          </a:extLst>
+        </p:cNvPr>
         <p:cNvGrpSpPr/>
         <p:nvPr/>
       </p:nvGrpSpPr>
@@ -21646,12 +22126,340 @@
           <a:chExt cx="0" cy="0"/>
         </a:xfrm>
       </p:grpSpPr>
+      <p:sp useBgFill="1">
+        <p:nvSpPr>
+          <p:cNvPr id="12" name="Rectangle 11">
+            <a:extLst>
+              <a:ext uri="{FF2B5EF4-FFF2-40B4-BE49-F238E27FC236}">
+                <a16:creationId xmlns:a16="http://schemas.microsoft.com/office/drawing/2014/main" id="{C5483334-8CCC-C859-8E4A-EAFB020E7FCF}"/>
+              </a:ext>
+              <a:ext uri="{C183D7F6-B498-43B3-948B-1728B52AA6E4}">
+                <adec:decorative xmlns:adec="http://schemas.microsoft.com/office/drawing/2017/decorative" val="1"/>
+              </a:ext>
+            </a:extLst>
+          </p:cNvPr>
+          <p:cNvSpPr>
+            <a:spLocks noGrp="1" noRot="1" noChangeAspect="1" noMove="1" noResize="1" noEditPoints="1" noAdjustHandles="1" noChangeArrowheads="1" noChangeShapeType="1" noTextEdit="1"/>
+          </p:cNvSpPr>
+          <p:nvPr>
+            <p:extLst>
+              <p:ext uri="{386F3935-93C4-4BCD-93E2-E3B085C9AB24}">
+                <p16:designElem xmlns:p16="http://schemas.microsoft.com/office/powerpoint/2015/main" val="1"/>
+              </p:ext>
+            </p:extLst>
+          </p:nvPr>
+        </p:nvSpPr>
+        <p:spPr>
+          <a:xfrm>
+            <a:off x="14285" y="0"/>
+            <a:ext cx="12192000" cy="6858000"/>
+          </a:xfrm>
+          <a:prstGeom prst="rect">
+            <a:avLst/>
+          </a:prstGeom>
+          <a:ln w="12700" cap="flat" cmpd="sng" algn="ctr">
+            <a:noFill/>
+            <a:prstDash val="solid"/>
+            <a:miter lim="800000"/>
+          </a:ln>
+          <a:effectLst/>
+          <a:extLst>
+            <a:ext uri="{91240B29-F687-4F45-9708-019B960494DF}">
+              <a14:hiddenLine xmlns:a14="http://schemas.microsoft.com/office/drawing/2010/main" w="12700" cap="flat" cmpd="sng" algn="ctr">
+                <a:solidFill>
+                  <a:schemeClr val="accent1">
+                    <a:shade val="50000"/>
+                  </a:schemeClr>
+                </a:solidFill>
+                <a:prstDash val="solid"/>
+                <a:miter lim="800000"/>
+              </a14:hiddenLine>
+            </a:ext>
+          </a:extLst>
+        </p:spPr>
+        <p:style>
+          <a:lnRef idx="2">
+            <a:schemeClr val="accent1">
+              <a:shade val="50000"/>
+            </a:schemeClr>
+          </a:lnRef>
+          <a:fillRef idx="1">
+            <a:schemeClr val="accent1"/>
+          </a:fillRef>
+          <a:effectRef idx="0">
+            <a:schemeClr val="accent1"/>
+          </a:effectRef>
+          <a:fontRef idx="minor">
+            <a:schemeClr val="lt1"/>
+          </a:fontRef>
+        </p:style>
+        <p:txBody>
+          <a:bodyPr rtlCol="0" anchor="ctr"/>
+          <a:lstStyle/>
+          <a:p>
+            <a:pPr algn="ctr"/>
+            <a:endParaRPr lang="en-US"/>
+          </a:p>
+        </p:txBody>
+      </p:sp>
+      <p:grpSp>
+        <p:nvGrpSpPr>
+          <p:cNvPr id="14" name="Group 13">
+            <a:extLst>
+              <a:ext uri="{FF2B5EF4-FFF2-40B4-BE49-F238E27FC236}">
+                <a16:creationId xmlns:a16="http://schemas.microsoft.com/office/drawing/2014/main" id="{F6475BEA-6F3F-B90C-D57F-7B8A81759D04}"/>
+              </a:ext>
+              <a:ext uri="{C183D7F6-B498-43B3-948B-1728B52AA6E4}">
+                <adec:decorative xmlns:adec="http://schemas.microsoft.com/office/drawing/2017/decorative" val="1"/>
+              </a:ext>
+            </a:extLst>
+          </p:cNvPr>
+          <p:cNvGrpSpPr>
+            <a:grpSpLocks noGrp="1" noUngrp="1" noRot="1" noChangeAspect="1" noMove="1" noResize="1"/>
+          </p:cNvGrpSpPr>
+          <p:nvPr>
+            <p:extLst>
+              <p:ext uri="{386F3935-93C4-4BCD-93E2-E3B085C9AB24}">
+                <p16:designElem xmlns:p16="http://schemas.microsoft.com/office/powerpoint/2015/main" val="1"/>
+              </p:ext>
+            </p:extLst>
+          </p:nvPr>
+        </p:nvGrpSpPr>
+        <p:grpSpPr>
+          <a:xfrm>
+            <a:off x="0" y="0"/>
+            <a:ext cx="12199030" cy="1576446"/>
+            <a:chOff x="0" y="0"/>
+            <a:chExt cx="12192002" cy="1576446"/>
+          </a:xfrm>
+        </p:grpSpPr>
+        <p:sp>
+          <p:nvSpPr>
+            <p:cNvPr id="15" name="Rectangle 14">
+              <a:extLst>
+                <a:ext uri="{FF2B5EF4-FFF2-40B4-BE49-F238E27FC236}">
+                  <a16:creationId xmlns:a16="http://schemas.microsoft.com/office/drawing/2014/main" id="{50E0B933-29DB-B530-82FF-4742118DF661}"/>
+                </a:ext>
+                <a:ext uri="{C183D7F6-B498-43B3-948B-1728B52AA6E4}">
+                  <adec:decorative xmlns:adec="http://schemas.microsoft.com/office/drawing/2017/decorative" val="1"/>
+                </a:ext>
+              </a:extLst>
+            </p:cNvPr>
+            <p:cNvSpPr/>
+            <p:nvPr>
+              <p:extLst>
+                <p:ext uri="{386F3935-93C4-4BCD-93E2-E3B085C9AB24}">
+                  <p16:designElem xmlns:p16="http://schemas.microsoft.com/office/powerpoint/2015/main" val="1"/>
+                </p:ext>
+              </p:extLst>
+            </p:nvPr>
+          </p:nvSpPr>
+          <p:spPr>
+            <a:xfrm rot="10800000" flipH="1">
+              <a:off x="2" y="0"/>
+              <a:ext cx="12191998" cy="1575955"/>
+            </a:xfrm>
+            <a:prstGeom prst="rect">
+              <a:avLst/>
+            </a:prstGeom>
+            <a:gradFill>
+              <a:gsLst>
+                <a:gs pos="0">
+                  <a:srgbClr val="000000">
+                    <a:alpha val="96000"/>
+                  </a:srgbClr>
+                </a:gs>
+                <a:gs pos="100000">
+                  <a:schemeClr val="accent1">
+                    <a:lumMod val="75000"/>
+                  </a:schemeClr>
+                </a:gs>
+              </a:gsLst>
+              <a:lin ang="8400000" scaled="0"/>
+            </a:gradFill>
+            <a:ln>
+              <a:noFill/>
+            </a:ln>
+          </p:spPr>
+          <p:style>
+            <a:lnRef idx="2">
+              <a:schemeClr val="accent1">
+                <a:shade val="50000"/>
+              </a:schemeClr>
+            </a:lnRef>
+            <a:fillRef idx="1">
+              <a:schemeClr val="accent1"/>
+            </a:fillRef>
+            <a:effectRef idx="0">
+              <a:schemeClr val="accent1"/>
+            </a:effectRef>
+            <a:fontRef idx="minor">
+              <a:schemeClr val="lt1"/>
+            </a:fontRef>
+          </p:style>
+          <p:txBody>
+            <a:bodyPr rtlCol="0" anchor="ctr"/>
+            <a:lstStyle/>
+            <a:p>
+              <a:pPr algn="ctr"/>
+              <a:endParaRPr lang="en-US"/>
+            </a:p>
+          </p:txBody>
+        </p:sp>
+        <p:sp>
+          <p:nvSpPr>
+            <p:cNvPr id="16" name="Rectangle 15">
+              <a:extLst>
+                <a:ext uri="{FF2B5EF4-FFF2-40B4-BE49-F238E27FC236}">
+                  <a16:creationId xmlns:a16="http://schemas.microsoft.com/office/drawing/2014/main" id="{A33F9BAF-770F-F6CF-F5D9-5D1AF2150097}"/>
+                </a:ext>
+                <a:ext uri="{C183D7F6-B498-43B3-948B-1728B52AA6E4}">
+                  <adec:decorative xmlns:adec="http://schemas.microsoft.com/office/drawing/2017/decorative" val="1"/>
+                </a:ext>
+              </a:extLst>
+            </p:cNvPr>
+            <p:cNvSpPr/>
+            <p:nvPr>
+              <p:extLst>
+                <p:ext uri="{386F3935-93C4-4BCD-93E2-E3B085C9AB24}">
+                  <p16:designElem xmlns:p16="http://schemas.microsoft.com/office/powerpoint/2015/main" val="1"/>
+                </p:ext>
+              </p:extLst>
+            </p:nvPr>
+          </p:nvSpPr>
+          <p:spPr>
+            <a:xfrm rot="16200000">
+              <a:off x="5307778" y="-5307778"/>
+              <a:ext cx="1576446" cy="12192002"/>
+            </a:xfrm>
+            <a:prstGeom prst="rect">
+              <a:avLst/>
+            </a:prstGeom>
+            <a:gradFill>
+              <a:gsLst>
+                <a:gs pos="45000">
+                  <a:schemeClr val="accent1">
+                    <a:alpha val="0"/>
+                  </a:schemeClr>
+                </a:gs>
+                <a:gs pos="99000">
+                  <a:srgbClr val="000000">
+                    <a:alpha val="74000"/>
+                  </a:srgbClr>
+                </a:gs>
+              </a:gsLst>
+              <a:lin ang="11400000" scaled="0"/>
+            </a:gradFill>
+            <a:ln>
+              <a:noFill/>
+            </a:ln>
+          </p:spPr>
+          <p:style>
+            <a:lnRef idx="2">
+              <a:schemeClr val="accent1">
+                <a:shade val="50000"/>
+              </a:schemeClr>
+            </a:lnRef>
+            <a:fillRef idx="1">
+              <a:schemeClr val="accent1"/>
+            </a:fillRef>
+            <a:effectRef idx="0">
+              <a:schemeClr val="accent1"/>
+            </a:effectRef>
+            <a:fontRef idx="minor">
+              <a:schemeClr val="lt1"/>
+            </a:fontRef>
+          </p:style>
+          <p:txBody>
+            <a:bodyPr rtlCol="0" anchor="ctr"/>
+            <a:lstStyle/>
+            <a:p>
+              <a:pPr algn="ctr"/>
+              <a:endParaRPr lang="en-US" dirty="0"/>
+            </a:p>
+          </p:txBody>
+        </p:sp>
+        <p:sp>
+          <p:nvSpPr>
+            <p:cNvPr id="17" name="Rectangle 16">
+              <a:extLst>
+                <a:ext uri="{FF2B5EF4-FFF2-40B4-BE49-F238E27FC236}">
+                  <a16:creationId xmlns:a16="http://schemas.microsoft.com/office/drawing/2014/main" id="{7B7A6F11-0691-CB54-B9A0-4DC6717D1D03}"/>
+                </a:ext>
+                <a:ext uri="{C183D7F6-B498-43B3-948B-1728B52AA6E4}">
+                  <adec:decorative xmlns:adec="http://schemas.microsoft.com/office/drawing/2017/decorative" val="1"/>
+                </a:ext>
+              </a:extLst>
+            </p:cNvPr>
+            <p:cNvSpPr/>
+            <p:nvPr>
+              <p:extLst>
+                <p:ext uri="{386F3935-93C4-4BCD-93E2-E3B085C9AB24}">
+                  <p16:designElem xmlns:p16="http://schemas.microsoft.com/office/powerpoint/2015/main" val="1"/>
+                </p:ext>
+              </p:extLst>
+            </p:nvPr>
+          </p:nvSpPr>
+          <p:spPr>
+            <a:xfrm>
+              <a:off x="3825434" y="0"/>
+              <a:ext cx="4303422" cy="1575461"/>
+            </a:xfrm>
+            <a:prstGeom prst="rect">
+              <a:avLst/>
+            </a:prstGeom>
+            <a:gradFill>
+              <a:gsLst>
+                <a:gs pos="0">
+                  <a:schemeClr val="accent1">
+                    <a:alpha val="17000"/>
+                  </a:schemeClr>
+                </a:gs>
+                <a:gs pos="74000">
+                  <a:schemeClr val="accent1">
+                    <a:lumMod val="50000"/>
+                    <a:alpha val="0"/>
+                  </a:schemeClr>
+                </a:gs>
+              </a:gsLst>
+              <a:lin ang="14400000" scaled="0"/>
+            </a:gradFill>
+            <a:ln>
+              <a:noFill/>
+            </a:ln>
+          </p:spPr>
+          <p:style>
+            <a:lnRef idx="2">
+              <a:schemeClr val="accent1">
+                <a:shade val="50000"/>
+              </a:schemeClr>
+            </a:lnRef>
+            <a:fillRef idx="1">
+              <a:schemeClr val="accent1"/>
+            </a:fillRef>
+            <a:effectRef idx="0">
+              <a:schemeClr val="accent1"/>
+            </a:effectRef>
+            <a:fontRef idx="minor">
+              <a:schemeClr val="lt1"/>
+            </a:fontRef>
+          </p:style>
+          <p:txBody>
+            <a:bodyPr rtlCol="0" anchor="ctr"/>
+            <a:lstStyle/>
+            <a:p>
+              <a:pPr algn="ctr"/>
+              <a:endParaRPr lang="en-US"/>
+            </a:p>
+          </p:txBody>
+        </p:sp>
+      </p:grpSp>
       <p:sp>
         <p:nvSpPr>
           <p:cNvPr id="2" name="Title 1">
             <a:extLst>
               <a:ext uri="{FF2B5EF4-FFF2-40B4-BE49-F238E27FC236}">
-                <a16:creationId xmlns:a16="http://schemas.microsoft.com/office/drawing/2014/main" id="{0457A027-35E6-60E0-B6F4-488536058D4D}"/>
+                <a16:creationId xmlns:a16="http://schemas.microsoft.com/office/drawing/2014/main" id="{6A94B1C6-9F17-30E6-7D57-3906A502AF70}"/>
               </a:ext>
             </a:extLst>
           </p:cNvPr>
@@ -21662,14 +22470,25 @@
             <p:ph type="title"/>
           </p:nvPr>
         </p:nvSpPr>
-        <p:spPr/>
+        <p:spPr>
+          <a:xfrm>
+            <a:off x="1371598" y="319314"/>
+            <a:ext cx="9477377" cy="1030515"/>
+          </a:xfrm>
+        </p:spPr>
         <p:txBody>
-          <a:bodyPr/>
+          <a:bodyPr anchor="ctr">
+            <a:normAutofit/>
+          </a:bodyPr>
           <a:lstStyle/>
           <a:p>
             <a:r>
-              <a:rPr lang="en-GB" dirty="0"/>
-              <a:t>Future work</a:t>
+              <a:rPr lang="en-GB" sz="4000">
+                <a:solidFill>
+                  <a:srgbClr val="FFFFFF"/>
+                </a:solidFill>
+              </a:rPr>
+              <a:t>Current progress</a:t>
             </a:r>
           </a:p>
         </p:txBody>
@@ -21679,7 +22498,7 @@
           <p:cNvPr id="3" name="Content Placeholder 2">
             <a:extLst>
               <a:ext uri="{FF2B5EF4-FFF2-40B4-BE49-F238E27FC236}">
-                <a16:creationId xmlns:a16="http://schemas.microsoft.com/office/drawing/2014/main" id="{7FF13E4E-51CC-1C06-A252-C18C5D4D5C1A}"/>
+                <a16:creationId xmlns:a16="http://schemas.microsoft.com/office/drawing/2014/main" id="{1C09915D-3BB3-9C3D-E81E-0B84D1075525}"/>
               </a:ext>
             </a:extLst>
           </p:cNvPr>
@@ -21690,7 +22509,12 @@
             <p:ph idx="1"/>
           </p:nvPr>
         </p:nvSpPr>
-        <p:spPr/>
+        <p:spPr>
+          <a:xfrm>
+            <a:off x="1371598" y="5070346"/>
+            <a:ext cx="9496427" cy="1385266"/>
+          </a:xfrm>
+        </p:spPr>
         <p:txBody>
           <a:bodyPr>
             <a:normAutofit/>
@@ -21699,38 +22523,81 @@
           <a:p>
             <a:r>
               <a:rPr lang="en-GB" sz="2000" dirty="0"/>
-              <a:t>Going forward with this project, I will be looking into various methods of bypassing securities or making the attack more realistic. These include:</a:t>
+              <a:t>This more dynamic website allows for tracking if the user is a user to LLM based upon its User-Agent</a:t>
             </a:r>
           </a:p>
           <a:p>
             <a:r>
               <a:rPr lang="en-GB" sz="2000" dirty="0"/>
-              <a:t>Using </a:t>
+              <a:t>It also tracks the URL allowing for data exfiltration per Rall et al [2]</a:t>
             </a:r>
-            <a:r>
-              <a:rPr lang="en-GB" sz="2000" dirty="0" err="1"/>
-              <a:t>User_Client</a:t>
-            </a:r>
-            <a:r>
-              <a:rPr lang="en-GB" sz="2000" dirty="0"/>
-              <a:t> data to vary webpages dependant on who/what is viewing them</a:t>
-            </a:r>
-          </a:p>
-          <a:p>
-            <a:r>
-              <a:rPr lang="en-GB" sz="2000" dirty="0"/>
-              <a:t>Exploring various attack vectors such as user data retrieval or code infiltration</a:t>
-            </a:r>
-          </a:p>
-          <a:p>
-            <a:endParaRPr lang="en-GB" sz="2000" dirty="0"/>
           </a:p>
         </p:txBody>
       </p:sp>
+      <p:pic>
+        <p:nvPicPr>
+          <p:cNvPr id="9" name="Picture 8">
+            <a:extLst>
+              <a:ext uri="{FF2B5EF4-FFF2-40B4-BE49-F238E27FC236}">
+                <a16:creationId xmlns:a16="http://schemas.microsoft.com/office/drawing/2014/main" id="{A96829A8-EA14-D61F-70CC-F322582D50F0}"/>
+              </a:ext>
+            </a:extLst>
+          </p:cNvPr>
+          <p:cNvPicPr>
+            <a:picLocks noChangeAspect="1"/>
+          </p:cNvPicPr>
+          <p:nvPr/>
+        </p:nvPicPr>
+        <p:blipFill>
+          <a:blip r:embed="rId2"/>
+          <a:stretch>
+            <a:fillRect/>
+          </a:stretch>
+        </p:blipFill>
+        <p:spPr>
+          <a:xfrm>
+            <a:off x="266262" y="2956658"/>
+            <a:ext cx="5829738" cy="706635"/>
+          </a:xfrm>
+          <a:prstGeom prst="rect">
+            <a:avLst/>
+          </a:prstGeom>
+        </p:spPr>
+      </p:pic>
+      <p:pic>
+        <p:nvPicPr>
+          <p:cNvPr id="11" name="Picture 10">
+            <a:extLst>
+              <a:ext uri="{FF2B5EF4-FFF2-40B4-BE49-F238E27FC236}">
+                <a16:creationId xmlns:a16="http://schemas.microsoft.com/office/drawing/2014/main" id="{53E70B97-C260-6708-32EC-74DAEDF414FE}"/>
+              </a:ext>
+            </a:extLst>
+          </p:cNvPr>
+          <p:cNvPicPr>
+            <a:picLocks noChangeAspect="1"/>
+          </p:cNvPicPr>
+          <p:nvPr/>
+        </p:nvPicPr>
+        <p:blipFill>
+          <a:blip r:embed="rId3"/>
+          <a:stretch>
+            <a:fillRect/>
+          </a:stretch>
+        </p:blipFill>
+        <p:spPr>
+          <a:xfrm>
+            <a:off x="6496488" y="3126735"/>
+            <a:ext cx="4743443" cy="278583"/>
+          </a:xfrm>
+          <a:prstGeom prst="rect">
+            <a:avLst/>
+          </a:prstGeom>
+        </p:spPr>
+      </p:pic>
     </p:spTree>
     <p:extLst>
       <p:ext uri="{BB962C8B-B14F-4D97-AF65-F5344CB8AC3E}">
-        <p14:creationId xmlns:p14="http://schemas.microsoft.com/office/powerpoint/2010/main" val="91252362"/>
+        <p14:creationId xmlns:p14="http://schemas.microsoft.com/office/powerpoint/2010/main" val="477649986"/>
       </p:ext>
     </p:extLst>
   </p:cSld>
@@ -22441,6 +23308,14 @@
 <file path=ppt/slides/slide16.xml><?xml version="1.0" encoding="utf-8"?>
 <p:sld xmlns:a="http://schemas.openxmlformats.org/drawingml/2006/main" xmlns:r="http://schemas.openxmlformats.org/officeDocument/2006/relationships" xmlns:p="http://schemas.openxmlformats.org/presentationml/2006/main">
   <p:cSld>
+    <p:bg>
+      <p:bgPr>
+        <a:solidFill>
+          <a:schemeClr val="bg1"/>
+        </a:solidFill>
+        <a:effectLst/>
+      </p:bgPr>
+    </p:bg>
     <p:spTree>
       <p:nvGrpSpPr>
         <p:cNvPr id="1" name=""/>
@@ -22455,6 +23330,628 @@
           <a:chExt cx="0" cy="0"/>
         </a:xfrm>
       </p:grpSpPr>
+      <p:sp useBgFill="1">
+        <p:nvSpPr>
+          <p:cNvPr id="8" name="Rectangle 7">
+            <a:extLst>
+              <a:ext uri="{FF2B5EF4-FFF2-40B4-BE49-F238E27FC236}">
+                <a16:creationId xmlns:a16="http://schemas.microsoft.com/office/drawing/2014/main" id="{09588DA8-065E-4F6F-8EFD-43104AB2E0CF}"/>
+              </a:ext>
+              <a:ext uri="{C183D7F6-B498-43B3-948B-1728B52AA6E4}">
+                <adec:decorative xmlns:adec="http://schemas.microsoft.com/office/drawing/2017/decorative" val="1"/>
+              </a:ext>
+            </a:extLst>
+          </p:cNvPr>
+          <p:cNvSpPr>
+            <a:spLocks noGrp="1" noRot="1" noChangeAspect="1" noMove="1" noResize="1" noEditPoints="1" noAdjustHandles="1" noChangeArrowheads="1" noChangeShapeType="1" noTextEdit="1"/>
+          </p:cNvSpPr>
+          <p:nvPr>
+            <p:extLst>
+              <p:ext uri="{386F3935-93C4-4BCD-93E2-E3B085C9AB24}">
+                <p16:designElem xmlns:p16="http://schemas.microsoft.com/office/powerpoint/2015/main" val="1"/>
+              </p:ext>
+            </p:extLst>
+          </p:nvPr>
+        </p:nvSpPr>
+        <p:spPr>
+          <a:xfrm>
+            <a:off x="0" y="0"/>
+            <a:ext cx="12192000" cy="6858000"/>
+          </a:xfrm>
+          <a:prstGeom prst="rect">
+            <a:avLst/>
+          </a:prstGeom>
+          <a:ln w="12700" cap="flat" cmpd="sng" algn="ctr">
+            <a:noFill/>
+            <a:prstDash val="solid"/>
+            <a:miter lim="800000"/>
+          </a:ln>
+          <a:effectLst/>
+          <a:extLst>
+            <a:ext uri="{91240B29-F687-4F45-9708-019B960494DF}">
+              <a14:hiddenLine xmlns:a14="http://schemas.microsoft.com/office/drawing/2010/main" w="12700" cap="flat" cmpd="sng" algn="ctr">
+                <a:solidFill>
+                  <a:schemeClr val="accent1">
+                    <a:shade val="50000"/>
+                  </a:schemeClr>
+                </a:solidFill>
+                <a:prstDash val="solid"/>
+                <a:miter lim="800000"/>
+              </a14:hiddenLine>
+            </a:ext>
+          </a:extLst>
+        </p:spPr>
+        <p:style>
+          <a:lnRef idx="2">
+            <a:schemeClr val="accent1">
+              <a:shade val="50000"/>
+            </a:schemeClr>
+          </a:lnRef>
+          <a:fillRef idx="1">
+            <a:schemeClr val="accent1"/>
+          </a:fillRef>
+          <a:effectRef idx="0">
+            <a:schemeClr val="accent1"/>
+          </a:effectRef>
+          <a:fontRef idx="minor">
+            <a:schemeClr val="lt1"/>
+          </a:fontRef>
+        </p:style>
+        <p:txBody>
+          <a:bodyPr rtlCol="0" anchor="ctr"/>
+          <a:lstStyle/>
+          <a:p>
+            <a:pPr algn="ctr"/>
+            <a:endParaRPr lang="en-US"/>
+          </a:p>
+        </p:txBody>
+      </p:sp>
+      <p:sp useBgFill="1">
+        <p:nvSpPr>
+          <p:cNvPr id="10" name="Rectangle 9">
+            <a:extLst>
+              <a:ext uri="{FF2B5EF4-FFF2-40B4-BE49-F238E27FC236}">
+                <a16:creationId xmlns:a16="http://schemas.microsoft.com/office/drawing/2014/main" id="{C4285719-470E-454C-AF62-8323075F1F5B}"/>
+              </a:ext>
+              <a:ext uri="{C183D7F6-B498-43B3-948B-1728B52AA6E4}">
+                <adec:decorative xmlns:adec="http://schemas.microsoft.com/office/drawing/2017/decorative" val="1"/>
+              </a:ext>
+            </a:extLst>
+          </p:cNvPr>
+          <p:cNvSpPr>
+            <a:spLocks noGrp="1" noRot="1" noChangeAspect="1" noMove="1" noResize="1" noEditPoints="1" noAdjustHandles="1" noChangeArrowheads="1" noChangeShapeType="1" noTextEdit="1"/>
+          </p:cNvSpPr>
+          <p:nvPr>
+            <p:extLst>
+              <p:ext uri="{386F3935-93C4-4BCD-93E2-E3B085C9AB24}">
+                <p16:designElem xmlns:p16="http://schemas.microsoft.com/office/powerpoint/2015/main" val="1"/>
+              </p:ext>
+            </p:extLst>
+          </p:nvPr>
+        </p:nvSpPr>
+        <p:spPr>
+          <a:xfrm>
+            <a:off x="0" y="0"/>
+            <a:ext cx="12188952" cy="6858000"/>
+          </a:xfrm>
+          <a:prstGeom prst="rect">
+            <a:avLst/>
+          </a:prstGeom>
+          <a:ln w="12700" cap="flat" cmpd="sng" algn="ctr">
+            <a:noFill/>
+            <a:prstDash val="solid"/>
+            <a:miter lim="800000"/>
+          </a:ln>
+          <a:effectLst/>
+          <a:extLst>
+            <a:ext uri="{91240B29-F687-4F45-9708-019B960494DF}">
+              <a14:hiddenLine xmlns:a14="http://schemas.microsoft.com/office/drawing/2010/main" w="12700" cap="flat" cmpd="sng" algn="ctr">
+                <a:solidFill>
+                  <a:schemeClr val="accent1">
+                    <a:shade val="50000"/>
+                  </a:schemeClr>
+                </a:solidFill>
+                <a:prstDash val="solid"/>
+                <a:miter lim="800000"/>
+              </a14:hiddenLine>
+            </a:ext>
+          </a:extLst>
+        </p:spPr>
+        <p:style>
+          <a:lnRef idx="2">
+            <a:schemeClr val="accent1">
+              <a:shade val="50000"/>
+            </a:schemeClr>
+          </a:lnRef>
+          <a:fillRef idx="1">
+            <a:schemeClr val="accent1"/>
+          </a:fillRef>
+          <a:effectRef idx="0">
+            <a:schemeClr val="accent1"/>
+          </a:effectRef>
+          <a:fontRef idx="minor">
+            <a:schemeClr val="lt1"/>
+          </a:fontRef>
+        </p:style>
+        <p:txBody>
+          <a:bodyPr rtlCol="0" anchor="ctr"/>
+          <a:lstStyle/>
+          <a:p>
+            <a:pPr algn="ctr"/>
+            <a:endParaRPr lang="en-US"/>
+          </a:p>
+        </p:txBody>
+      </p:sp>
+      <p:sp>
+        <p:nvSpPr>
+          <p:cNvPr id="12" name="Rectangle 11">
+            <a:extLst>
+              <a:ext uri="{FF2B5EF4-FFF2-40B4-BE49-F238E27FC236}">
+                <a16:creationId xmlns:a16="http://schemas.microsoft.com/office/drawing/2014/main" id="{CD9FE4EF-C4D8-49A0-B2FF-81D8DB7D8A24}"/>
+              </a:ext>
+              <a:ext uri="{C183D7F6-B498-43B3-948B-1728B52AA6E4}">
+                <adec:decorative xmlns:adec="http://schemas.microsoft.com/office/drawing/2017/decorative" val="1"/>
+              </a:ext>
+            </a:extLst>
+          </p:cNvPr>
+          <p:cNvSpPr>
+            <a:spLocks noGrp="1" noRot="1" noChangeAspect="1" noMove="1" noResize="1" noEditPoints="1" noAdjustHandles="1" noChangeArrowheads="1" noChangeShapeType="1" noTextEdit="1"/>
+          </p:cNvSpPr>
+          <p:nvPr>
+            <p:extLst>
+              <p:ext uri="{386F3935-93C4-4BCD-93E2-E3B085C9AB24}">
+                <p16:designElem xmlns:p16="http://schemas.microsoft.com/office/powerpoint/2015/main" val="1"/>
+              </p:ext>
+            </p:extLst>
+          </p:nvPr>
+        </p:nvSpPr>
+        <p:spPr>
+          <a:xfrm rot="5400000" flipH="1">
+            <a:off x="-1410084" y="1410082"/>
+            <a:ext cx="6858000" cy="4037836"/>
+          </a:xfrm>
+          <a:prstGeom prst="rect">
+            <a:avLst/>
+          </a:prstGeom>
+          <a:gradFill>
+            <a:gsLst>
+              <a:gs pos="8000">
+                <a:srgbClr val="000000"/>
+              </a:gs>
+              <a:gs pos="100000">
+                <a:schemeClr val="accent1">
+                  <a:lumMod val="75000"/>
+                </a:schemeClr>
+              </a:gs>
+            </a:gsLst>
+            <a:lin ang="3000000" scaled="0"/>
+          </a:gradFill>
+          <a:ln>
+            <a:noFill/>
+          </a:ln>
+        </p:spPr>
+        <p:style>
+          <a:lnRef idx="2">
+            <a:schemeClr val="accent1">
+              <a:shade val="50000"/>
+            </a:schemeClr>
+          </a:lnRef>
+          <a:fillRef idx="1">
+            <a:schemeClr val="accent1"/>
+          </a:fillRef>
+          <a:effectRef idx="0">
+            <a:schemeClr val="accent1"/>
+          </a:effectRef>
+          <a:fontRef idx="minor">
+            <a:schemeClr val="lt1"/>
+          </a:fontRef>
+        </p:style>
+        <p:txBody>
+          <a:bodyPr rtlCol="0" anchor="ctr"/>
+          <a:lstStyle/>
+          <a:p>
+            <a:pPr algn="ctr"/>
+            <a:endParaRPr lang="en-US"/>
+          </a:p>
+        </p:txBody>
+      </p:sp>
+      <p:sp>
+        <p:nvSpPr>
+          <p:cNvPr id="14" name="Rectangle 13">
+            <a:extLst>
+              <a:ext uri="{FF2B5EF4-FFF2-40B4-BE49-F238E27FC236}">
+                <a16:creationId xmlns:a16="http://schemas.microsoft.com/office/drawing/2014/main" id="{4300840D-0A0B-4512-BACA-B439D5B9C57C}"/>
+              </a:ext>
+              <a:ext uri="{C183D7F6-B498-43B3-948B-1728B52AA6E4}">
+                <adec:decorative xmlns:adec="http://schemas.microsoft.com/office/drawing/2017/decorative" val="1"/>
+              </a:ext>
+            </a:extLst>
+          </p:cNvPr>
+          <p:cNvSpPr>
+            <a:spLocks noGrp="1" noRot="1" noChangeAspect="1" noMove="1" noResize="1" noEditPoints="1" noAdjustHandles="1" noChangeArrowheads="1" noChangeShapeType="1" noTextEdit="1"/>
+          </p:cNvSpPr>
+          <p:nvPr>
+            <p:extLst>
+              <p:ext uri="{386F3935-93C4-4BCD-93E2-E3B085C9AB24}">
+                <p16:designElem xmlns:p16="http://schemas.microsoft.com/office/powerpoint/2015/main" val="1"/>
+              </p:ext>
+            </p:extLst>
+          </p:nvPr>
+        </p:nvSpPr>
+        <p:spPr>
+          <a:xfrm rot="5400000" flipH="1">
+            <a:off x="-1410085" y="1420219"/>
+            <a:ext cx="6857999" cy="4037839"/>
+          </a:xfrm>
+          <a:prstGeom prst="rect">
+            <a:avLst/>
+          </a:prstGeom>
+          <a:gradFill>
+            <a:gsLst>
+              <a:gs pos="0">
+                <a:srgbClr val="000000">
+                  <a:alpha val="0"/>
+                </a:srgbClr>
+              </a:gs>
+              <a:gs pos="99000">
+                <a:schemeClr val="accent1">
+                  <a:alpha val="46000"/>
+                </a:schemeClr>
+              </a:gs>
+            </a:gsLst>
+            <a:lin ang="1800000" scaled="0"/>
+          </a:gradFill>
+          <a:ln>
+            <a:noFill/>
+          </a:ln>
+        </p:spPr>
+        <p:style>
+          <a:lnRef idx="2">
+            <a:schemeClr val="accent1">
+              <a:shade val="50000"/>
+            </a:schemeClr>
+          </a:lnRef>
+          <a:fillRef idx="1">
+            <a:schemeClr val="accent1"/>
+          </a:fillRef>
+          <a:effectRef idx="0">
+            <a:schemeClr val="accent1"/>
+          </a:effectRef>
+          <a:fontRef idx="minor">
+            <a:schemeClr val="lt1"/>
+          </a:fontRef>
+        </p:style>
+        <p:txBody>
+          <a:bodyPr rtlCol="0" anchor="ctr"/>
+          <a:lstStyle/>
+          <a:p>
+            <a:pPr algn="ctr"/>
+            <a:endParaRPr lang="en-US"/>
+          </a:p>
+        </p:txBody>
+      </p:sp>
+      <p:sp>
+        <p:nvSpPr>
+          <p:cNvPr id="16" name="Rectangle 15">
+            <a:extLst>
+              <a:ext uri="{FF2B5EF4-FFF2-40B4-BE49-F238E27FC236}">
+                <a16:creationId xmlns:a16="http://schemas.microsoft.com/office/drawing/2014/main" id="{D2B78728-A580-49A7-84F9-6EF6F583ADE0}"/>
+              </a:ext>
+              <a:ext uri="{C183D7F6-B498-43B3-948B-1728B52AA6E4}">
+                <adec:decorative xmlns:adec="http://schemas.microsoft.com/office/drawing/2017/decorative" val="1"/>
+              </a:ext>
+            </a:extLst>
+          </p:cNvPr>
+          <p:cNvSpPr>
+            <a:spLocks noGrp="1" noRot="1" noChangeAspect="1" noMove="1" noResize="1" noEditPoints="1" noAdjustHandles="1" noChangeArrowheads="1" noChangeShapeType="1" noTextEdit="1"/>
+          </p:cNvSpPr>
+          <p:nvPr>
+            <p:extLst>
+              <p:ext uri="{386F3935-93C4-4BCD-93E2-E3B085C9AB24}">
+                <p16:designElem xmlns:p16="http://schemas.microsoft.com/office/powerpoint/2015/main" val="1"/>
+              </p:ext>
+            </p:extLst>
+          </p:nvPr>
+        </p:nvSpPr>
+        <p:spPr>
+          <a:xfrm rot="5400000" flipH="1">
+            <a:off x="767923" y="3588085"/>
+            <a:ext cx="2501979" cy="4037841"/>
+          </a:xfrm>
+          <a:prstGeom prst="rect">
+            <a:avLst/>
+          </a:prstGeom>
+          <a:gradFill>
+            <a:gsLst>
+              <a:gs pos="2000">
+                <a:schemeClr val="accent1">
+                  <a:alpha val="29000"/>
+                </a:schemeClr>
+              </a:gs>
+              <a:gs pos="100000">
+                <a:srgbClr val="000000">
+                  <a:alpha val="30000"/>
+                </a:srgbClr>
+              </a:gs>
+            </a:gsLst>
+            <a:lin ang="7800000" scaled="0"/>
+          </a:gradFill>
+          <a:ln>
+            <a:noFill/>
+          </a:ln>
+        </p:spPr>
+        <p:style>
+          <a:lnRef idx="2">
+            <a:schemeClr val="accent1">
+              <a:shade val="50000"/>
+            </a:schemeClr>
+          </a:lnRef>
+          <a:fillRef idx="1">
+            <a:schemeClr val="accent1"/>
+          </a:fillRef>
+          <a:effectRef idx="0">
+            <a:schemeClr val="accent1"/>
+          </a:effectRef>
+          <a:fontRef idx="minor">
+            <a:schemeClr val="lt1"/>
+          </a:fontRef>
+        </p:style>
+        <p:txBody>
+          <a:bodyPr rtlCol="0" anchor="ctr"/>
+          <a:lstStyle/>
+          <a:p>
+            <a:pPr algn="ctr"/>
+            <a:endParaRPr lang="en-US" dirty="0"/>
+          </a:p>
+        </p:txBody>
+      </p:sp>
+      <p:sp>
+        <p:nvSpPr>
+          <p:cNvPr id="18" name="Freeform: Shape 17">
+            <a:extLst>
+              <a:ext uri="{FF2B5EF4-FFF2-40B4-BE49-F238E27FC236}">
+                <a16:creationId xmlns:a16="http://schemas.microsoft.com/office/drawing/2014/main" id="{38FAA1A1-D861-433F-88FA-1E9D6FD31D11}"/>
+              </a:ext>
+              <a:ext uri="{C183D7F6-B498-43B3-948B-1728B52AA6E4}">
+                <adec:decorative xmlns:adec="http://schemas.microsoft.com/office/drawing/2017/decorative" val="1"/>
+              </a:ext>
+            </a:extLst>
+          </p:cNvPr>
+          <p:cNvSpPr>
+            <a:spLocks noGrp="1" noRot="1" noChangeAspect="1" noMove="1" noResize="1" noEditPoints="1" noAdjustHandles="1" noChangeArrowheads="1" noChangeShapeType="1" noTextEdit="1"/>
+          </p:cNvSpPr>
+          <p:nvPr>
+            <p:extLst>
+              <p:ext uri="{386F3935-93C4-4BCD-93E2-E3B085C9AB24}">
+                <p16:designElem xmlns:p16="http://schemas.microsoft.com/office/powerpoint/2015/main" val="1"/>
+              </p:ext>
+            </p:extLst>
+          </p:nvPr>
+        </p:nvSpPr>
+        <p:spPr>
+          <a:xfrm rot="20635413">
+            <a:off x="-501737" y="969718"/>
+            <a:ext cx="3900357" cy="4178958"/>
+          </a:xfrm>
+          <a:custGeom>
+            <a:avLst/>
+            <a:gdLst>
+              <a:gd name="connsiteX0" fmla="*/ 2432225 w 3900357"/>
+              <a:gd name="connsiteY0" fmla="*/ 93939 h 4178958"/>
+              <a:gd name="connsiteX1" fmla="*/ 3900357 w 3900357"/>
+              <a:gd name="connsiteY1" fmla="*/ 2089479 h 4178958"/>
+              <a:gd name="connsiteX2" fmla="*/ 1810878 w 3900357"/>
+              <a:gd name="connsiteY2" fmla="*/ 4178958 h 4178958"/>
+              <a:gd name="connsiteX3" fmla="*/ 78249 w 3900357"/>
+              <a:gd name="connsiteY3" fmla="*/ 3257727 h 4178958"/>
+              <a:gd name="connsiteX4" fmla="*/ 0 w 3900357"/>
+              <a:gd name="connsiteY4" fmla="*/ 3128923 h 4178958"/>
+              <a:gd name="connsiteX5" fmla="*/ 831324 w 3900357"/>
+              <a:gd name="connsiteY5" fmla="*/ 244281 h 4178958"/>
+              <a:gd name="connsiteX6" fmla="*/ 997559 w 3900357"/>
+              <a:gd name="connsiteY6" fmla="*/ 164202 h 4178958"/>
+              <a:gd name="connsiteX7" fmla="*/ 1810878 w 3900357"/>
+              <a:gd name="connsiteY7" fmla="*/ 0 h 4178958"/>
+              <a:gd name="connsiteX8" fmla="*/ 2432225 w 3900357"/>
+              <a:gd name="connsiteY8" fmla="*/ 93939 h 4178958"/>
+            </a:gdLst>
+            <a:ahLst/>
+            <a:cxnLst>
+              <a:cxn ang="0">
+                <a:pos x="connsiteX0" y="connsiteY0"/>
+              </a:cxn>
+              <a:cxn ang="0">
+                <a:pos x="connsiteX1" y="connsiteY1"/>
+              </a:cxn>
+              <a:cxn ang="0">
+                <a:pos x="connsiteX2" y="connsiteY2"/>
+              </a:cxn>
+              <a:cxn ang="0">
+                <a:pos x="connsiteX3" y="connsiteY3"/>
+              </a:cxn>
+              <a:cxn ang="0">
+                <a:pos x="connsiteX4" y="connsiteY4"/>
+              </a:cxn>
+              <a:cxn ang="0">
+                <a:pos x="connsiteX5" y="connsiteY5"/>
+              </a:cxn>
+              <a:cxn ang="0">
+                <a:pos x="connsiteX6" y="connsiteY6"/>
+              </a:cxn>
+              <a:cxn ang="0">
+                <a:pos x="connsiteX7" y="connsiteY7"/>
+              </a:cxn>
+              <a:cxn ang="0">
+                <a:pos x="connsiteX8" y="connsiteY8"/>
+              </a:cxn>
+            </a:cxnLst>
+            <a:rect l="l" t="t" r="r" b="b"/>
+            <a:pathLst>
+              <a:path w="3900357" h="4178958">
+                <a:moveTo>
+                  <a:pt x="2432225" y="93939"/>
+                </a:moveTo>
+                <a:cubicBezTo>
+                  <a:pt x="3282786" y="358491"/>
+                  <a:pt x="3900357" y="1151865"/>
+                  <a:pt x="3900357" y="2089479"/>
+                </a:cubicBezTo>
+                <a:cubicBezTo>
+                  <a:pt x="3900357" y="3243466"/>
+                  <a:pt x="2964865" y="4178958"/>
+                  <a:pt x="1810878" y="4178958"/>
+                </a:cubicBezTo>
+                <a:cubicBezTo>
+                  <a:pt x="1089636" y="4178958"/>
+                  <a:pt x="453744" y="3813531"/>
+                  <a:pt x="78249" y="3257727"/>
+                </a:cubicBezTo>
+                <a:lnTo>
+                  <a:pt x="0" y="3128923"/>
+                </a:lnTo>
+                <a:lnTo>
+                  <a:pt x="831324" y="244281"/>
+                </a:lnTo>
+                <a:lnTo>
+                  <a:pt x="997559" y="164202"/>
+                </a:lnTo>
+                <a:cubicBezTo>
+                  <a:pt x="1247540" y="58468"/>
+                  <a:pt x="1522381" y="0"/>
+                  <a:pt x="1810878" y="0"/>
+                </a:cubicBezTo>
+                <a:cubicBezTo>
+                  <a:pt x="2027251" y="0"/>
+                  <a:pt x="2235942" y="32888"/>
+                  <a:pt x="2432225" y="93939"/>
+                </a:cubicBezTo>
+                <a:close/>
+              </a:path>
+            </a:pathLst>
+          </a:custGeom>
+          <a:gradFill>
+            <a:gsLst>
+              <a:gs pos="29000">
+                <a:srgbClr val="000000">
+                  <a:alpha val="0"/>
+                </a:srgbClr>
+              </a:gs>
+              <a:gs pos="100000">
+                <a:schemeClr val="accent1">
+                  <a:alpha val="43000"/>
+                </a:schemeClr>
+              </a:gs>
+            </a:gsLst>
+            <a:lin ang="1800000" scaled="0"/>
+          </a:gradFill>
+          <a:ln>
+            <a:noFill/>
+          </a:ln>
+        </p:spPr>
+        <p:style>
+          <a:lnRef idx="2">
+            <a:schemeClr val="accent1">
+              <a:shade val="50000"/>
+            </a:schemeClr>
+          </a:lnRef>
+          <a:fillRef idx="1">
+            <a:schemeClr val="accent1"/>
+          </a:fillRef>
+          <a:effectRef idx="0">
+            <a:schemeClr val="accent1"/>
+          </a:effectRef>
+          <a:fontRef idx="minor">
+            <a:schemeClr val="lt1"/>
+          </a:fontRef>
+        </p:style>
+        <p:txBody>
+          <a:bodyPr wrap="square" rtlCol="0" anchor="ctr">
+            <a:noAutofit/>
+          </a:bodyPr>
+          <a:lstStyle/>
+          <a:p>
+            <a:pPr algn="ctr"/>
+            <a:endParaRPr lang="en-US" dirty="0"/>
+          </a:p>
+        </p:txBody>
+      </p:sp>
+      <p:sp>
+        <p:nvSpPr>
+          <p:cNvPr id="20" name="Rectangle 19">
+            <a:extLst>
+              <a:ext uri="{FF2B5EF4-FFF2-40B4-BE49-F238E27FC236}">
+                <a16:creationId xmlns:a16="http://schemas.microsoft.com/office/drawing/2014/main" id="{8D71EDA1-87BF-4D5D-AB79-F346FD19278A}"/>
+              </a:ext>
+              <a:ext uri="{C183D7F6-B498-43B3-948B-1728B52AA6E4}">
+                <adec:decorative xmlns:adec="http://schemas.microsoft.com/office/drawing/2017/decorative" val="1"/>
+              </a:ext>
+            </a:extLst>
+          </p:cNvPr>
+          <p:cNvSpPr>
+            <a:spLocks noGrp="1" noRot="1" noChangeAspect="1" noMove="1" noResize="1" noEditPoints="1" noAdjustHandles="1" noChangeArrowheads="1" noChangeShapeType="1" noTextEdit="1"/>
+          </p:cNvSpPr>
+          <p:nvPr>
+            <p:extLst>
+              <p:ext uri="{386F3935-93C4-4BCD-93E2-E3B085C9AB24}">
+                <p16:designElem xmlns:p16="http://schemas.microsoft.com/office/powerpoint/2015/main" val="1"/>
+              </p:ext>
+            </p:extLst>
+          </p:nvPr>
+        </p:nvSpPr>
+        <p:spPr>
+          <a:xfrm rot="5400000" flipH="1">
+            <a:off x="-1410093" y="1399943"/>
+            <a:ext cx="6858003" cy="4037835"/>
+          </a:xfrm>
+          <a:prstGeom prst="rect">
+            <a:avLst/>
+          </a:prstGeom>
+          <a:gradFill>
+            <a:gsLst>
+              <a:gs pos="0">
+                <a:srgbClr val="000000">
+                  <a:alpha val="0"/>
+                </a:srgbClr>
+              </a:gs>
+              <a:gs pos="99000">
+                <a:schemeClr val="accent1">
+                  <a:lumMod val="60000"/>
+                  <a:lumOff val="40000"/>
+                  <a:alpha val="11000"/>
+                </a:schemeClr>
+              </a:gs>
+            </a:gsLst>
+            <a:lin ang="7200000" scaled="0"/>
+          </a:gradFill>
+          <a:ln>
+            <a:noFill/>
+          </a:ln>
+        </p:spPr>
+        <p:style>
+          <a:lnRef idx="2">
+            <a:schemeClr val="accent1">
+              <a:shade val="50000"/>
+            </a:schemeClr>
+          </a:lnRef>
+          <a:fillRef idx="1">
+            <a:schemeClr val="accent1"/>
+          </a:fillRef>
+          <a:effectRef idx="0">
+            <a:schemeClr val="accent1"/>
+          </a:effectRef>
+          <a:fontRef idx="minor">
+            <a:schemeClr val="lt1"/>
+          </a:fontRef>
+        </p:style>
+        <p:txBody>
+          <a:bodyPr rtlCol="0" anchor="ctr"/>
+          <a:lstStyle/>
+          <a:p>
+            <a:pPr algn="ctr"/>
+            <a:endParaRPr lang="en-US"/>
+          </a:p>
+        </p:txBody>
+      </p:sp>
       <p:sp>
         <p:nvSpPr>
           <p:cNvPr id="2" name="Title 1">
@@ -22471,13 +23968,25 @@
             <p:ph type="title"/>
           </p:nvPr>
         </p:nvSpPr>
-        <p:spPr/>
+        <p:spPr>
+          <a:xfrm>
+            <a:off x="466722" y="586855"/>
+            <a:ext cx="3201366" cy="3387497"/>
+          </a:xfrm>
+        </p:spPr>
         <p:txBody>
-          <a:bodyPr/>
+          <a:bodyPr anchor="b">
+            <a:normAutofit/>
+          </a:bodyPr>
           <a:lstStyle/>
           <a:p>
+            <a:pPr algn="r"/>
             <a:r>
-              <a:rPr lang="en-GB" dirty="0"/>
+              <a:rPr lang="en-GB" sz="4000">
+                <a:solidFill>
+                  <a:srgbClr val="FFFFFF"/>
+                </a:solidFill>
+              </a:rPr>
               <a:t>Concluding reflections</a:t>
             </a:r>
           </a:p>
@@ -22499,12 +24008,31 @@
             <p:ph idx="1"/>
           </p:nvPr>
         </p:nvSpPr>
-        <p:spPr/>
+        <p:spPr>
+          <a:xfrm>
+            <a:off x="4810259" y="649480"/>
+            <a:ext cx="6555347" cy="5546047"/>
+          </a:xfrm>
+        </p:spPr>
         <p:txBody>
-          <a:bodyPr/>
+          <a:bodyPr anchor="ctr">
+            <a:normAutofit/>
+          </a:bodyPr>
           <a:lstStyle/>
           <a:p>
-            <a:endParaRPr lang="en-GB"/>
+            <a:r>
+              <a:rPr lang="en-GB" sz="2000" dirty="0"/>
+              <a:t>A more in depth review of possible models would’ve assisted in understanding vulnerabilities and security architecture better</a:t>
+            </a:r>
+          </a:p>
+          <a:p>
+            <a:r>
+              <a:rPr lang="en-GB" sz="2000" dirty="0"/>
+              <a:t>Potentially taking more time to choose the tech stack and how the deployment was going to work would’ve been useful </a:t>
+            </a:r>
+          </a:p>
+          <a:p>
+            <a:endParaRPr lang="en-GB" sz="2000" dirty="0"/>
           </a:p>
         </p:txBody>
       </p:sp>
@@ -22524,6 +24052,14 @@
 <file path=ppt/slides/slide17.xml><?xml version="1.0" encoding="utf-8"?>
 <p:sld xmlns:a="http://schemas.openxmlformats.org/drawingml/2006/main" xmlns:r="http://schemas.openxmlformats.org/officeDocument/2006/relationships" xmlns:p="http://schemas.openxmlformats.org/presentationml/2006/main">
   <p:cSld>
+    <p:bg>
+      <p:bgPr>
+        <a:solidFill>
+          <a:schemeClr val="bg1"/>
+        </a:solidFill>
+        <a:effectLst/>
+      </p:bgPr>
+    </p:bg>
     <p:spTree>
       <p:nvGrpSpPr>
         <p:cNvPr id="1" name=""/>
@@ -22538,12 +24074,634 @@
           <a:chExt cx="0" cy="0"/>
         </a:xfrm>
       </p:grpSpPr>
+      <p:sp useBgFill="1">
+        <p:nvSpPr>
+          <p:cNvPr id="8" name="Rectangle 7">
+            <a:extLst>
+              <a:ext uri="{FF2B5EF4-FFF2-40B4-BE49-F238E27FC236}">
+                <a16:creationId xmlns:a16="http://schemas.microsoft.com/office/drawing/2014/main" id="{09588DA8-065E-4F6F-8EFD-43104AB2E0CF}"/>
+              </a:ext>
+              <a:ext uri="{C183D7F6-B498-43B3-948B-1728B52AA6E4}">
+                <adec:decorative xmlns:adec="http://schemas.microsoft.com/office/drawing/2017/decorative" val="1"/>
+              </a:ext>
+            </a:extLst>
+          </p:cNvPr>
+          <p:cNvSpPr>
+            <a:spLocks noGrp="1" noRot="1" noChangeAspect="1" noMove="1" noResize="1" noEditPoints="1" noAdjustHandles="1" noChangeArrowheads="1" noChangeShapeType="1" noTextEdit="1"/>
+          </p:cNvSpPr>
+          <p:nvPr>
+            <p:extLst>
+              <p:ext uri="{386F3935-93C4-4BCD-93E2-E3B085C9AB24}">
+                <p16:designElem xmlns:p16="http://schemas.microsoft.com/office/powerpoint/2015/main" val="1"/>
+              </p:ext>
+            </p:extLst>
+          </p:nvPr>
+        </p:nvSpPr>
+        <p:spPr>
+          <a:xfrm>
+            <a:off x="0" y="0"/>
+            <a:ext cx="12192000" cy="6858000"/>
+          </a:xfrm>
+          <a:prstGeom prst="rect">
+            <a:avLst/>
+          </a:prstGeom>
+          <a:ln w="12700" cap="flat" cmpd="sng" algn="ctr">
+            <a:noFill/>
+            <a:prstDash val="solid"/>
+            <a:miter lim="800000"/>
+          </a:ln>
+          <a:effectLst/>
+          <a:extLst>
+            <a:ext uri="{91240B29-F687-4F45-9708-019B960494DF}">
+              <a14:hiddenLine xmlns:a14="http://schemas.microsoft.com/office/drawing/2010/main" w="12700" cap="flat" cmpd="sng" algn="ctr">
+                <a:solidFill>
+                  <a:schemeClr val="accent1">
+                    <a:shade val="50000"/>
+                  </a:schemeClr>
+                </a:solidFill>
+                <a:prstDash val="solid"/>
+                <a:miter lim="800000"/>
+              </a14:hiddenLine>
+            </a:ext>
+          </a:extLst>
+        </p:spPr>
+        <p:style>
+          <a:lnRef idx="2">
+            <a:schemeClr val="accent1">
+              <a:shade val="50000"/>
+            </a:schemeClr>
+          </a:lnRef>
+          <a:fillRef idx="1">
+            <a:schemeClr val="accent1"/>
+          </a:fillRef>
+          <a:effectRef idx="0">
+            <a:schemeClr val="accent1"/>
+          </a:effectRef>
+          <a:fontRef idx="minor">
+            <a:schemeClr val="lt1"/>
+          </a:fontRef>
+        </p:style>
+        <p:txBody>
+          <a:bodyPr rtlCol="0" anchor="ctr"/>
+          <a:lstStyle/>
+          <a:p>
+            <a:pPr algn="ctr"/>
+            <a:endParaRPr lang="en-US"/>
+          </a:p>
+        </p:txBody>
+      </p:sp>
+      <p:sp useBgFill="1">
+        <p:nvSpPr>
+          <p:cNvPr id="10" name="Rectangle 9">
+            <a:extLst>
+              <a:ext uri="{FF2B5EF4-FFF2-40B4-BE49-F238E27FC236}">
+                <a16:creationId xmlns:a16="http://schemas.microsoft.com/office/drawing/2014/main" id="{C4285719-470E-454C-AF62-8323075F1F5B}"/>
+              </a:ext>
+              <a:ext uri="{C183D7F6-B498-43B3-948B-1728B52AA6E4}">
+                <adec:decorative xmlns:adec="http://schemas.microsoft.com/office/drawing/2017/decorative" val="1"/>
+              </a:ext>
+            </a:extLst>
+          </p:cNvPr>
+          <p:cNvSpPr>
+            <a:spLocks noGrp="1" noRot="1" noChangeAspect="1" noMove="1" noResize="1" noEditPoints="1" noAdjustHandles="1" noChangeArrowheads="1" noChangeShapeType="1" noTextEdit="1"/>
+          </p:cNvSpPr>
+          <p:nvPr>
+            <p:extLst>
+              <p:ext uri="{386F3935-93C4-4BCD-93E2-E3B085C9AB24}">
+                <p16:designElem xmlns:p16="http://schemas.microsoft.com/office/powerpoint/2015/main" val="1"/>
+              </p:ext>
+            </p:extLst>
+          </p:nvPr>
+        </p:nvSpPr>
+        <p:spPr>
+          <a:xfrm>
+            <a:off x="0" y="0"/>
+            <a:ext cx="12188952" cy="6858000"/>
+          </a:xfrm>
+          <a:prstGeom prst="rect">
+            <a:avLst/>
+          </a:prstGeom>
+          <a:ln w="12700" cap="flat" cmpd="sng" algn="ctr">
+            <a:noFill/>
+            <a:prstDash val="solid"/>
+            <a:miter lim="800000"/>
+          </a:ln>
+          <a:effectLst/>
+          <a:extLst>
+            <a:ext uri="{91240B29-F687-4F45-9708-019B960494DF}">
+              <a14:hiddenLine xmlns:a14="http://schemas.microsoft.com/office/drawing/2010/main" w="12700" cap="flat" cmpd="sng" algn="ctr">
+                <a:solidFill>
+                  <a:schemeClr val="accent1">
+                    <a:shade val="50000"/>
+                  </a:schemeClr>
+                </a:solidFill>
+                <a:prstDash val="solid"/>
+                <a:miter lim="800000"/>
+              </a14:hiddenLine>
+            </a:ext>
+          </a:extLst>
+        </p:spPr>
+        <p:style>
+          <a:lnRef idx="2">
+            <a:schemeClr val="accent1">
+              <a:shade val="50000"/>
+            </a:schemeClr>
+          </a:lnRef>
+          <a:fillRef idx="1">
+            <a:schemeClr val="accent1"/>
+          </a:fillRef>
+          <a:effectRef idx="0">
+            <a:schemeClr val="accent1"/>
+          </a:effectRef>
+          <a:fontRef idx="minor">
+            <a:schemeClr val="lt1"/>
+          </a:fontRef>
+        </p:style>
+        <p:txBody>
+          <a:bodyPr rtlCol="0" anchor="ctr"/>
+          <a:lstStyle/>
+          <a:p>
+            <a:pPr algn="ctr"/>
+            <a:endParaRPr lang="en-US"/>
+          </a:p>
+        </p:txBody>
+      </p:sp>
+      <p:sp>
+        <p:nvSpPr>
+          <p:cNvPr id="12" name="Rectangle 11">
+            <a:extLst>
+              <a:ext uri="{FF2B5EF4-FFF2-40B4-BE49-F238E27FC236}">
+                <a16:creationId xmlns:a16="http://schemas.microsoft.com/office/drawing/2014/main" id="{CD9FE4EF-C4D8-49A0-B2FF-81D8DB7D8A24}"/>
+              </a:ext>
+              <a:ext uri="{C183D7F6-B498-43B3-948B-1728B52AA6E4}">
+                <adec:decorative xmlns:adec="http://schemas.microsoft.com/office/drawing/2017/decorative" val="1"/>
+              </a:ext>
+            </a:extLst>
+          </p:cNvPr>
+          <p:cNvSpPr>
+            <a:spLocks noGrp="1" noRot="1" noChangeAspect="1" noMove="1" noResize="1" noEditPoints="1" noAdjustHandles="1" noChangeArrowheads="1" noChangeShapeType="1" noTextEdit="1"/>
+          </p:cNvSpPr>
+          <p:nvPr>
+            <p:extLst>
+              <p:ext uri="{386F3935-93C4-4BCD-93E2-E3B085C9AB24}">
+                <p16:designElem xmlns:p16="http://schemas.microsoft.com/office/powerpoint/2015/main" val="1"/>
+              </p:ext>
+            </p:extLst>
+          </p:nvPr>
+        </p:nvSpPr>
+        <p:spPr>
+          <a:xfrm rot="5400000" flipH="1">
+            <a:off x="-1410084" y="1410082"/>
+            <a:ext cx="6858000" cy="4037836"/>
+          </a:xfrm>
+          <a:prstGeom prst="rect">
+            <a:avLst/>
+          </a:prstGeom>
+          <a:gradFill>
+            <a:gsLst>
+              <a:gs pos="8000">
+                <a:srgbClr val="000000"/>
+              </a:gs>
+              <a:gs pos="100000">
+                <a:schemeClr val="accent1">
+                  <a:lumMod val="75000"/>
+                </a:schemeClr>
+              </a:gs>
+            </a:gsLst>
+            <a:lin ang="3000000" scaled="0"/>
+          </a:gradFill>
+          <a:ln>
+            <a:noFill/>
+          </a:ln>
+        </p:spPr>
+        <p:style>
+          <a:lnRef idx="2">
+            <a:schemeClr val="accent1">
+              <a:shade val="50000"/>
+            </a:schemeClr>
+          </a:lnRef>
+          <a:fillRef idx="1">
+            <a:schemeClr val="accent1"/>
+          </a:fillRef>
+          <a:effectRef idx="0">
+            <a:schemeClr val="accent1"/>
+          </a:effectRef>
+          <a:fontRef idx="minor">
+            <a:schemeClr val="lt1"/>
+          </a:fontRef>
+        </p:style>
+        <p:txBody>
+          <a:bodyPr rtlCol="0" anchor="ctr"/>
+          <a:lstStyle/>
+          <a:p>
+            <a:pPr algn="ctr"/>
+            <a:endParaRPr lang="en-US"/>
+          </a:p>
+        </p:txBody>
+      </p:sp>
+      <p:sp>
+        <p:nvSpPr>
+          <p:cNvPr id="14" name="Rectangle 13">
+            <a:extLst>
+              <a:ext uri="{FF2B5EF4-FFF2-40B4-BE49-F238E27FC236}">
+                <a16:creationId xmlns:a16="http://schemas.microsoft.com/office/drawing/2014/main" id="{4300840D-0A0B-4512-BACA-B439D5B9C57C}"/>
+              </a:ext>
+              <a:ext uri="{C183D7F6-B498-43B3-948B-1728B52AA6E4}">
+                <adec:decorative xmlns:adec="http://schemas.microsoft.com/office/drawing/2017/decorative" val="1"/>
+              </a:ext>
+            </a:extLst>
+          </p:cNvPr>
+          <p:cNvSpPr>
+            <a:spLocks noGrp="1" noRot="1" noChangeAspect="1" noMove="1" noResize="1" noEditPoints="1" noAdjustHandles="1" noChangeArrowheads="1" noChangeShapeType="1" noTextEdit="1"/>
+          </p:cNvSpPr>
+          <p:nvPr>
+            <p:extLst>
+              <p:ext uri="{386F3935-93C4-4BCD-93E2-E3B085C9AB24}">
+                <p16:designElem xmlns:p16="http://schemas.microsoft.com/office/powerpoint/2015/main" val="1"/>
+              </p:ext>
+            </p:extLst>
+          </p:nvPr>
+        </p:nvSpPr>
+        <p:spPr>
+          <a:xfrm rot="5400000" flipH="1">
+            <a:off x="-1410085" y="1420219"/>
+            <a:ext cx="6857999" cy="4037839"/>
+          </a:xfrm>
+          <a:prstGeom prst="rect">
+            <a:avLst/>
+          </a:prstGeom>
+          <a:gradFill>
+            <a:gsLst>
+              <a:gs pos="0">
+                <a:srgbClr val="000000">
+                  <a:alpha val="0"/>
+                </a:srgbClr>
+              </a:gs>
+              <a:gs pos="99000">
+                <a:schemeClr val="accent1">
+                  <a:alpha val="46000"/>
+                </a:schemeClr>
+              </a:gs>
+            </a:gsLst>
+            <a:lin ang="1800000" scaled="0"/>
+          </a:gradFill>
+          <a:ln>
+            <a:noFill/>
+          </a:ln>
+        </p:spPr>
+        <p:style>
+          <a:lnRef idx="2">
+            <a:schemeClr val="accent1">
+              <a:shade val="50000"/>
+            </a:schemeClr>
+          </a:lnRef>
+          <a:fillRef idx="1">
+            <a:schemeClr val="accent1"/>
+          </a:fillRef>
+          <a:effectRef idx="0">
+            <a:schemeClr val="accent1"/>
+          </a:effectRef>
+          <a:fontRef idx="minor">
+            <a:schemeClr val="lt1"/>
+          </a:fontRef>
+        </p:style>
+        <p:txBody>
+          <a:bodyPr rtlCol="0" anchor="ctr"/>
+          <a:lstStyle/>
+          <a:p>
+            <a:pPr algn="ctr"/>
+            <a:endParaRPr lang="en-US"/>
+          </a:p>
+        </p:txBody>
+      </p:sp>
+      <p:sp>
+        <p:nvSpPr>
+          <p:cNvPr id="16" name="Rectangle 15">
+            <a:extLst>
+              <a:ext uri="{FF2B5EF4-FFF2-40B4-BE49-F238E27FC236}">
+                <a16:creationId xmlns:a16="http://schemas.microsoft.com/office/drawing/2014/main" id="{D2B78728-A580-49A7-84F9-6EF6F583ADE0}"/>
+              </a:ext>
+              <a:ext uri="{C183D7F6-B498-43B3-948B-1728B52AA6E4}">
+                <adec:decorative xmlns:adec="http://schemas.microsoft.com/office/drawing/2017/decorative" val="1"/>
+              </a:ext>
+            </a:extLst>
+          </p:cNvPr>
+          <p:cNvSpPr>
+            <a:spLocks noGrp="1" noRot="1" noChangeAspect="1" noMove="1" noResize="1" noEditPoints="1" noAdjustHandles="1" noChangeArrowheads="1" noChangeShapeType="1" noTextEdit="1"/>
+          </p:cNvSpPr>
+          <p:nvPr>
+            <p:extLst>
+              <p:ext uri="{386F3935-93C4-4BCD-93E2-E3B085C9AB24}">
+                <p16:designElem xmlns:p16="http://schemas.microsoft.com/office/powerpoint/2015/main" val="1"/>
+              </p:ext>
+            </p:extLst>
+          </p:nvPr>
+        </p:nvSpPr>
+        <p:spPr>
+          <a:xfrm rot="5400000" flipH="1">
+            <a:off x="767923" y="3588085"/>
+            <a:ext cx="2501979" cy="4037841"/>
+          </a:xfrm>
+          <a:prstGeom prst="rect">
+            <a:avLst/>
+          </a:prstGeom>
+          <a:gradFill>
+            <a:gsLst>
+              <a:gs pos="2000">
+                <a:schemeClr val="accent1">
+                  <a:alpha val="29000"/>
+                </a:schemeClr>
+              </a:gs>
+              <a:gs pos="100000">
+                <a:srgbClr val="000000">
+                  <a:alpha val="30000"/>
+                </a:srgbClr>
+              </a:gs>
+            </a:gsLst>
+            <a:lin ang="7800000" scaled="0"/>
+          </a:gradFill>
+          <a:ln>
+            <a:noFill/>
+          </a:ln>
+        </p:spPr>
+        <p:style>
+          <a:lnRef idx="2">
+            <a:schemeClr val="accent1">
+              <a:shade val="50000"/>
+            </a:schemeClr>
+          </a:lnRef>
+          <a:fillRef idx="1">
+            <a:schemeClr val="accent1"/>
+          </a:fillRef>
+          <a:effectRef idx="0">
+            <a:schemeClr val="accent1"/>
+          </a:effectRef>
+          <a:fontRef idx="minor">
+            <a:schemeClr val="lt1"/>
+          </a:fontRef>
+        </p:style>
+        <p:txBody>
+          <a:bodyPr rtlCol="0" anchor="ctr"/>
+          <a:lstStyle/>
+          <a:p>
+            <a:pPr algn="ctr"/>
+            <a:endParaRPr lang="en-US" dirty="0"/>
+          </a:p>
+        </p:txBody>
+      </p:sp>
+      <p:sp>
+        <p:nvSpPr>
+          <p:cNvPr id="18" name="Freeform: Shape 17">
+            <a:extLst>
+              <a:ext uri="{FF2B5EF4-FFF2-40B4-BE49-F238E27FC236}">
+                <a16:creationId xmlns:a16="http://schemas.microsoft.com/office/drawing/2014/main" id="{38FAA1A1-D861-433F-88FA-1E9D6FD31D11}"/>
+              </a:ext>
+              <a:ext uri="{C183D7F6-B498-43B3-948B-1728B52AA6E4}">
+                <adec:decorative xmlns:adec="http://schemas.microsoft.com/office/drawing/2017/decorative" val="1"/>
+              </a:ext>
+            </a:extLst>
+          </p:cNvPr>
+          <p:cNvSpPr>
+            <a:spLocks noGrp="1" noRot="1" noChangeAspect="1" noMove="1" noResize="1" noEditPoints="1" noAdjustHandles="1" noChangeArrowheads="1" noChangeShapeType="1" noTextEdit="1"/>
+          </p:cNvSpPr>
+          <p:nvPr>
+            <p:extLst>
+              <p:ext uri="{386F3935-93C4-4BCD-93E2-E3B085C9AB24}">
+                <p16:designElem xmlns:p16="http://schemas.microsoft.com/office/powerpoint/2015/main" val="1"/>
+              </p:ext>
+            </p:extLst>
+          </p:nvPr>
+        </p:nvSpPr>
+        <p:spPr>
+          <a:xfrm rot="20635413">
+            <a:off x="-501737" y="969718"/>
+            <a:ext cx="3900357" cy="4178958"/>
+          </a:xfrm>
+          <a:custGeom>
+            <a:avLst/>
+            <a:gdLst>
+              <a:gd name="connsiteX0" fmla="*/ 2432225 w 3900357"/>
+              <a:gd name="connsiteY0" fmla="*/ 93939 h 4178958"/>
+              <a:gd name="connsiteX1" fmla="*/ 3900357 w 3900357"/>
+              <a:gd name="connsiteY1" fmla="*/ 2089479 h 4178958"/>
+              <a:gd name="connsiteX2" fmla="*/ 1810878 w 3900357"/>
+              <a:gd name="connsiteY2" fmla="*/ 4178958 h 4178958"/>
+              <a:gd name="connsiteX3" fmla="*/ 78249 w 3900357"/>
+              <a:gd name="connsiteY3" fmla="*/ 3257727 h 4178958"/>
+              <a:gd name="connsiteX4" fmla="*/ 0 w 3900357"/>
+              <a:gd name="connsiteY4" fmla="*/ 3128923 h 4178958"/>
+              <a:gd name="connsiteX5" fmla="*/ 831324 w 3900357"/>
+              <a:gd name="connsiteY5" fmla="*/ 244281 h 4178958"/>
+              <a:gd name="connsiteX6" fmla="*/ 997559 w 3900357"/>
+              <a:gd name="connsiteY6" fmla="*/ 164202 h 4178958"/>
+              <a:gd name="connsiteX7" fmla="*/ 1810878 w 3900357"/>
+              <a:gd name="connsiteY7" fmla="*/ 0 h 4178958"/>
+              <a:gd name="connsiteX8" fmla="*/ 2432225 w 3900357"/>
+              <a:gd name="connsiteY8" fmla="*/ 93939 h 4178958"/>
+            </a:gdLst>
+            <a:ahLst/>
+            <a:cxnLst>
+              <a:cxn ang="0">
+                <a:pos x="connsiteX0" y="connsiteY0"/>
+              </a:cxn>
+              <a:cxn ang="0">
+                <a:pos x="connsiteX1" y="connsiteY1"/>
+              </a:cxn>
+              <a:cxn ang="0">
+                <a:pos x="connsiteX2" y="connsiteY2"/>
+              </a:cxn>
+              <a:cxn ang="0">
+                <a:pos x="connsiteX3" y="connsiteY3"/>
+              </a:cxn>
+              <a:cxn ang="0">
+                <a:pos x="connsiteX4" y="connsiteY4"/>
+              </a:cxn>
+              <a:cxn ang="0">
+                <a:pos x="connsiteX5" y="connsiteY5"/>
+              </a:cxn>
+              <a:cxn ang="0">
+                <a:pos x="connsiteX6" y="connsiteY6"/>
+              </a:cxn>
+              <a:cxn ang="0">
+                <a:pos x="connsiteX7" y="connsiteY7"/>
+              </a:cxn>
+              <a:cxn ang="0">
+                <a:pos x="connsiteX8" y="connsiteY8"/>
+              </a:cxn>
+            </a:cxnLst>
+            <a:rect l="l" t="t" r="r" b="b"/>
+            <a:pathLst>
+              <a:path w="3900357" h="4178958">
+                <a:moveTo>
+                  <a:pt x="2432225" y="93939"/>
+                </a:moveTo>
+                <a:cubicBezTo>
+                  <a:pt x="3282786" y="358491"/>
+                  <a:pt x="3900357" y="1151865"/>
+                  <a:pt x="3900357" y="2089479"/>
+                </a:cubicBezTo>
+                <a:cubicBezTo>
+                  <a:pt x="3900357" y="3243466"/>
+                  <a:pt x="2964865" y="4178958"/>
+                  <a:pt x="1810878" y="4178958"/>
+                </a:cubicBezTo>
+                <a:cubicBezTo>
+                  <a:pt x="1089636" y="4178958"/>
+                  <a:pt x="453744" y="3813531"/>
+                  <a:pt x="78249" y="3257727"/>
+                </a:cubicBezTo>
+                <a:lnTo>
+                  <a:pt x="0" y="3128923"/>
+                </a:lnTo>
+                <a:lnTo>
+                  <a:pt x="831324" y="244281"/>
+                </a:lnTo>
+                <a:lnTo>
+                  <a:pt x="997559" y="164202"/>
+                </a:lnTo>
+                <a:cubicBezTo>
+                  <a:pt x="1247540" y="58468"/>
+                  <a:pt x="1522381" y="0"/>
+                  <a:pt x="1810878" y="0"/>
+                </a:cubicBezTo>
+                <a:cubicBezTo>
+                  <a:pt x="2027251" y="0"/>
+                  <a:pt x="2235942" y="32888"/>
+                  <a:pt x="2432225" y="93939"/>
+                </a:cubicBezTo>
+                <a:close/>
+              </a:path>
+            </a:pathLst>
+          </a:custGeom>
+          <a:gradFill>
+            <a:gsLst>
+              <a:gs pos="29000">
+                <a:srgbClr val="000000">
+                  <a:alpha val="0"/>
+                </a:srgbClr>
+              </a:gs>
+              <a:gs pos="100000">
+                <a:schemeClr val="accent1">
+                  <a:alpha val="43000"/>
+                </a:schemeClr>
+              </a:gs>
+            </a:gsLst>
+            <a:lin ang="1800000" scaled="0"/>
+          </a:gradFill>
+          <a:ln>
+            <a:noFill/>
+          </a:ln>
+        </p:spPr>
+        <p:style>
+          <a:lnRef idx="2">
+            <a:schemeClr val="accent1">
+              <a:shade val="50000"/>
+            </a:schemeClr>
+          </a:lnRef>
+          <a:fillRef idx="1">
+            <a:schemeClr val="accent1"/>
+          </a:fillRef>
+          <a:effectRef idx="0">
+            <a:schemeClr val="accent1"/>
+          </a:effectRef>
+          <a:fontRef idx="minor">
+            <a:schemeClr val="lt1"/>
+          </a:fontRef>
+        </p:style>
+        <p:txBody>
+          <a:bodyPr wrap="square" rtlCol="0" anchor="ctr">
+            <a:noAutofit/>
+          </a:bodyPr>
+          <a:lstStyle/>
+          <a:p>
+            <a:pPr algn="ctr"/>
+            <a:endParaRPr lang="en-US" dirty="0"/>
+          </a:p>
+        </p:txBody>
+      </p:sp>
+      <p:sp>
+        <p:nvSpPr>
+          <p:cNvPr id="20" name="Rectangle 19">
+            <a:extLst>
+              <a:ext uri="{FF2B5EF4-FFF2-40B4-BE49-F238E27FC236}">
+                <a16:creationId xmlns:a16="http://schemas.microsoft.com/office/drawing/2014/main" id="{8D71EDA1-87BF-4D5D-AB79-F346FD19278A}"/>
+              </a:ext>
+              <a:ext uri="{C183D7F6-B498-43B3-948B-1728B52AA6E4}">
+                <adec:decorative xmlns:adec="http://schemas.microsoft.com/office/drawing/2017/decorative" val="1"/>
+              </a:ext>
+            </a:extLst>
+          </p:cNvPr>
+          <p:cNvSpPr>
+            <a:spLocks noGrp="1" noRot="1" noChangeAspect="1" noMove="1" noResize="1" noEditPoints="1" noAdjustHandles="1" noChangeArrowheads="1" noChangeShapeType="1" noTextEdit="1"/>
+          </p:cNvSpPr>
+          <p:nvPr>
+            <p:extLst>
+              <p:ext uri="{386F3935-93C4-4BCD-93E2-E3B085C9AB24}">
+                <p16:designElem xmlns:p16="http://schemas.microsoft.com/office/powerpoint/2015/main" val="1"/>
+              </p:ext>
+            </p:extLst>
+          </p:nvPr>
+        </p:nvSpPr>
+        <p:spPr>
+          <a:xfrm rot="5400000" flipH="1">
+            <a:off x="-1410093" y="1399943"/>
+            <a:ext cx="6858003" cy="4037835"/>
+          </a:xfrm>
+          <a:prstGeom prst="rect">
+            <a:avLst/>
+          </a:prstGeom>
+          <a:gradFill>
+            <a:gsLst>
+              <a:gs pos="0">
+                <a:srgbClr val="000000">
+                  <a:alpha val="0"/>
+                </a:srgbClr>
+              </a:gs>
+              <a:gs pos="99000">
+                <a:schemeClr val="accent1">
+                  <a:lumMod val="60000"/>
+                  <a:lumOff val="40000"/>
+                  <a:alpha val="11000"/>
+                </a:schemeClr>
+              </a:gs>
+            </a:gsLst>
+            <a:lin ang="7200000" scaled="0"/>
+          </a:gradFill>
+          <a:ln>
+            <a:noFill/>
+          </a:ln>
+        </p:spPr>
+        <p:style>
+          <a:lnRef idx="2">
+            <a:schemeClr val="accent1">
+              <a:shade val="50000"/>
+            </a:schemeClr>
+          </a:lnRef>
+          <a:fillRef idx="1">
+            <a:schemeClr val="accent1"/>
+          </a:fillRef>
+          <a:effectRef idx="0">
+            <a:schemeClr val="accent1"/>
+          </a:effectRef>
+          <a:fontRef idx="minor">
+            <a:schemeClr val="lt1"/>
+          </a:fontRef>
+        </p:style>
+        <p:txBody>
+          <a:bodyPr rtlCol="0" anchor="ctr"/>
+          <a:lstStyle/>
+          <a:p>
+            <a:pPr algn="ctr"/>
+            <a:endParaRPr lang="en-US"/>
+          </a:p>
+        </p:txBody>
+      </p:sp>
       <p:sp>
         <p:nvSpPr>
           <p:cNvPr id="2" name="Title 1">
             <a:extLst>
               <a:ext uri="{FF2B5EF4-FFF2-40B4-BE49-F238E27FC236}">
-                <a16:creationId xmlns:a16="http://schemas.microsoft.com/office/drawing/2014/main" id="{4D8E5DA4-0956-62B3-1522-842C06D71057}"/>
+                <a16:creationId xmlns:a16="http://schemas.microsoft.com/office/drawing/2014/main" id="{0457A027-35E6-60E0-B6F4-488536058D4D}"/>
               </a:ext>
             </a:extLst>
           </p:cNvPr>
@@ -22554,13 +24712,796 @@
             <p:ph type="title"/>
           </p:nvPr>
         </p:nvSpPr>
-        <p:spPr/>
+        <p:spPr>
+          <a:xfrm>
+            <a:off x="466722" y="586855"/>
+            <a:ext cx="3201366" cy="3387497"/>
+          </a:xfrm>
+        </p:spPr>
         <p:txBody>
-          <a:bodyPr/>
+          <a:bodyPr anchor="b">
+            <a:normAutofit/>
+          </a:bodyPr>
+          <a:lstStyle/>
+          <a:p>
+            <a:pPr algn="r"/>
+            <a:r>
+              <a:rPr lang="en-GB" sz="4000">
+                <a:solidFill>
+                  <a:srgbClr val="FFFFFF"/>
+                </a:solidFill>
+              </a:rPr>
+              <a:t>Future work</a:t>
+            </a:r>
+          </a:p>
+        </p:txBody>
+      </p:sp>
+      <p:sp>
+        <p:nvSpPr>
+          <p:cNvPr id="3" name="Content Placeholder 2">
+            <a:extLst>
+              <a:ext uri="{FF2B5EF4-FFF2-40B4-BE49-F238E27FC236}">
+                <a16:creationId xmlns:a16="http://schemas.microsoft.com/office/drawing/2014/main" id="{7FF13E4E-51CC-1C06-A252-C18C5D4D5C1A}"/>
+              </a:ext>
+            </a:extLst>
+          </p:cNvPr>
+          <p:cNvSpPr>
+            <a:spLocks noGrp="1"/>
+          </p:cNvSpPr>
+          <p:nvPr>
+            <p:ph idx="1"/>
+          </p:nvPr>
+        </p:nvSpPr>
+        <p:spPr>
+          <a:xfrm>
+            <a:off x="4810259" y="649480"/>
+            <a:ext cx="6555347" cy="5546047"/>
+          </a:xfrm>
+        </p:spPr>
+        <p:txBody>
+          <a:bodyPr anchor="ctr">
+            <a:normAutofit/>
+          </a:bodyPr>
           <a:lstStyle/>
           <a:p>
             <a:r>
-              <a:rPr lang="en-GB" dirty="0"/>
+              <a:rPr lang="en-GB" sz="2000" dirty="0"/>
+              <a:t>Going forward with this project, I will be looking into more advanced attacks and methods of replicating them such as:</a:t>
+            </a:r>
+          </a:p>
+          <a:p>
+            <a:r>
+              <a:rPr lang="en-GB" sz="2000" dirty="0"/>
+              <a:t>Embedding images and sounds in a web app that could themselves constitute indirect prompt injection per Bagdasaryan et al [3]</a:t>
+            </a:r>
+          </a:p>
+          <a:p>
+            <a:r>
+              <a:rPr lang="en-GB" sz="2000" dirty="0"/>
+              <a:t>Further development of injected prompts to minimise discovery by security systems and enable persistence of attacks without users being aware</a:t>
+            </a:r>
+          </a:p>
+          <a:p>
+            <a:r>
+              <a:rPr lang="en-GB" sz="2000" dirty="0"/>
+              <a:t>I also aim to make the tool more developer friendly by:</a:t>
+            </a:r>
+          </a:p>
+          <a:p>
+            <a:r>
+              <a:rPr lang="en-GB" sz="2000" dirty="0"/>
+              <a:t>Separating each attack onto a separate page to make it easier for developers to use</a:t>
+            </a:r>
+          </a:p>
+          <a:p>
+            <a:r>
+              <a:rPr lang="en-GB" sz="2000" dirty="0"/>
+              <a:t>Documentation outlining use of the web app for developers</a:t>
+            </a:r>
+          </a:p>
+          <a:p>
+            <a:endParaRPr lang="en-GB" sz="2000" dirty="0"/>
+          </a:p>
+          <a:p>
+            <a:endParaRPr lang="en-GB" sz="2000" dirty="0"/>
+          </a:p>
+        </p:txBody>
+      </p:sp>
+    </p:spTree>
+    <p:extLst>
+      <p:ext uri="{BB962C8B-B14F-4D97-AF65-F5344CB8AC3E}">
+        <p14:creationId xmlns:p14="http://schemas.microsoft.com/office/powerpoint/2010/main" val="91252362"/>
+      </p:ext>
+    </p:extLst>
+  </p:cSld>
+  <p:clrMapOvr>
+    <a:masterClrMapping/>
+  </p:clrMapOvr>
+</p:sld>
+</file>
+
+<file path=ppt/slides/slide18.xml><?xml version="1.0" encoding="utf-8"?>
+<p:sld xmlns:a="http://schemas.openxmlformats.org/drawingml/2006/main" xmlns:r="http://schemas.openxmlformats.org/officeDocument/2006/relationships" xmlns:p="http://schemas.openxmlformats.org/presentationml/2006/main">
+  <p:cSld>
+    <p:bg>
+      <p:bgPr>
+        <a:solidFill>
+          <a:schemeClr val="bg1"/>
+        </a:solidFill>
+        <a:effectLst/>
+      </p:bgPr>
+    </p:bg>
+    <p:spTree>
+      <p:nvGrpSpPr>
+        <p:cNvPr id="1" name=""/>
+        <p:cNvGrpSpPr/>
+        <p:nvPr/>
+      </p:nvGrpSpPr>
+      <p:grpSpPr>
+        <a:xfrm>
+          <a:off x="0" y="0"/>
+          <a:ext cx="0" cy="0"/>
+          <a:chOff x="0" y="0"/>
+          <a:chExt cx="0" cy="0"/>
+        </a:xfrm>
+      </p:grpSpPr>
+      <p:sp useBgFill="1">
+        <p:nvSpPr>
+          <p:cNvPr id="8" name="Rectangle 7">
+            <a:extLst>
+              <a:ext uri="{FF2B5EF4-FFF2-40B4-BE49-F238E27FC236}">
+                <a16:creationId xmlns:a16="http://schemas.microsoft.com/office/drawing/2014/main" id="{09588DA8-065E-4F6F-8EFD-43104AB2E0CF}"/>
+              </a:ext>
+              <a:ext uri="{C183D7F6-B498-43B3-948B-1728B52AA6E4}">
+                <adec:decorative xmlns:adec="http://schemas.microsoft.com/office/drawing/2017/decorative" val="1"/>
+              </a:ext>
+            </a:extLst>
+          </p:cNvPr>
+          <p:cNvSpPr>
+            <a:spLocks noGrp="1" noRot="1" noChangeAspect="1" noMove="1" noResize="1" noEditPoints="1" noAdjustHandles="1" noChangeArrowheads="1" noChangeShapeType="1" noTextEdit="1"/>
+          </p:cNvSpPr>
+          <p:nvPr>
+            <p:extLst>
+              <p:ext uri="{386F3935-93C4-4BCD-93E2-E3B085C9AB24}">
+                <p16:designElem xmlns:p16="http://schemas.microsoft.com/office/powerpoint/2015/main" val="1"/>
+              </p:ext>
+            </p:extLst>
+          </p:nvPr>
+        </p:nvSpPr>
+        <p:spPr>
+          <a:xfrm>
+            <a:off x="0" y="0"/>
+            <a:ext cx="12192000" cy="6858000"/>
+          </a:xfrm>
+          <a:prstGeom prst="rect">
+            <a:avLst/>
+          </a:prstGeom>
+          <a:ln w="12700" cap="flat" cmpd="sng" algn="ctr">
+            <a:noFill/>
+            <a:prstDash val="solid"/>
+            <a:miter lim="800000"/>
+          </a:ln>
+          <a:effectLst/>
+          <a:extLst>
+            <a:ext uri="{91240B29-F687-4F45-9708-019B960494DF}">
+              <a14:hiddenLine xmlns:a14="http://schemas.microsoft.com/office/drawing/2010/main" w="12700" cap="flat" cmpd="sng" algn="ctr">
+                <a:solidFill>
+                  <a:schemeClr val="accent1">
+                    <a:shade val="50000"/>
+                  </a:schemeClr>
+                </a:solidFill>
+                <a:prstDash val="solid"/>
+                <a:miter lim="800000"/>
+              </a14:hiddenLine>
+            </a:ext>
+          </a:extLst>
+        </p:spPr>
+        <p:style>
+          <a:lnRef idx="2">
+            <a:schemeClr val="accent1">
+              <a:shade val="50000"/>
+            </a:schemeClr>
+          </a:lnRef>
+          <a:fillRef idx="1">
+            <a:schemeClr val="accent1"/>
+          </a:fillRef>
+          <a:effectRef idx="0">
+            <a:schemeClr val="accent1"/>
+          </a:effectRef>
+          <a:fontRef idx="minor">
+            <a:schemeClr val="lt1"/>
+          </a:fontRef>
+        </p:style>
+        <p:txBody>
+          <a:bodyPr rtlCol="0" anchor="ctr"/>
+          <a:lstStyle/>
+          <a:p>
+            <a:pPr algn="ctr"/>
+            <a:endParaRPr lang="en-US"/>
+          </a:p>
+        </p:txBody>
+      </p:sp>
+      <p:sp useBgFill="1">
+        <p:nvSpPr>
+          <p:cNvPr id="10" name="Rectangle 9">
+            <a:extLst>
+              <a:ext uri="{FF2B5EF4-FFF2-40B4-BE49-F238E27FC236}">
+                <a16:creationId xmlns:a16="http://schemas.microsoft.com/office/drawing/2014/main" id="{C4285719-470E-454C-AF62-8323075F1F5B}"/>
+              </a:ext>
+              <a:ext uri="{C183D7F6-B498-43B3-948B-1728B52AA6E4}">
+                <adec:decorative xmlns:adec="http://schemas.microsoft.com/office/drawing/2017/decorative" val="1"/>
+              </a:ext>
+            </a:extLst>
+          </p:cNvPr>
+          <p:cNvSpPr>
+            <a:spLocks noGrp="1" noRot="1" noChangeAspect="1" noMove="1" noResize="1" noEditPoints="1" noAdjustHandles="1" noChangeArrowheads="1" noChangeShapeType="1" noTextEdit="1"/>
+          </p:cNvSpPr>
+          <p:nvPr>
+            <p:extLst>
+              <p:ext uri="{386F3935-93C4-4BCD-93E2-E3B085C9AB24}">
+                <p16:designElem xmlns:p16="http://schemas.microsoft.com/office/powerpoint/2015/main" val="1"/>
+              </p:ext>
+            </p:extLst>
+          </p:nvPr>
+        </p:nvSpPr>
+        <p:spPr>
+          <a:xfrm>
+            <a:off x="0" y="0"/>
+            <a:ext cx="12188952" cy="6858000"/>
+          </a:xfrm>
+          <a:prstGeom prst="rect">
+            <a:avLst/>
+          </a:prstGeom>
+          <a:ln w="12700" cap="flat" cmpd="sng" algn="ctr">
+            <a:noFill/>
+            <a:prstDash val="solid"/>
+            <a:miter lim="800000"/>
+          </a:ln>
+          <a:effectLst/>
+          <a:extLst>
+            <a:ext uri="{91240B29-F687-4F45-9708-019B960494DF}">
+              <a14:hiddenLine xmlns:a14="http://schemas.microsoft.com/office/drawing/2010/main" w="12700" cap="flat" cmpd="sng" algn="ctr">
+                <a:solidFill>
+                  <a:schemeClr val="accent1">
+                    <a:shade val="50000"/>
+                  </a:schemeClr>
+                </a:solidFill>
+                <a:prstDash val="solid"/>
+                <a:miter lim="800000"/>
+              </a14:hiddenLine>
+            </a:ext>
+          </a:extLst>
+        </p:spPr>
+        <p:style>
+          <a:lnRef idx="2">
+            <a:schemeClr val="accent1">
+              <a:shade val="50000"/>
+            </a:schemeClr>
+          </a:lnRef>
+          <a:fillRef idx="1">
+            <a:schemeClr val="accent1"/>
+          </a:fillRef>
+          <a:effectRef idx="0">
+            <a:schemeClr val="accent1"/>
+          </a:effectRef>
+          <a:fontRef idx="minor">
+            <a:schemeClr val="lt1"/>
+          </a:fontRef>
+        </p:style>
+        <p:txBody>
+          <a:bodyPr rtlCol="0" anchor="ctr"/>
+          <a:lstStyle/>
+          <a:p>
+            <a:pPr algn="ctr"/>
+            <a:endParaRPr lang="en-US"/>
+          </a:p>
+        </p:txBody>
+      </p:sp>
+      <p:sp>
+        <p:nvSpPr>
+          <p:cNvPr id="12" name="Rectangle 11">
+            <a:extLst>
+              <a:ext uri="{FF2B5EF4-FFF2-40B4-BE49-F238E27FC236}">
+                <a16:creationId xmlns:a16="http://schemas.microsoft.com/office/drawing/2014/main" id="{CD9FE4EF-C4D8-49A0-B2FF-81D8DB7D8A24}"/>
+              </a:ext>
+              <a:ext uri="{C183D7F6-B498-43B3-948B-1728B52AA6E4}">
+                <adec:decorative xmlns:adec="http://schemas.microsoft.com/office/drawing/2017/decorative" val="1"/>
+              </a:ext>
+            </a:extLst>
+          </p:cNvPr>
+          <p:cNvSpPr>
+            <a:spLocks noGrp="1" noRot="1" noChangeAspect="1" noMove="1" noResize="1" noEditPoints="1" noAdjustHandles="1" noChangeArrowheads="1" noChangeShapeType="1" noTextEdit="1"/>
+          </p:cNvSpPr>
+          <p:nvPr>
+            <p:extLst>
+              <p:ext uri="{386F3935-93C4-4BCD-93E2-E3B085C9AB24}">
+                <p16:designElem xmlns:p16="http://schemas.microsoft.com/office/powerpoint/2015/main" val="1"/>
+              </p:ext>
+            </p:extLst>
+          </p:nvPr>
+        </p:nvSpPr>
+        <p:spPr>
+          <a:xfrm rot="5400000" flipH="1">
+            <a:off x="-1410084" y="1410082"/>
+            <a:ext cx="6858000" cy="4037836"/>
+          </a:xfrm>
+          <a:prstGeom prst="rect">
+            <a:avLst/>
+          </a:prstGeom>
+          <a:gradFill>
+            <a:gsLst>
+              <a:gs pos="8000">
+                <a:srgbClr val="000000"/>
+              </a:gs>
+              <a:gs pos="100000">
+                <a:schemeClr val="accent1">
+                  <a:lumMod val="75000"/>
+                </a:schemeClr>
+              </a:gs>
+            </a:gsLst>
+            <a:lin ang="3000000" scaled="0"/>
+          </a:gradFill>
+          <a:ln>
+            <a:noFill/>
+          </a:ln>
+        </p:spPr>
+        <p:style>
+          <a:lnRef idx="2">
+            <a:schemeClr val="accent1">
+              <a:shade val="50000"/>
+            </a:schemeClr>
+          </a:lnRef>
+          <a:fillRef idx="1">
+            <a:schemeClr val="accent1"/>
+          </a:fillRef>
+          <a:effectRef idx="0">
+            <a:schemeClr val="accent1"/>
+          </a:effectRef>
+          <a:fontRef idx="minor">
+            <a:schemeClr val="lt1"/>
+          </a:fontRef>
+        </p:style>
+        <p:txBody>
+          <a:bodyPr rtlCol="0" anchor="ctr"/>
+          <a:lstStyle/>
+          <a:p>
+            <a:pPr algn="ctr"/>
+            <a:endParaRPr lang="en-US"/>
+          </a:p>
+        </p:txBody>
+      </p:sp>
+      <p:sp>
+        <p:nvSpPr>
+          <p:cNvPr id="14" name="Rectangle 13">
+            <a:extLst>
+              <a:ext uri="{FF2B5EF4-FFF2-40B4-BE49-F238E27FC236}">
+                <a16:creationId xmlns:a16="http://schemas.microsoft.com/office/drawing/2014/main" id="{4300840D-0A0B-4512-BACA-B439D5B9C57C}"/>
+              </a:ext>
+              <a:ext uri="{C183D7F6-B498-43B3-948B-1728B52AA6E4}">
+                <adec:decorative xmlns:adec="http://schemas.microsoft.com/office/drawing/2017/decorative" val="1"/>
+              </a:ext>
+            </a:extLst>
+          </p:cNvPr>
+          <p:cNvSpPr>
+            <a:spLocks noGrp="1" noRot="1" noChangeAspect="1" noMove="1" noResize="1" noEditPoints="1" noAdjustHandles="1" noChangeArrowheads="1" noChangeShapeType="1" noTextEdit="1"/>
+          </p:cNvSpPr>
+          <p:nvPr>
+            <p:extLst>
+              <p:ext uri="{386F3935-93C4-4BCD-93E2-E3B085C9AB24}">
+                <p16:designElem xmlns:p16="http://schemas.microsoft.com/office/powerpoint/2015/main" val="1"/>
+              </p:ext>
+            </p:extLst>
+          </p:nvPr>
+        </p:nvSpPr>
+        <p:spPr>
+          <a:xfrm rot="5400000" flipH="1">
+            <a:off x="-1410085" y="1420219"/>
+            <a:ext cx="6857999" cy="4037839"/>
+          </a:xfrm>
+          <a:prstGeom prst="rect">
+            <a:avLst/>
+          </a:prstGeom>
+          <a:gradFill>
+            <a:gsLst>
+              <a:gs pos="0">
+                <a:srgbClr val="000000">
+                  <a:alpha val="0"/>
+                </a:srgbClr>
+              </a:gs>
+              <a:gs pos="99000">
+                <a:schemeClr val="accent1">
+                  <a:alpha val="46000"/>
+                </a:schemeClr>
+              </a:gs>
+            </a:gsLst>
+            <a:lin ang="1800000" scaled="0"/>
+          </a:gradFill>
+          <a:ln>
+            <a:noFill/>
+          </a:ln>
+        </p:spPr>
+        <p:style>
+          <a:lnRef idx="2">
+            <a:schemeClr val="accent1">
+              <a:shade val="50000"/>
+            </a:schemeClr>
+          </a:lnRef>
+          <a:fillRef idx="1">
+            <a:schemeClr val="accent1"/>
+          </a:fillRef>
+          <a:effectRef idx="0">
+            <a:schemeClr val="accent1"/>
+          </a:effectRef>
+          <a:fontRef idx="minor">
+            <a:schemeClr val="lt1"/>
+          </a:fontRef>
+        </p:style>
+        <p:txBody>
+          <a:bodyPr rtlCol="0" anchor="ctr"/>
+          <a:lstStyle/>
+          <a:p>
+            <a:pPr algn="ctr"/>
+            <a:endParaRPr lang="en-US"/>
+          </a:p>
+        </p:txBody>
+      </p:sp>
+      <p:sp>
+        <p:nvSpPr>
+          <p:cNvPr id="16" name="Rectangle 15">
+            <a:extLst>
+              <a:ext uri="{FF2B5EF4-FFF2-40B4-BE49-F238E27FC236}">
+                <a16:creationId xmlns:a16="http://schemas.microsoft.com/office/drawing/2014/main" id="{D2B78728-A580-49A7-84F9-6EF6F583ADE0}"/>
+              </a:ext>
+              <a:ext uri="{C183D7F6-B498-43B3-948B-1728B52AA6E4}">
+                <adec:decorative xmlns:adec="http://schemas.microsoft.com/office/drawing/2017/decorative" val="1"/>
+              </a:ext>
+            </a:extLst>
+          </p:cNvPr>
+          <p:cNvSpPr>
+            <a:spLocks noGrp="1" noRot="1" noChangeAspect="1" noMove="1" noResize="1" noEditPoints="1" noAdjustHandles="1" noChangeArrowheads="1" noChangeShapeType="1" noTextEdit="1"/>
+          </p:cNvSpPr>
+          <p:nvPr>
+            <p:extLst>
+              <p:ext uri="{386F3935-93C4-4BCD-93E2-E3B085C9AB24}">
+                <p16:designElem xmlns:p16="http://schemas.microsoft.com/office/powerpoint/2015/main" val="1"/>
+              </p:ext>
+            </p:extLst>
+          </p:nvPr>
+        </p:nvSpPr>
+        <p:spPr>
+          <a:xfrm rot="5400000" flipH="1">
+            <a:off x="767923" y="3588085"/>
+            <a:ext cx="2501979" cy="4037841"/>
+          </a:xfrm>
+          <a:prstGeom prst="rect">
+            <a:avLst/>
+          </a:prstGeom>
+          <a:gradFill>
+            <a:gsLst>
+              <a:gs pos="2000">
+                <a:schemeClr val="accent1">
+                  <a:alpha val="29000"/>
+                </a:schemeClr>
+              </a:gs>
+              <a:gs pos="100000">
+                <a:srgbClr val="000000">
+                  <a:alpha val="30000"/>
+                </a:srgbClr>
+              </a:gs>
+            </a:gsLst>
+            <a:lin ang="7800000" scaled="0"/>
+          </a:gradFill>
+          <a:ln>
+            <a:noFill/>
+          </a:ln>
+        </p:spPr>
+        <p:style>
+          <a:lnRef idx="2">
+            <a:schemeClr val="accent1">
+              <a:shade val="50000"/>
+            </a:schemeClr>
+          </a:lnRef>
+          <a:fillRef idx="1">
+            <a:schemeClr val="accent1"/>
+          </a:fillRef>
+          <a:effectRef idx="0">
+            <a:schemeClr val="accent1"/>
+          </a:effectRef>
+          <a:fontRef idx="minor">
+            <a:schemeClr val="lt1"/>
+          </a:fontRef>
+        </p:style>
+        <p:txBody>
+          <a:bodyPr rtlCol="0" anchor="ctr"/>
+          <a:lstStyle/>
+          <a:p>
+            <a:pPr algn="ctr"/>
+            <a:endParaRPr lang="en-US" dirty="0"/>
+          </a:p>
+        </p:txBody>
+      </p:sp>
+      <p:sp>
+        <p:nvSpPr>
+          <p:cNvPr id="18" name="Freeform: Shape 17">
+            <a:extLst>
+              <a:ext uri="{FF2B5EF4-FFF2-40B4-BE49-F238E27FC236}">
+                <a16:creationId xmlns:a16="http://schemas.microsoft.com/office/drawing/2014/main" id="{38FAA1A1-D861-433F-88FA-1E9D6FD31D11}"/>
+              </a:ext>
+              <a:ext uri="{C183D7F6-B498-43B3-948B-1728B52AA6E4}">
+                <adec:decorative xmlns:adec="http://schemas.microsoft.com/office/drawing/2017/decorative" val="1"/>
+              </a:ext>
+            </a:extLst>
+          </p:cNvPr>
+          <p:cNvSpPr>
+            <a:spLocks noGrp="1" noRot="1" noChangeAspect="1" noMove="1" noResize="1" noEditPoints="1" noAdjustHandles="1" noChangeArrowheads="1" noChangeShapeType="1" noTextEdit="1"/>
+          </p:cNvSpPr>
+          <p:nvPr>
+            <p:extLst>
+              <p:ext uri="{386F3935-93C4-4BCD-93E2-E3B085C9AB24}">
+                <p16:designElem xmlns:p16="http://schemas.microsoft.com/office/powerpoint/2015/main" val="1"/>
+              </p:ext>
+            </p:extLst>
+          </p:nvPr>
+        </p:nvSpPr>
+        <p:spPr>
+          <a:xfrm rot="20635413">
+            <a:off x="-501737" y="969718"/>
+            <a:ext cx="3900357" cy="4178958"/>
+          </a:xfrm>
+          <a:custGeom>
+            <a:avLst/>
+            <a:gdLst>
+              <a:gd name="connsiteX0" fmla="*/ 2432225 w 3900357"/>
+              <a:gd name="connsiteY0" fmla="*/ 93939 h 4178958"/>
+              <a:gd name="connsiteX1" fmla="*/ 3900357 w 3900357"/>
+              <a:gd name="connsiteY1" fmla="*/ 2089479 h 4178958"/>
+              <a:gd name="connsiteX2" fmla="*/ 1810878 w 3900357"/>
+              <a:gd name="connsiteY2" fmla="*/ 4178958 h 4178958"/>
+              <a:gd name="connsiteX3" fmla="*/ 78249 w 3900357"/>
+              <a:gd name="connsiteY3" fmla="*/ 3257727 h 4178958"/>
+              <a:gd name="connsiteX4" fmla="*/ 0 w 3900357"/>
+              <a:gd name="connsiteY4" fmla="*/ 3128923 h 4178958"/>
+              <a:gd name="connsiteX5" fmla="*/ 831324 w 3900357"/>
+              <a:gd name="connsiteY5" fmla="*/ 244281 h 4178958"/>
+              <a:gd name="connsiteX6" fmla="*/ 997559 w 3900357"/>
+              <a:gd name="connsiteY6" fmla="*/ 164202 h 4178958"/>
+              <a:gd name="connsiteX7" fmla="*/ 1810878 w 3900357"/>
+              <a:gd name="connsiteY7" fmla="*/ 0 h 4178958"/>
+              <a:gd name="connsiteX8" fmla="*/ 2432225 w 3900357"/>
+              <a:gd name="connsiteY8" fmla="*/ 93939 h 4178958"/>
+            </a:gdLst>
+            <a:ahLst/>
+            <a:cxnLst>
+              <a:cxn ang="0">
+                <a:pos x="connsiteX0" y="connsiteY0"/>
+              </a:cxn>
+              <a:cxn ang="0">
+                <a:pos x="connsiteX1" y="connsiteY1"/>
+              </a:cxn>
+              <a:cxn ang="0">
+                <a:pos x="connsiteX2" y="connsiteY2"/>
+              </a:cxn>
+              <a:cxn ang="0">
+                <a:pos x="connsiteX3" y="connsiteY3"/>
+              </a:cxn>
+              <a:cxn ang="0">
+                <a:pos x="connsiteX4" y="connsiteY4"/>
+              </a:cxn>
+              <a:cxn ang="0">
+                <a:pos x="connsiteX5" y="connsiteY5"/>
+              </a:cxn>
+              <a:cxn ang="0">
+                <a:pos x="connsiteX6" y="connsiteY6"/>
+              </a:cxn>
+              <a:cxn ang="0">
+                <a:pos x="connsiteX7" y="connsiteY7"/>
+              </a:cxn>
+              <a:cxn ang="0">
+                <a:pos x="connsiteX8" y="connsiteY8"/>
+              </a:cxn>
+            </a:cxnLst>
+            <a:rect l="l" t="t" r="r" b="b"/>
+            <a:pathLst>
+              <a:path w="3900357" h="4178958">
+                <a:moveTo>
+                  <a:pt x="2432225" y="93939"/>
+                </a:moveTo>
+                <a:cubicBezTo>
+                  <a:pt x="3282786" y="358491"/>
+                  <a:pt x="3900357" y="1151865"/>
+                  <a:pt x="3900357" y="2089479"/>
+                </a:cubicBezTo>
+                <a:cubicBezTo>
+                  <a:pt x="3900357" y="3243466"/>
+                  <a:pt x="2964865" y="4178958"/>
+                  <a:pt x="1810878" y="4178958"/>
+                </a:cubicBezTo>
+                <a:cubicBezTo>
+                  <a:pt x="1089636" y="4178958"/>
+                  <a:pt x="453744" y="3813531"/>
+                  <a:pt x="78249" y="3257727"/>
+                </a:cubicBezTo>
+                <a:lnTo>
+                  <a:pt x="0" y="3128923"/>
+                </a:lnTo>
+                <a:lnTo>
+                  <a:pt x="831324" y="244281"/>
+                </a:lnTo>
+                <a:lnTo>
+                  <a:pt x="997559" y="164202"/>
+                </a:lnTo>
+                <a:cubicBezTo>
+                  <a:pt x="1247540" y="58468"/>
+                  <a:pt x="1522381" y="0"/>
+                  <a:pt x="1810878" y="0"/>
+                </a:cubicBezTo>
+                <a:cubicBezTo>
+                  <a:pt x="2027251" y="0"/>
+                  <a:pt x="2235942" y="32888"/>
+                  <a:pt x="2432225" y="93939"/>
+                </a:cubicBezTo>
+                <a:close/>
+              </a:path>
+            </a:pathLst>
+          </a:custGeom>
+          <a:gradFill>
+            <a:gsLst>
+              <a:gs pos="29000">
+                <a:srgbClr val="000000">
+                  <a:alpha val="0"/>
+                </a:srgbClr>
+              </a:gs>
+              <a:gs pos="100000">
+                <a:schemeClr val="accent1">
+                  <a:alpha val="43000"/>
+                </a:schemeClr>
+              </a:gs>
+            </a:gsLst>
+            <a:lin ang="1800000" scaled="0"/>
+          </a:gradFill>
+          <a:ln>
+            <a:noFill/>
+          </a:ln>
+        </p:spPr>
+        <p:style>
+          <a:lnRef idx="2">
+            <a:schemeClr val="accent1">
+              <a:shade val="50000"/>
+            </a:schemeClr>
+          </a:lnRef>
+          <a:fillRef idx="1">
+            <a:schemeClr val="accent1"/>
+          </a:fillRef>
+          <a:effectRef idx="0">
+            <a:schemeClr val="accent1"/>
+          </a:effectRef>
+          <a:fontRef idx="minor">
+            <a:schemeClr val="lt1"/>
+          </a:fontRef>
+        </p:style>
+        <p:txBody>
+          <a:bodyPr wrap="square" rtlCol="0" anchor="ctr">
+            <a:noAutofit/>
+          </a:bodyPr>
+          <a:lstStyle/>
+          <a:p>
+            <a:pPr algn="ctr"/>
+            <a:endParaRPr lang="en-US" dirty="0"/>
+          </a:p>
+        </p:txBody>
+      </p:sp>
+      <p:sp>
+        <p:nvSpPr>
+          <p:cNvPr id="20" name="Rectangle 19">
+            <a:extLst>
+              <a:ext uri="{FF2B5EF4-FFF2-40B4-BE49-F238E27FC236}">
+                <a16:creationId xmlns:a16="http://schemas.microsoft.com/office/drawing/2014/main" id="{8D71EDA1-87BF-4D5D-AB79-F346FD19278A}"/>
+              </a:ext>
+              <a:ext uri="{C183D7F6-B498-43B3-948B-1728B52AA6E4}">
+                <adec:decorative xmlns:adec="http://schemas.microsoft.com/office/drawing/2017/decorative" val="1"/>
+              </a:ext>
+            </a:extLst>
+          </p:cNvPr>
+          <p:cNvSpPr>
+            <a:spLocks noGrp="1" noRot="1" noChangeAspect="1" noMove="1" noResize="1" noEditPoints="1" noAdjustHandles="1" noChangeArrowheads="1" noChangeShapeType="1" noTextEdit="1"/>
+          </p:cNvSpPr>
+          <p:nvPr>
+            <p:extLst>
+              <p:ext uri="{386F3935-93C4-4BCD-93E2-E3B085C9AB24}">
+                <p16:designElem xmlns:p16="http://schemas.microsoft.com/office/powerpoint/2015/main" val="1"/>
+              </p:ext>
+            </p:extLst>
+          </p:nvPr>
+        </p:nvSpPr>
+        <p:spPr>
+          <a:xfrm rot="5400000" flipH="1">
+            <a:off x="-1410093" y="1399943"/>
+            <a:ext cx="6858003" cy="4037835"/>
+          </a:xfrm>
+          <a:prstGeom prst="rect">
+            <a:avLst/>
+          </a:prstGeom>
+          <a:gradFill>
+            <a:gsLst>
+              <a:gs pos="0">
+                <a:srgbClr val="000000">
+                  <a:alpha val="0"/>
+                </a:srgbClr>
+              </a:gs>
+              <a:gs pos="99000">
+                <a:schemeClr val="accent1">
+                  <a:lumMod val="60000"/>
+                  <a:lumOff val="40000"/>
+                  <a:alpha val="11000"/>
+                </a:schemeClr>
+              </a:gs>
+            </a:gsLst>
+            <a:lin ang="7200000" scaled="0"/>
+          </a:gradFill>
+          <a:ln>
+            <a:noFill/>
+          </a:ln>
+        </p:spPr>
+        <p:style>
+          <a:lnRef idx="2">
+            <a:schemeClr val="accent1">
+              <a:shade val="50000"/>
+            </a:schemeClr>
+          </a:lnRef>
+          <a:fillRef idx="1">
+            <a:schemeClr val="accent1"/>
+          </a:fillRef>
+          <a:effectRef idx="0">
+            <a:schemeClr val="accent1"/>
+          </a:effectRef>
+          <a:fontRef idx="minor">
+            <a:schemeClr val="lt1"/>
+          </a:fontRef>
+        </p:style>
+        <p:txBody>
+          <a:bodyPr rtlCol="0" anchor="ctr"/>
+          <a:lstStyle/>
+          <a:p>
+            <a:pPr algn="ctr"/>
+            <a:endParaRPr lang="en-US"/>
+          </a:p>
+        </p:txBody>
+      </p:sp>
+      <p:sp>
+        <p:nvSpPr>
+          <p:cNvPr id="2" name="Title 1">
+            <a:extLst>
+              <a:ext uri="{FF2B5EF4-FFF2-40B4-BE49-F238E27FC236}">
+                <a16:creationId xmlns:a16="http://schemas.microsoft.com/office/drawing/2014/main" id="{4D8E5DA4-0956-62B3-1522-842C06D71057}"/>
+              </a:ext>
+            </a:extLst>
+          </p:cNvPr>
+          <p:cNvSpPr>
+            <a:spLocks noGrp="1"/>
+          </p:cNvSpPr>
+          <p:nvPr>
+            <p:ph type="title"/>
+          </p:nvPr>
+        </p:nvSpPr>
+        <p:spPr>
+          <a:xfrm>
+            <a:off x="466722" y="586855"/>
+            <a:ext cx="3201366" cy="3387497"/>
+          </a:xfrm>
+        </p:spPr>
+        <p:txBody>
+          <a:bodyPr anchor="b">
+            <a:normAutofit/>
+          </a:bodyPr>
+          <a:lstStyle/>
+          <a:p>
+            <a:pPr algn="r"/>
+            <a:r>
+              <a:rPr lang="en-GB" sz="4000">
+                <a:solidFill>
+                  <a:srgbClr val="FFFFFF"/>
+                </a:solidFill>
+              </a:rPr>
               <a:t>References</a:t>
             </a:r>
           </a:p>
@@ -22582,12 +25523,113 @@
             <p:ph idx="1"/>
           </p:nvPr>
         </p:nvSpPr>
-        <p:spPr/>
+        <p:spPr>
+          <a:xfrm>
+            <a:off x="4876494" y="1722536"/>
+            <a:ext cx="6555347" cy="5546047"/>
+          </a:xfrm>
+        </p:spPr>
         <p:txBody>
-          <a:bodyPr/>
+          <a:bodyPr anchor="ctr">
+            <a:normAutofit/>
+          </a:bodyPr>
           <a:lstStyle/>
           <a:p>
-            <a:endParaRPr lang="en-GB"/>
+            <a:r>
+              <a:rPr lang="en-GB" sz="1800" dirty="0"/>
+              <a:t>[1] </a:t>
+            </a:r>
+            <a:r>
+              <a:rPr lang="en-US" altLang="en-US" sz="1800" dirty="0">
+                <a:latin typeface="Arial" panose="020B0604020202020204" pitchFamily="34" charset="0"/>
+              </a:rPr>
+              <a:t>Sahar Abdelnabi, Kai </a:t>
+            </a:r>
+            <a:r>
+              <a:rPr lang="en-US" altLang="en-US" sz="1800" dirty="0" err="1">
+                <a:latin typeface="Arial" panose="020B0604020202020204" pitchFamily="34" charset="0"/>
+              </a:rPr>
+              <a:t>Greshake</a:t>
+            </a:r>
+            <a:r>
+              <a:rPr lang="en-US" altLang="en-US" sz="1800" dirty="0">
+                <a:latin typeface="Arial" panose="020B0604020202020204" pitchFamily="34" charset="0"/>
+              </a:rPr>
+              <a:t>, Shailesh Mishra, Christoph Endres, Thorsten Holz, and Mario Fritz. 2023. Not What You’ve Signed Up For: Compromising Real-World LLM-Integrated Applications with Indirect Prompt Injection. (November 2023). </a:t>
+            </a:r>
+            <a:r>
+              <a:rPr lang="en-US" altLang="en-US" sz="1800" dirty="0" err="1">
+                <a:latin typeface="Arial" panose="020B0604020202020204" pitchFamily="34" charset="0"/>
+              </a:rPr>
+              <a:t>DOI:https</a:t>
+            </a:r>
+            <a:r>
+              <a:rPr lang="en-US" altLang="en-US" sz="1800" dirty="0">
+                <a:latin typeface="Arial" panose="020B0604020202020204" pitchFamily="34" charset="0"/>
+              </a:rPr>
+              <a:t>://doi.org/10.1145/3605764.3623985</a:t>
+            </a:r>
+          </a:p>
+          <a:p>
+            <a:r>
+              <a:rPr lang="en-US" altLang="en-US" sz="1800" dirty="0">
+                <a:latin typeface="Arial" panose="020B0604020202020204" pitchFamily="34" charset="0"/>
+              </a:rPr>
+              <a:t>[2] Dennis Rall, Bernhard Bauer, Mohit Mittal, and Thomas </a:t>
+            </a:r>
+            <a:r>
+              <a:rPr lang="en-US" altLang="en-US" sz="1800" dirty="0" err="1">
+                <a:latin typeface="Arial" panose="020B0604020202020204" pitchFamily="34" charset="0"/>
+              </a:rPr>
+              <a:t>Fraunholz</a:t>
+            </a:r>
+            <a:r>
+              <a:rPr lang="en-US" altLang="en-US" sz="1800" dirty="0">
+                <a:latin typeface="Arial" panose="020B0604020202020204" pitchFamily="34" charset="0"/>
+              </a:rPr>
+              <a:t>. 2025. Exploiting Web Search Tools of AI Agents for Data Exfiltration. arXiv.org. Retrieved December 3, 2025 from </a:t>
+            </a:r>
+            <a:r>
+              <a:rPr lang="en-US" altLang="en-US" sz="1800" dirty="0">
+                <a:latin typeface="Arial" panose="020B0604020202020204" pitchFamily="34" charset="0"/>
+                <a:hlinkClick r:id="rId2"/>
+              </a:rPr>
+              <a:t>https://arxiv.org/abs/2510.09093</a:t>
+            </a:r>
+            <a:endParaRPr lang="en-US" altLang="en-US" sz="1800" dirty="0">
+              <a:latin typeface="Arial" panose="020B0604020202020204" pitchFamily="34" charset="0"/>
+            </a:endParaRPr>
+          </a:p>
+          <a:p>
+            <a:r>
+              <a:rPr lang="en-US" altLang="en-US" sz="1800" dirty="0">
+                <a:latin typeface="Arial" panose="020B0604020202020204" pitchFamily="34" charset="0"/>
+              </a:rPr>
+              <a:t>[3] Eugene Bagdasaryan, Tsung-Yin Hsieh, Ben Nassi, and Vitaly Shmatikov. Abusing Images and Sounds for Indirect Instruction Injection in Multi-Modal LLMs. Retrieved from https://arxiv.org/pdf/2307.10490</a:t>
+            </a:r>
+          </a:p>
+          <a:p>
+            <a:endParaRPr lang="en-US" altLang="en-US" sz="2000" dirty="0">
+              <a:latin typeface="Arial" panose="020B0604020202020204" pitchFamily="34" charset="0"/>
+            </a:endParaRPr>
+          </a:p>
+          <a:p>
+            <a:endParaRPr lang="en-US" altLang="en-US" sz="2000" dirty="0">
+              <a:latin typeface="Arial" panose="020B0604020202020204" pitchFamily="34" charset="0"/>
+            </a:endParaRPr>
+          </a:p>
+          <a:p>
+            <a:endParaRPr lang="en-US" altLang="en-US" sz="2000" dirty="0">
+              <a:latin typeface="Arial" panose="020B0604020202020204" pitchFamily="34" charset="0"/>
+            </a:endParaRPr>
+          </a:p>
+          <a:p>
+            <a:endParaRPr lang="en-US" altLang="en-US" sz="2000" dirty="0">
+              <a:latin typeface="Arial" panose="020B0604020202020204" pitchFamily="34" charset="0"/>
+            </a:endParaRPr>
+          </a:p>
+          <a:p>
+            <a:endParaRPr lang="en-GB" sz="2000" dirty="0"/>
           </a:p>
         </p:txBody>
       </p:sp>
@@ -26518,7 +29560,7 @@
             <p:ph idx="1"/>
             <p:extLst>
               <p:ext uri="{D42A27DB-BD31-4B8C-83A1-F6EECF244321}">
-                <p14:modId xmlns:p14="http://schemas.microsoft.com/office/powerpoint/2010/main" val="2167569577"/>
+                <p14:modId xmlns:p14="http://schemas.microsoft.com/office/powerpoint/2010/main" val="394944209"/>
               </p:ext>
             </p:extLst>
           </p:nvPr>

--- a/Demonstration of progress/Demonstration of progress.pptx
+++ b/Demonstration of progress/Demonstration of progress.pptx
@@ -5,7 +5,7 @@
     <p:sldMasterId id="2147483648" r:id="rId1"/>
   </p:sldMasterIdLst>
   <p:notesMasterIdLst>
-    <p:notesMasterId r:id="rId20"/>
+    <p:notesMasterId r:id="rId21"/>
   </p:notesMasterIdLst>
   <p:sldIdLst>
     <p:sldId id="256" r:id="rId2"/>
@@ -18,14 +18,15 @@
     <p:sldId id="259" r:id="rId9"/>
     <p:sldId id="271" r:id="rId10"/>
     <p:sldId id="272" r:id="rId11"/>
-    <p:sldId id="263" r:id="rId12"/>
-    <p:sldId id="273" r:id="rId13"/>
-    <p:sldId id="260" r:id="rId14"/>
-    <p:sldId id="275" r:id="rId15"/>
-    <p:sldId id="274" r:id="rId16"/>
-    <p:sldId id="262" r:id="rId17"/>
-    <p:sldId id="261" r:id="rId18"/>
-    <p:sldId id="265" r:id="rId19"/>
+    <p:sldId id="276" r:id="rId12"/>
+    <p:sldId id="263" r:id="rId13"/>
+    <p:sldId id="273" r:id="rId14"/>
+    <p:sldId id="260" r:id="rId15"/>
+    <p:sldId id="275" r:id="rId16"/>
+    <p:sldId id="274" r:id="rId17"/>
+    <p:sldId id="262" r:id="rId18"/>
+    <p:sldId id="261" r:id="rId19"/>
+    <p:sldId id="265" r:id="rId20"/>
   </p:sldIdLst>
   <p:sldSz cx="12192000" cy="6858000"/>
   <p:notesSz cx="6858000" cy="9144000"/>
@@ -5243,6 +5244,927 @@
       <a:schemeClr val="accent4"/>
       <a:schemeClr val="accent5"/>
       <a:schemeClr val="accent6"/>
+    </dgm:txFillClrLst>
+    <dgm:txEffectClrLst/>
+  </dgm:styleLbl>
+</dgm:colorsDef>
+</file>
+
+<file path=ppt/diagrams/colors7.xml><?xml version="1.0" encoding="utf-8"?>
+<dgm:colorsDef xmlns:dgm="http://schemas.openxmlformats.org/drawingml/2006/diagram" xmlns:a="http://schemas.openxmlformats.org/drawingml/2006/main" uniqueId="urn:microsoft.com/office/officeart/2018/5/colors/Iconchunking_neutralbg_colorful1">
+  <dgm:title val=""/>
+  <dgm:desc val=""/>
+  <dgm:catLst>
+    <dgm:cat type="colorful" pri="10100"/>
+  </dgm:catLst>
+  <dgm:styleLbl name="node0">
+    <dgm:fillClrLst meth="repeat">
+      <a:schemeClr val="accent1"/>
+    </dgm:fillClrLst>
+    <dgm:linClrLst meth="repeat">
+      <a:schemeClr val="lt1"/>
+    </dgm:linClrLst>
+    <dgm:effectClrLst/>
+    <dgm:txLinClrLst/>
+    <dgm:txFillClrLst/>
+    <dgm:txEffectClrLst/>
+  </dgm:styleLbl>
+  <dgm:styleLbl name="node1">
+    <dgm:fillClrLst meth="repeat">
+      <a:schemeClr val="accent2"/>
+      <a:schemeClr val="accent3"/>
+      <a:schemeClr val="accent4"/>
+      <a:schemeClr val="accent5"/>
+      <a:schemeClr val="accent6"/>
+    </dgm:fillClrLst>
+    <dgm:linClrLst meth="repeat">
+      <a:schemeClr val="lt1">
+        <a:alpha val="0"/>
+      </a:schemeClr>
+    </dgm:linClrLst>
+    <dgm:effectClrLst/>
+    <dgm:txLinClrLst/>
+    <dgm:txFillClrLst/>
+    <dgm:txEffectClrLst/>
+  </dgm:styleLbl>
+  <dgm:styleLbl name="alignNode1">
+    <dgm:fillClrLst meth="repeat">
+      <a:schemeClr val="accent2"/>
+      <a:schemeClr val="accent3"/>
+      <a:schemeClr val="accent4"/>
+      <a:schemeClr val="accent5"/>
+      <a:schemeClr val="accent6"/>
+    </dgm:fillClrLst>
+    <dgm:linClrLst meth="repeat">
+      <a:schemeClr val="accent2"/>
+      <a:schemeClr val="accent3"/>
+      <a:schemeClr val="accent4"/>
+      <a:schemeClr val="accent5"/>
+      <a:schemeClr val="accent6"/>
+    </dgm:linClrLst>
+    <dgm:effectClrLst/>
+    <dgm:txLinClrLst/>
+    <dgm:txFillClrLst/>
+    <dgm:txEffectClrLst/>
+  </dgm:styleLbl>
+  <dgm:styleLbl name="lnNode1">
+    <dgm:fillClrLst meth="repeat">
+      <a:schemeClr val="accent2"/>
+      <a:schemeClr val="accent3"/>
+      <a:schemeClr val="accent4"/>
+      <a:schemeClr val="accent5"/>
+      <a:schemeClr val="accent6"/>
+    </dgm:fillClrLst>
+    <dgm:linClrLst meth="repeat">
+      <a:schemeClr val="lt1"/>
+    </dgm:linClrLst>
+    <dgm:effectClrLst/>
+    <dgm:txLinClrLst/>
+    <dgm:txFillClrLst/>
+    <dgm:txEffectClrLst/>
+  </dgm:styleLbl>
+  <dgm:styleLbl name="vennNode1">
+    <dgm:fillClrLst meth="repeat">
+      <a:schemeClr val="accent2">
+        <a:alpha val="50000"/>
+      </a:schemeClr>
+      <a:schemeClr val="accent3">
+        <a:alpha val="50000"/>
+      </a:schemeClr>
+      <a:schemeClr val="accent4">
+        <a:alpha val="50000"/>
+      </a:schemeClr>
+      <a:schemeClr val="accent5">
+        <a:alpha val="50000"/>
+      </a:schemeClr>
+      <a:schemeClr val="accent6">
+        <a:alpha val="50000"/>
+      </a:schemeClr>
+    </dgm:fillClrLst>
+    <dgm:linClrLst meth="repeat">
+      <a:schemeClr val="lt1"/>
+    </dgm:linClrLst>
+    <dgm:effectClrLst/>
+    <dgm:txLinClrLst/>
+    <dgm:txFillClrLst/>
+    <dgm:txEffectClrLst/>
+  </dgm:styleLbl>
+  <dgm:styleLbl name="node2">
+    <dgm:fillClrLst>
+      <a:schemeClr val="accent2"/>
+    </dgm:fillClrLst>
+    <dgm:linClrLst meth="repeat">
+      <a:schemeClr val="lt1"/>
+    </dgm:linClrLst>
+    <dgm:effectClrLst/>
+    <dgm:txLinClrLst/>
+    <dgm:txFillClrLst/>
+    <dgm:txEffectClrLst/>
+  </dgm:styleLbl>
+  <dgm:styleLbl name="node3">
+    <dgm:fillClrLst>
+      <a:schemeClr val="accent3"/>
+    </dgm:fillClrLst>
+    <dgm:linClrLst meth="repeat">
+      <a:schemeClr val="lt1"/>
+    </dgm:linClrLst>
+    <dgm:effectClrLst/>
+    <dgm:txLinClrLst/>
+    <dgm:txFillClrLst/>
+    <dgm:txEffectClrLst/>
+  </dgm:styleLbl>
+  <dgm:styleLbl name="node4">
+    <dgm:fillClrLst>
+      <a:schemeClr val="accent4"/>
+    </dgm:fillClrLst>
+    <dgm:linClrLst meth="repeat">
+      <a:schemeClr val="lt1"/>
+    </dgm:linClrLst>
+    <dgm:effectClrLst/>
+    <dgm:txLinClrLst/>
+    <dgm:txFillClrLst/>
+    <dgm:txEffectClrLst/>
+  </dgm:styleLbl>
+  <dgm:styleLbl name="fgImgPlace1">
+    <dgm:fillClrLst meth="repeat">
+      <a:schemeClr val="accent2">
+        <a:tint val="50000"/>
+      </a:schemeClr>
+      <a:schemeClr val="accent3">
+        <a:tint val="50000"/>
+      </a:schemeClr>
+      <a:schemeClr val="accent4">
+        <a:tint val="50000"/>
+      </a:schemeClr>
+      <a:schemeClr val="accent5">
+        <a:tint val="50000"/>
+      </a:schemeClr>
+      <a:schemeClr val="accent6">
+        <a:tint val="50000"/>
+      </a:schemeClr>
+    </dgm:fillClrLst>
+    <dgm:linClrLst meth="repeat">
+      <a:schemeClr val="lt1"/>
+    </dgm:linClrLst>
+    <dgm:effectClrLst/>
+    <dgm:txLinClrLst/>
+    <dgm:txFillClrLst meth="repeat">
+      <a:schemeClr val="lt1"/>
+    </dgm:txFillClrLst>
+    <dgm:txEffectClrLst/>
+  </dgm:styleLbl>
+  <dgm:styleLbl name="alignImgPlace1">
+    <dgm:fillClrLst>
+      <a:schemeClr val="accent1">
+        <a:tint val="50000"/>
+      </a:schemeClr>
+      <a:schemeClr val="accent2">
+        <a:tint val="20000"/>
+      </a:schemeClr>
+    </dgm:fillClrLst>
+    <dgm:linClrLst meth="repeat">
+      <a:schemeClr val="lt1"/>
+    </dgm:linClrLst>
+    <dgm:effectClrLst/>
+    <dgm:txLinClrLst/>
+    <dgm:txFillClrLst meth="repeat">
+      <a:schemeClr val="lt1"/>
+    </dgm:txFillClrLst>
+    <dgm:txEffectClrLst/>
+  </dgm:styleLbl>
+  <dgm:styleLbl name="bgImgPlace1">
+    <dgm:fillClrLst>
+      <a:schemeClr val="accent1">
+        <a:tint val="50000"/>
+      </a:schemeClr>
+      <a:schemeClr val="accent2">
+        <a:tint val="20000"/>
+      </a:schemeClr>
+    </dgm:fillClrLst>
+    <dgm:linClrLst meth="repeat">
+      <a:schemeClr val="lt1"/>
+    </dgm:linClrLst>
+    <dgm:effectClrLst/>
+    <dgm:txLinClrLst/>
+    <dgm:txFillClrLst meth="repeat">
+      <a:schemeClr val="lt1"/>
+    </dgm:txFillClrLst>
+    <dgm:txEffectClrLst/>
+  </dgm:styleLbl>
+  <dgm:styleLbl name="sibTrans2D1">
+    <dgm:fillClrLst meth="repeat">
+      <a:schemeClr val="accent2"/>
+      <a:schemeClr val="accent3"/>
+      <a:schemeClr val="accent4"/>
+      <a:schemeClr val="accent5"/>
+      <a:schemeClr val="accent6"/>
+    </dgm:fillClrLst>
+    <dgm:linClrLst meth="cycle">
+      <a:schemeClr val="lt1"/>
+    </dgm:linClrLst>
+    <dgm:effectClrLst/>
+    <dgm:txLinClrLst/>
+    <dgm:txFillClrLst/>
+    <dgm:txEffectClrLst/>
+  </dgm:styleLbl>
+  <dgm:styleLbl name="fgSibTrans2D1">
+    <dgm:fillClrLst meth="repeat">
+      <a:schemeClr val="accent2"/>
+      <a:schemeClr val="accent3"/>
+      <a:schemeClr val="accent4"/>
+      <a:schemeClr val="accent5"/>
+      <a:schemeClr val="accent6"/>
+    </dgm:fillClrLst>
+    <dgm:linClrLst meth="cycle">
+      <a:schemeClr val="lt1"/>
+    </dgm:linClrLst>
+    <dgm:effectClrLst/>
+    <dgm:txLinClrLst/>
+    <dgm:txFillClrLst meth="repeat">
+      <a:schemeClr val="lt1"/>
+    </dgm:txFillClrLst>
+    <dgm:txEffectClrLst/>
+  </dgm:styleLbl>
+  <dgm:styleLbl name="bgSibTrans2D1">
+    <dgm:fillClrLst meth="repeat">
+      <a:schemeClr val="accent2"/>
+      <a:schemeClr val="accent3"/>
+      <a:schemeClr val="accent4"/>
+      <a:schemeClr val="accent5"/>
+      <a:schemeClr val="accent6"/>
+    </dgm:fillClrLst>
+    <dgm:linClrLst meth="cycle">
+      <a:schemeClr val="lt1"/>
+    </dgm:linClrLst>
+    <dgm:effectClrLst/>
+    <dgm:txLinClrLst/>
+    <dgm:txFillClrLst meth="repeat">
+      <a:schemeClr val="lt1"/>
+    </dgm:txFillClrLst>
+    <dgm:txEffectClrLst/>
+  </dgm:styleLbl>
+  <dgm:styleLbl name="sibTrans1D1">
+    <dgm:fillClrLst meth="repeat">
+      <a:schemeClr val="accent2"/>
+      <a:schemeClr val="accent3"/>
+      <a:schemeClr val="accent4"/>
+      <a:schemeClr val="accent5"/>
+      <a:schemeClr val="accent6"/>
+    </dgm:fillClrLst>
+    <dgm:linClrLst meth="repeat">
+      <a:schemeClr val="accent2"/>
+      <a:schemeClr val="accent3"/>
+      <a:schemeClr val="accent4"/>
+      <a:schemeClr val="accent5"/>
+      <a:schemeClr val="accent6"/>
+    </dgm:linClrLst>
+    <dgm:effectClrLst/>
+    <dgm:txLinClrLst/>
+    <dgm:txFillClrLst meth="repeat">
+      <a:schemeClr val="tx1"/>
+    </dgm:txFillClrLst>
+    <dgm:txEffectClrLst/>
+  </dgm:styleLbl>
+  <dgm:styleLbl name="callout">
+    <dgm:fillClrLst meth="repeat">
+      <a:schemeClr val="accent2"/>
+    </dgm:fillClrLst>
+    <dgm:linClrLst meth="repeat">
+      <a:schemeClr val="accent2">
+        <a:tint val="50000"/>
+      </a:schemeClr>
+    </dgm:linClrLst>
+    <dgm:effectClrLst/>
+    <dgm:txLinClrLst/>
+    <dgm:txFillClrLst meth="repeat">
+      <a:schemeClr val="tx1"/>
+    </dgm:txFillClrLst>
+    <dgm:txEffectClrLst/>
+  </dgm:styleLbl>
+  <dgm:styleLbl name="asst0">
+    <dgm:fillClrLst meth="repeat">
+      <a:schemeClr val="accent1"/>
+    </dgm:fillClrLst>
+    <dgm:linClrLst meth="repeat">
+      <a:schemeClr val="lt1"/>
+    </dgm:linClrLst>
+    <dgm:effectClrLst/>
+    <dgm:txLinClrLst/>
+    <dgm:txFillClrLst/>
+    <dgm:txEffectClrLst/>
+  </dgm:styleLbl>
+  <dgm:styleLbl name="asst1">
+    <dgm:fillClrLst meth="repeat">
+      <a:schemeClr val="accent2"/>
+    </dgm:fillClrLst>
+    <dgm:linClrLst meth="repeat">
+      <a:schemeClr val="lt1"/>
+    </dgm:linClrLst>
+    <dgm:effectClrLst/>
+    <dgm:txLinClrLst/>
+    <dgm:txFillClrLst/>
+    <dgm:txEffectClrLst/>
+  </dgm:styleLbl>
+  <dgm:styleLbl name="asst2">
+    <dgm:fillClrLst>
+      <a:schemeClr val="accent3"/>
+    </dgm:fillClrLst>
+    <dgm:linClrLst meth="repeat">
+      <a:schemeClr val="lt1"/>
+    </dgm:linClrLst>
+    <dgm:effectClrLst/>
+    <dgm:txLinClrLst/>
+    <dgm:txFillClrLst/>
+    <dgm:txEffectClrLst/>
+  </dgm:styleLbl>
+  <dgm:styleLbl name="asst3">
+    <dgm:fillClrLst>
+      <a:schemeClr val="accent4"/>
+    </dgm:fillClrLst>
+    <dgm:linClrLst meth="repeat">
+      <a:schemeClr val="lt1"/>
+    </dgm:linClrLst>
+    <dgm:effectClrLst/>
+    <dgm:txLinClrLst/>
+    <dgm:txFillClrLst/>
+    <dgm:txEffectClrLst/>
+  </dgm:styleLbl>
+  <dgm:styleLbl name="asst4">
+    <dgm:fillClrLst>
+      <a:schemeClr val="accent5"/>
+    </dgm:fillClrLst>
+    <dgm:linClrLst meth="repeat">
+      <a:schemeClr val="lt1"/>
+    </dgm:linClrLst>
+    <dgm:effectClrLst/>
+    <dgm:txLinClrLst/>
+    <dgm:txFillClrLst/>
+    <dgm:txEffectClrLst/>
+  </dgm:styleLbl>
+  <dgm:styleLbl name="parChTrans2D1">
+    <dgm:fillClrLst meth="repeat">
+      <a:schemeClr val="accent2"/>
+    </dgm:fillClrLst>
+    <dgm:linClrLst meth="repeat">
+      <a:schemeClr val="lt1"/>
+    </dgm:linClrLst>
+    <dgm:effectClrLst/>
+    <dgm:txLinClrLst/>
+    <dgm:txFillClrLst meth="repeat">
+      <a:schemeClr val="lt1"/>
+    </dgm:txFillClrLst>
+    <dgm:txEffectClrLst/>
+  </dgm:styleLbl>
+  <dgm:styleLbl name="parChTrans2D2">
+    <dgm:fillClrLst meth="repeat">
+      <a:schemeClr val="accent3"/>
+    </dgm:fillClrLst>
+    <dgm:linClrLst meth="repeat">
+      <a:schemeClr val="lt1"/>
+    </dgm:linClrLst>
+    <dgm:effectClrLst/>
+    <dgm:txLinClrLst/>
+    <dgm:txFillClrLst/>
+    <dgm:txEffectClrLst/>
+  </dgm:styleLbl>
+  <dgm:styleLbl name="parChTrans2D3">
+    <dgm:fillClrLst meth="repeat">
+      <a:schemeClr val="accent4"/>
+    </dgm:fillClrLst>
+    <dgm:linClrLst meth="repeat">
+      <a:schemeClr val="lt1"/>
+    </dgm:linClrLst>
+    <dgm:effectClrLst/>
+    <dgm:txLinClrLst/>
+    <dgm:txFillClrLst/>
+    <dgm:txEffectClrLst/>
+  </dgm:styleLbl>
+  <dgm:styleLbl name="parChTrans2D4">
+    <dgm:fillClrLst meth="repeat">
+      <a:schemeClr val="accent5"/>
+    </dgm:fillClrLst>
+    <dgm:linClrLst meth="repeat">
+      <a:schemeClr val="lt1"/>
+    </dgm:linClrLst>
+    <dgm:effectClrLst/>
+    <dgm:txLinClrLst/>
+    <dgm:txFillClrLst meth="repeat">
+      <a:schemeClr val="lt1"/>
+    </dgm:txFillClrLst>
+    <dgm:txEffectClrLst/>
+  </dgm:styleLbl>
+  <dgm:styleLbl name="parChTrans1D1">
+    <dgm:fillClrLst meth="repeat">
+      <a:schemeClr val="accent2"/>
+    </dgm:fillClrLst>
+    <dgm:linClrLst meth="repeat">
+      <a:schemeClr val="accent1"/>
+    </dgm:linClrLst>
+    <dgm:effectClrLst/>
+    <dgm:txLinClrLst/>
+    <dgm:txFillClrLst meth="repeat">
+      <a:schemeClr val="tx1"/>
+    </dgm:txFillClrLst>
+    <dgm:txEffectClrLst/>
+  </dgm:styleLbl>
+  <dgm:styleLbl name="parChTrans1D2">
+    <dgm:fillClrLst meth="repeat">
+      <a:schemeClr val="accent3">
+        <a:tint val="90000"/>
+      </a:schemeClr>
+    </dgm:fillClrLst>
+    <dgm:linClrLst meth="repeat">
+      <a:schemeClr val="accent2"/>
+    </dgm:linClrLst>
+    <dgm:effectClrLst/>
+    <dgm:txLinClrLst/>
+    <dgm:txFillClrLst meth="repeat">
+      <a:schemeClr val="tx1"/>
+    </dgm:txFillClrLst>
+    <dgm:txEffectClrLst/>
+  </dgm:styleLbl>
+  <dgm:styleLbl name="parChTrans1D3">
+    <dgm:fillClrLst meth="repeat">
+      <a:schemeClr val="accent4">
+        <a:tint val="70000"/>
+      </a:schemeClr>
+    </dgm:fillClrLst>
+    <dgm:linClrLst meth="repeat">
+      <a:schemeClr val="accent3"/>
+    </dgm:linClrLst>
+    <dgm:effectClrLst/>
+    <dgm:txLinClrLst/>
+    <dgm:txFillClrLst meth="repeat">
+      <a:schemeClr val="tx1"/>
+    </dgm:txFillClrLst>
+    <dgm:txEffectClrLst/>
+  </dgm:styleLbl>
+  <dgm:styleLbl name="parChTrans1D4">
+    <dgm:fillClrLst meth="repeat">
+      <a:schemeClr val="accent5">
+        <a:tint val="50000"/>
+      </a:schemeClr>
+    </dgm:fillClrLst>
+    <dgm:linClrLst meth="repeat">
+      <a:schemeClr val="accent4"/>
+    </dgm:linClrLst>
+    <dgm:effectClrLst/>
+    <dgm:txLinClrLst/>
+    <dgm:txFillClrLst meth="repeat">
+      <a:schemeClr val="tx1"/>
+    </dgm:txFillClrLst>
+    <dgm:txEffectClrLst/>
+  </dgm:styleLbl>
+  <dgm:styleLbl name="fgAcc1">
+    <dgm:fillClrLst meth="repeat">
+      <a:schemeClr val="lt1">
+        <a:alpha val="90000"/>
+      </a:schemeClr>
+    </dgm:fillClrLst>
+    <dgm:linClrLst meth="repeat">
+      <a:schemeClr val="accent2"/>
+      <a:schemeClr val="accent3"/>
+      <a:schemeClr val="accent4"/>
+      <a:schemeClr val="accent5"/>
+      <a:schemeClr val="accent6"/>
+    </dgm:linClrLst>
+    <dgm:effectClrLst/>
+    <dgm:txLinClrLst/>
+    <dgm:txFillClrLst meth="repeat">
+      <a:schemeClr val="dk1"/>
+    </dgm:txFillClrLst>
+    <dgm:txEffectClrLst/>
+  </dgm:styleLbl>
+  <dgm:styleLbl name="conFgAcc1">
+    <dgm:fillClrLst meth="repeat">
+      <a:schemeClr val="lt1">
+        <a:alpha val="90000"/>
+      </a:schemeClr>
+    </dgm:fillClrLst>
+    <dgm:linClrLst meth="repeat">
+      <a:schemeClr val="accent2"/>
+      <a:schemeClr val="accent3"/>
+      <a:schemeClr val="accent4"/>
+      <a:schemeClr val="accent5"/>
+      <a:schemeClr val="accent6"/>
+    </dgm:linClrLst>
+    <dgm:effectClrLst/>
+    <dgm:txLinClrLst/>
+    <dgm:txFillClrLst meth="repeat">
+      <a:schemeClr val="dk1"/>
+    </dgm:txFillClrLst>
+    <dgm:txEffectClrLst/>
+  </dgm:styleLbl>
+  <dgm:styleLbl name="alignAcc1">
+    <dgm:fillClrLst meth="repeat">
+      <a:schemeClr val="lt1">
+        <a:alpha val="90000"/>
+      </a:schemeClr>
+    </dgm:fillClrLst>
+    <dgm:linClrLst meth="repeat">
+      <a:schemeClr val="accent2"/>
+      <a:schemeClr val="accent3"/>
+      <a:schemeClr val="accent4"/>
+      <a:schemeClr val="accent5"/>
+      <a:schemeClr val="accent6"/>
+    </dgm:linClrLst>
+    <dgm:effectClrLst/>
+    <dgm:txLinClrLst/>
+    <dgm:txFillClrLst meth="repeat">
+      <a:schemeClr val="dk1"/>
+    </dgm:txFillClrLst>
+    <dgm:txEffectClrLst/>
+  </dgm:styleLbl>
+  <dgm:styleLbl name="trAlignAcc1">
+    <dgm:fillClrLst meth="repeat">
+      <a:schemeClr val="lt1">
+        <a:alpha val="40000"/>
+      </a:schemeClr>
+    </dgm:fillClrLst>
+    <dgm:linClrLst meth="repeat">
+      <a:schemeClr val="accent1"/>
+    </dgm:linClrLst>
+    <dgm:effectClrLst/>
+    <dgm:txLinClrLst/>
+    <dgm:txFillClrLst meth="repeat">
+      <a:schemeClr val="dk1"/>
+    </dgm:txFillClrLst>
+    <dgm:txEffectClrLst/>
+  </dgm:styleLbl>
+  <dgm:styleLbl name="bgAcc1">
+    <dgm:fillClrLst meth="repeat">
+      <a:schemeClr val="lt1">
+        <a:alpha val="90000"/>
+      </a:schemeClr>
+    </dgm:fillClrLst>
+    <dgm:linClrLst meth="repeat">
+      <a:schemeClr val="accent2"/>
+      <a:schemeClr val="accent3"/>
+      <a:schemeClr val="accent4"/>
+      <a:schemeClr val="accent5"/>
+      <a:schemeClr val="accent6"/>
+    </dgm:linClrLst>
+    <dgm:effectClrLst/>
+    <dgm:txLinClrLst/>
+    <dgm:txFillClrLst meth="repeat">
+      <a:schemeClr val="dk1"/>
+    </dgm:txFillClrLst>
+    <dgm:txEffectClrLst/>
+  </dgm:styleLbl>
+  <dgm:styleLbl name="solidFgAcc1">
+    <dgm:fillClrLst meth="repeat">
+      <a:schemeClr val="lt1"/>
+    </dgm:fillClrLst>
+    <dgm:linClrLst meth="repeat">
+      <a:schemeClr val="accent2"/>
+      <a:schemeClr val="accent3"/>
+      <a:schemeClr val="accent4"/>
+      <a:schemeClr val="accent5"/>
+      <a:schemeClr val="accent6"/>
+    </dgm:linClrLst>
+    <dgm:effectClrLst/>
+    <dgm:txLinClrLst/>
+    <dgm:txFillClrLst meth="repeat">
+      <a:schemeClr val="dk1"/>
+    </dgm:txFillClrLst>
+    <dgm:txEffectClrLst/>
+  </dgm:styleLbl>
+  <dgm:styleLbl name="solidAlignAcc1">
+    <dgm:fillClrLst meth="repeat">
+      <a:schemeClr val="lt1"/>
+    </dgm:fillClrLst>
+    <dgm:linClrLst meth="repeat">
+      <a:schemeClr val="accent2"/>
+      <a:schemeClr val="accent3"/>
+      <a:schemeClr val="accent4"/>
+      <a:schemeClr val="accent5"/>
+      <a:schemeClr val="accent6"/>
+    </dgm:linClrLst>
+    <dgm:effectClrLst/>
+    <dgm:txLinClrLst/>
+    <dgm:txFillClrLst meth="repeat">
+      <a:schemeClr val="dk1"/>
+    </dgm:txFillClrLst>
+    <dgm:txEffectClrLst/>
+  </dgm:styleLbl>
+  <dgm:styleLbl name="solidBgAcc1">
+    <dgm:fillClrLst meth="repeat">
+      <a:schemeClr val="lt1"/>
+    </dgm:fillClrLst>
+    <dgm:linClrLst meth="repeat">
+      <a:schemeClr val="accent2"/>
+      <a:schemeClr val="accent3"/>
+      <a:schemeClr val="accent4"/>
+      <a:schemeClr val="accent5"/>
+      <a:schemeClr val="accent6"/>
+    </dgm:linClrLst>
+    <dgm:effectClrLst/>
+    <dgm:txLinClrLst/>
+    <dgm:txFillClrLst meth="repeat">
+      <a:schemeClr val="dk1"/>
+    </dgm:txFillClrLst>
+    <dgm:txEffectClrLst/>
+  </dgm:styleLbl>
+  <dgm:styleLbl name="fgAccFollowNode1">
+    <dgm:fillClrLst meth="repeat">
+      <a:schemeClr val="accent2">
+        <a:tint val="40000"/>
+        <a:alpha val="90000"/>
+      </a:schemeClr>
+      <a:schemeClr val="accent3">
+        <a:tint val="40000"/>
+        <a:alpha val="90000"/>
+      </a:schemeClr>
+      <a:schemeClr val="accent4">
+        <a:tint val="40000"/>
+        <a:alpha val="90000"/>
+      </a:schemeClr>
+      <a:schemeClr val="accent5">
+        <a:tint val="40000"/>
+        <a:alpha val="90000"/>
+      </a:schemeClr>
+      <a:schemeClr val="accent6">
+        <a:tint val="40000"/>
+        <a:alpha val="90000"/>
+      </a:schemeClr>
+    </dgm:fillClrLst>
+    <dgm:linClrLst meth="repeat">
+      <a:schemeClr val="accent2">
+        <a:tint val="40000"/>
+        <a:alpha val="90000"/>
+      </a:schemeClr>
+      <a:schemeClr val="accent3">
+        <a:tint val="40000"/>
+        <a:alpha val="90000"/>
+      </a:schemeClr>
+      <a:schemeClr val="accent4">
+        <a:tint val="40000"/>
+        <a:alpha val="90000"/>
+      </a:schemeClr>
+      <a:schemeClr val="accent5">
+        <a:tint val="40000"/>
+        <a:alpha val="90000"/>
+      </a:schemeClr>
+      <a:schemeClr val="accent6">
+        <a:tint val="40000"/>
+        <a:alpha val="90000"/>
+      </a:schemeClr>
+    </dgm:linClrLst>
+    <dgm:effectClrLst/>
+    <dgm:txLinClrLst/>
+    <dgm:txFillClrLst meth="repeat">
+      <a:schemeClr val="dk1"/>
+    </dgm:txFillClrLst>
+    <dgm:txEffectClrLst/>
+  </dgm:styleLbl>
+  <dgm:styleLbl name="alignAccFollowNode1">
+    <dgm:fillClrLst meth="repeat">
+      <a:schemeClr val="accent2">
+        <a:tint val="40000"/>
+        <a:alpha val="90000"/>
+      </a:schemeClr>
+      <a:schemeClr val="accent3">
+        <a:tint val="40000"/>
+        <a:alpha val="90000"/>
+      </a:schemeClr>
+      <a:schemeClr val="accent4">
+        <a:tint val="40000"/>
+        <a:alpha val="90000"/>
+      </a:schemeClr>
+      <a:schemeClr val="accent5">
+        <a:tint val="40000"/>
+        <a:alpha val="90000"/>
+      </a:schemeClr>
+      <a:schemeClr val="accent6">
+        <a:tint val="40000"/>
+        <a:alpha val="90000"/>
+      </a:schemeClr>
+    </dgm:fillClrLst>
+    <dgm:linClrLst meth="repeat">
+      <a:schemeClr val="accent2">
+        <a:tint val="40000"/>
+        <a:alpha val="90000"/>
+      </a:schemeClr>
+      <a:schemeClr val="accent3">
+        <a:tint val="40000"/>
+        <a:alpha val="90000"/>
+      </a:schemeClr>
+      <a:schemeClr val="accent4">
+        <a:tint val="40000"/>
+        <a:alpha val="90000"/>
+      </a:schemeClr>
+      <a:schemeClr val="accent5">
+        <a:tint val="40000"/>
+        <a:alpha val="90000"/>
+      </a:schemeClr>
+      <a:schemeClr val="accent6">
+        <a:tint val="40000"/>
+        <a:alpha val="90000"/>
+      </a:schemeClr>
+    </dgm:linClrLst>
+    <dgm:effectClrLst/>
+    <dgm:txLinClrLst/>
+    <dgm:txFillClrLst meth="repeat">
+      <a:schemeClr val="dk1"/>
+    </dgm:txFillClrLst>
+    <dgm:txEffectClrLst/>
+  </dgm:styleLbl>
+  <dgm:styleLbl name="bgAccFollowNode1">
+    <dgm:fillClrLst meth="repeat">
+      <a:schemeClr val="accent2">
+        <a:tint val="40000"/>
+        <a:alpha val="90000"/>
+      </a:schemeClr>
+      <a:schemeClr val="accent3">
+        <a:tint val="40000"/>
+        <a:alpha val="90000"/>
+      </a:schemeClr>
+      <a:schemeClr val="accent4">
+        <a:tint val="40000"/>
+        <a:alpha val="90000"/>
+      </a:schemeClr>
+      <a:schemeClr val="accent5">
+        <a:tint val="40000"/>
+        <a:alpha val="90000"/>
+      </a:schemeClr>
+      <a:schemeClr val="accent6">
+        <a:tint val="40000"/>
+        <a:alpha val="90000"/>
+      </a:schemeClr>
+    </dgm:fillClrLst>
+    <dgm:linClrLst meth="repeat">
+      <a:schemeClr val="accent2">
+        <a:tint val="40000"/>
+        <a:alpha val="90000"/>
+      </a:schemeClr>
+      <a:schemeClr val="accent3">
+        <a:tint val="40000"/>
+        <a:alpha val="90000"/>
+      </a:schemeClr>
+      <a:schemeClr val="accent4">
+        <a:tint val="40000"/>
+        <a:alpha val="90000"/>
+      </a:schemeClr>
+      <a:schemeClr val="accent5">
+        <a:tint val="40000"/>
+        <a:alpha val="90000"/>
+      </a:schemeClr>
+      <a:schemeClr val="accent6">
+        <a:tint val="40000"/>
+        <a:alpha val="90000"/>
+      </a:schemeClr>
+    </dgm:linClrLst>
+    <dgm:effectClrLst/>
+    <dgm:txLinClrLst/>
+    <dgm:txFillClrLst meth="repeat">
+      <a:schemeClr val="dk1"/>
+    </dgm:txFillClrLst>
+    <dgm:txEffectClrLst/>
+  </dgm:styleLbl>
+  <dgm:styleLbl name="fgAcc0">
+    <dgm:fillClrLst meth="repeat">
+      <a:schemeClr val="lt1">
+        <a:alpha val="90000"/>
+      </a:schemeClr>
+    </dgm:fillClrLst>
+    <dgm:linClrLst>
+      <a:schemeClr val="accent1"/>
+    </dgm:linClrLst>
+    <dgm:effectClrLst/>
+    <dgm:txLinClrLst/>
+    <dgm:txFillClrLst meth="repeat">
+      <a:schemeClr val="dk1"/>
+    </dgm:txFillClrLst>
+    <dgm:txEffectClrLst/>
+  </dgm:styleLbl>
+  <dgm:styleLbl name="fgAcc2">
+    <dgm:fillClrLst meth="repeat">
+      <a:schemeClr val="lt1">
+        <a:alpha val="90000"/>
+      </a:schemeClr>
+    </dgm:fillClrLst>
+    <dgm:linClrLst>
+      <a:schemeClr val="accent2"/>
+    </dgm:linClrLst>
+    <dgm:effectClrLst/>
+    <dgm:txLinClrLst/>
+    <dgm:txFillClrLst meth="repeat">
+      <a:schemeClr val="dk1"/>
+    </dgm:txFillClrLst>
+    <dgm:txEffectClrLst/>
+  </dgm:styleLbl>
+  <dgm:styleLbl name="fgAcc3">
+    <dgm:fillClrLst meth="repeat">
+      <a:schemeClr val="lt1">
+        <a:alpha val="90000"/>
+      </a:schemeClr>
+    </dgm:fillClrLst>
+    <dgm:linClrLst>
+      <a:schemeClr val="accent3"/>
+    </dgm:linClrLst>
+    <dgm:effectClrLst/>
+    <dgm:txLinClrLst/>
+    <dgm:txFillClrLst meth="repeat">
+      <a:schemeClr val="dk1"/>
+    </dgm:txFillClrLst>
+    <dgm:txEffectClrLst/>
+  </dgm:styleLbl>
+  <dgm:styleLbl name="fgAcc4">
+    <dgm:fillClrLst meth="repeat">
+      <a:schemeClr val="lt1">
+        <a:alpha val="90000"/>
+      </a:schemeClr>
+    </dgm:fillClrLst>
+    <dgm:linClrLst>
+      <a:schemeClr val="accent4"/>
+    </dgm:linClrLst>
+    <dgm:effectClrLst/>
+    <dgm:txLinClrLst/>
+    <dgm:txFillClrLst meth="repeat">
+      <a:schemeClr val="dk1"/>
+    </dgm:txFillClrLst>
+    <dgm:txEffectClrLst/>
+  </dgm:styleLbl>
+  <dgm:styleLbl name="bgShp">
+    <dgm:fillClrLst meth="repeat">
+      <a:schemeClr val="bg1">
+        <a:lumMod val="95000"/>
+      </a:schemeClr>
+    </dgm:fillClrLst>
+    <dgm:linClrLst meth="repeat">
+      <a:schemeClr val="dk1"/>
+    </dgm:linClrLst>
+    <dgm:effectClrLst/>
+    <dgm:txLinClrLst/>
+    <dgm:txFillClrLst meth="repeat">
+      <a:schemeClr val="dk1"/>
+    </dgm:txFillClrLst>
+    <dgm:txEffectClrLst/>
+  </dgm:styleLbl>
+  <dgm:styleLbl name="dkBgShp">
+    <dgm:fillClrLst meth="repeat">
+      <a:schemeClr val="accent2">
+        <a:shade val="90000"/>
+      </a:schemeClr>
+    </dgm:fillClrLst>
+    <dgm:linClrLst meth="repeat">
+      <a:schemeClr val="dk1"/>
+    </dgm:linClrLst>
+    <dgm:effectClrLst/>
+    <dgm:txLinClrLst/>
+    <dgm:txFillClrLst meth="repeat">
+      <a:schemeClr val="lt1"/>
+    </dgm:txFillClrLst>
+    <dgm:txEffectClrLst/>
+  </dgm:styleLbl>
+  <dgm:styleLbl name="trBgShp">
+    <dgm:fillClrLst meth="repeat">
+      <a:schemeClr val="accent1">
+        <a:tint val="50000"/>
+        <a:alpha val="40000"/>
+      </a:schemeClr>
+    </dgm:fillClrLst>
+    <dgm:linClrLst meth="repeat">
+      <a:schemeClr val="accent2"/>
+    </dgm:linClrLst>
+    <dgm:effectClrLst/>
+    <dgm:txLinClrLst/>
+    <dgm:txFillClrLst meth="repeat">
+      <a:schemeClr val="lt1"/>
+    </dgm:txFillClrLst>
+    <dgm:txEffectClrLst/>
+  </dgm:styleLbl>
+  <dgm:styleLbl name="fgShp">
+    <dgm:fillClrLst meth="repeat">
+      <a:schemeClr val="accent2">
+        <a:tint val="40000"/>
+      </a:schemeClr>
+    </dgm:fillClrLst>
+    <dgm:linClrLst meth="repeat">
+      <a:schemeClr val="lt1"/>
+    </dgm:linClrLst>
+    <dgm:effectClrLst/>
+    <dgm:txLinClrLst/>
+    <dgm:txFillClrLst meth="repeat">
+      <a:schemeClr val="dk1"/>
+    </dgm:txFillClrLst>
+    <dgm:txEffectClrLst/>
+  </dgm:styleLbl>
+  <dgm:styleLbl name="revTx">
+    <dgm:fillClrLst meth="repeat">
+      <a:schemeClr val="lt1">
+        <a:alpha val="0"/>
+      </a:schemeClr>
+    </dgm:fillClrLst>
+    <dgm:linClrLst meth="repeat">
+      <a:schemeClr val="dk1">
+        <a:alpha val="0"/>
+      </a:schemeClr>
+    </dgm:linClrLst>
+    <dgm:effectClrLst/>
+    <dgm:txLinClrLst/>
+    <dgm:txFillClrLst meth="repeat">
+      <a:schemeClr val="tx1"/>
     </dgm:txFillClrLst>
     <dgm:txEffectClrLst/>
   </dgm:styleLbl>
@@ -6315,15 +7237,21 @@
         <a:bodyPr/>
         <a:lstStyle/>
         <a:p>
+          <a:pPr>
+            <a:lnSpc>
+              <a:spcPct val="100000"/>
+            </a:lnSpc>
+            <a:defRPr cap="all"/>
+          </a:pPr>
           <a:r>
-            <a:rPr lang="en-GB" dirty="0">
+            <a:rPr lang="en-GB" cap="none">
               <a:solidFill>
                 <a:schemeClr val="tx1"/>
               </a:solidFill>
             </a:rPr>
             <a:t>Indirect prompt injection can take many forms ranging from attacks targeting data used to write code to malicious prompts in order to gain personal data</a:t>
           </a:r>
-          <a:endParaRPr lang="en-US" dirty="0">
+          <a:endParaRPr lang="en-US" cap="none">
             <a:solidFill>
               <a:schemeClr val="tx1"/>
             </a:solidFill>
@@ -6354,21 +7282,27 @@
       </dgm:t>
     </dgm:pt>
     <dgm:pt modelId="{12E6873A-BE87-4778-A125-3B2B92ED9AA0}">
-      <dgm:prSet/>
+      <dgm:prSet custT="1"/>
       <dgm:spPr/>
       <dgm:t>
         <a:bodyPr/>
         <a:lstStyle/>
         <a:p>
+          <a:pPr>
+            <a:lnSpc>
+              <a:spcPct val="100000"/>
+            </a:lnSpc>
+            <a:defRPr cap="all"/>
+          </a:pPr>
           <a:r>
-            <a:rPr lang="en-GB" dirty="0">
+            <a:rPr lang="en-GB" sz="1100" cap="none">
               <a:solidFill>
                 <a:schemeClr val="tx1"/>
               </a:solidFill>
             </a:rPr>
             <a:t>Through my project I will be exploring a number of these methods with a focus on web apps and develop methods to test LLM vulnerabilities of them</a:t>
           </a:r>
-          <a:endParaRPr lang="en-US" dirty="0">
+          <a:endParaRPr lang="en-US" sz="1100" cap="none">
             <a:solidFill>
               <a:schemeClr val="tx1"/>
             </a:solidFill>
@@ -6398,6 +7332,57 @@
         </a:p>
       </dgm:t>
     </dgm:pt>
+    <dgm:pt modelId="{CD23E59F-07E5-40D9-9D1C-5E53648B96E9}">
+      <dgm:prSet/>
+      <dgm:spPr/>
+      <dgm:t>
+        <a:bodyPr/>
+        <a:lstStyle/>
+        <a:p>
+          <a:pPr>
+            <a:lnSpc>
+              <a:spcPct val="100000"/>
+            </a:lnSpc>
+            <a:defRPr cap="all"/>
+          </a:pPr>
+          <a:r>
+            <a:rPr lang="en-GB" cap="none" dirty="0">
+              <a:solidFill>
+                <a:schemeClr val="tx1"/>
+              </a:solidFill>
+            </a:rPr>
+            <a:t>This will lead onto my artifact aim of producing a web tool for developers which can allow for easy testing of LLM’s for security vulnerabilities</a:t>
+          </a:r>
+          <a:endParaRPr lang="en-US" cap="none" dirty="0">
+            <a:solidFill>
+              <a:schemeClr val="tx1"/>
+            </a:solidFill>
+          </a:endParaRPr>
+        </a:p>
+      </dgm:t>
+    </dgm:pt>
+    <dgm:pt modelId="{C5AD6D7B-6BB8-447A-83B6-4594C3713D58}" type="parTrans" cxnId="{2E4F3C1A-EF73-42A3-8FEE-F768413DBCD9}">
+      <dgm:prSet/>
+      <dgm:spPr/>
+      <dgm:t>
+        <a:bodyPr/>
+        <a:lstStyle/>
+        <a:p>
+          <a:endParaRPr lang="en-GB"/>
+        </a:p>
+      </dgm:t>
+    </dgm:pt>
+    <dgm:pt modelId="{7787BB58-6902-4013-AF59-5CFBB9FB1785}" type="sibTrans" cxnId="{2E4F3C1A-EF73-42A3-8FEE-F768413DBCD9}">
+      <dgm:prSet/>
+      <dgm:spPr/>
+      <dgm:t>
+        <a:bodyPr/>
+        <a:lstStyle/>
+        <a:p>
+          <a:endParaRPr lang="en-GB"/>
+        </a:p>
+      </dgm:t>
+    </dgm:pt>
     <dgm:pt modelId="{E6158261-7C27-4F71-A0B0-66D6C37E8B25}" type="pres">
       <dgm:prSet presAssocID="{97240E20-2759-4727-ADA7-E3E346834566}" presName="root" presStyleCnt="0">
         <dgm:presLayoutVars>
@@ -6412,11 +7397,11 @@
       <dgm:spPr/>
     </dgm:pt>
     <dgm:pt modelId="{C9BD165C-C9C8-4788-AE2D-999E935D1E35}" type="pres">
-      <dgm:prSet presAssocID="{C7EECC15-A402-43CA-AF6D-6FD0127B2AD8}" presName="iconBgRect" presStyleLbl="bgShp" presStyleIdx="0" presStyleCnt="2"/>
+      <dgm:prSet presAssocID="{C7EECC15-A402-43CA-AF6D-6FD0127B2AD8}" presName="iconBgRect" presStyleLbl="bgShp" presStyleIdx="0" presStyleCnt="3"/>
       <dgm:spPr/>
     </dgm:pt>
     <dgm:pt modelId="{C34D91A2-D23C-4B3E-AD77-BE9B04CB439D}" type="pres">
-      <dgm:prSet presAssocID="{C7EECC15-A402-43CA-AF6D-6FD0127B2AD8}" presName="iconRect" presStyleLbl="node1" presStyleIdx="0" presStyleCnt="2"/>
+      <dgm:prSet presAssocID="{C7EECC15-A402-43CA-AF6D-6FD0127B2AD8}" presName="iconRect" presStyleLbl="node1" presStyleIdx="0" presStyleCnt="3"/>
       <dgm:spPr>
         <a:blipFill>
           <a:blip xmlns:r="http://schemas.openxmlformats.org/officeDocument/2006/relationships" r:embed="rId1">
@@ -6448,7 +7433,7 @@
       <dgm:spPr/>
     </dgm:pt>
     <dgm:pt modelId="{108A18AA-A4FC-45D9-B4A2-17AF29E47A0F}" type="pres">
-      <dgm:prSet presAssocID="{C7EECC15-A402-43CA-AF6D-6FD0127B2AD8}" presName="textRect" presStyleLbl="revTx" presStyleIdx="0" presStyleCnt="2">
+      <dgm:prSet presAssocID="{C7EECC15-A402-43CA-AF6D-6FD0127B2AD8}" presName="textRect" presStyleLbl="revTx" presStyleIdx="0" presStyleCnt="3">
         <dgm:presLayoutVars>
           <dgm:chMax val="1"/>
           <dgm:chPref val="1"/>
@@ -6465,11 +7450,11 @@
       <dgm:spPr/>
     </dgm:pt>
     <dgm:pt modelId="{3F752F29-D33F-4B7A-A3A0-F9CFE63ED1FB}" type="pres">
-      <dgm:prSet presAssocID="{12E6873A-BE87-4778-A125-3B2B92ED9AA0}" presName="iconBgRect" presStyleLbl="bgShp" presStyleIdx="1" presStyleCnt="2"/>
+      <dgm:prSet presAssocID="{12E6873A-BE87-4778-A125-3B2B92ED9AA0}" presName="iconBgRect" presStyleLbl="bgShp" presStyleIdx="1" presStyleCnt="3"/>
       <dgm:spPr/>
     </dgm:pt>
     <dgm:pt modelId="{C71778B6-D29C-4067-8D10-55CE139FC14D}" type="pres">
-      <dgm:prSet presAssocID="{12E6873A-BE87-4778-A125-3B2B92ED9AA0}" presName="iconRect" presStyleLbl="node1" presStyleIdx="1" presStyleCnt="2"/>
+      <dgm:prSet presAssocID="{12E6873A-BE87-4778-A125-3B2B92ED9AA0}" presName="iconRect" presStyleLbl="node1" presStyleIdx="1" presStyleCnt="3"/>
       <dgm:spPr>
         <a:blipFill>
           <a:blip xmlns:r="http://schemas.openxmlformats.org/officeDocument/2006/relationships" r:embed="rId3">
@@ -6501,7 +7486,57 @@
       <dgm:spPr/>
     </dgm:pt>
     <dgm:pt modelId="{0E91A8EE-4976-4F3E-8C70-00F505DA68B4}" type="pres">
-      <dgm:prSet presAssocID="{12E6873A-BE87-4778-A125-3B2B92ED9AA0}" presName="textRect" presStyleLbl="revTx" presStyleIdx="1" presStyleCnt="2">
+      <dgm:prSet presAssocID="{12E6873A-BE87-4778-A125-3B2B92ED9AA0}" presName="textRect" presStyleLbl="revTx" presStyleIdx="1" presStyleCnt="3">
+        <dgm:presLayoutVars>
+          <dgm:chMax val="1"/>
+          <dgm:chPref val="1"/>
+        </dgm:presLayoutVars>
+      </dgm:prSet>
+      <dgm:spPr/>
+    </dgm:pt>
+    <dgm:pt modelId="{C51918C8-FE35-4C2B-A8FE-088D6BEAD9DC}" type="pres">
+      <dgm:prSet presAssocID="{5EF5EB5B-99CC-4E76-B606-F49440F0C249}" presName="sibTrans" presStyleCnt="0"/>
+      <dgm:spPr/>
+    </dgm:pt>
+    <dgm:pt modelId="{45E5A42B-8EFB-4986-8E8D-ABAAC1842FD4}" type="pres">
+      <dgm:prSet presAssocID="{CD23E59F-07E5-40D9-9D1C-5E53648B96E9}" presName="compNode" presStyleCnt="0"/>
+      <dgm:spPr/>
+    </dgm:pt>
+    <dgm:pt modelId="{5F27640C-6DD8-4378-87F0-C91FF8FBBA5A}" type="pres">
+      <dgm:prSet presAssocID="{CD23E59F-07E5-40D9-9D1C-5E53648B96E9}" presName="iconBgRect" presStyleLbl="bgShp" presStyleIdx="2" presStyleCnt="3"/>
+      <dgm:spPr/>
+    </dgm:pt>
+    <dgm:pt modelId="{6E7720AB-BA23-4554-BE30-EE3F3C08E7C1}" type="pres">
+      <dgm:prSet presAssocID="{CD23E59F-07E5-40D9-9D1C-5E53648B96E9}" presName="iconRect" presStyleLbl="node1" presStyleIdx="2" presStyleCnt="3"/>
+      <dgm:spPr>
+        <a:blipFill>
+          <a:blip xmlns:r="http://schemas.openxmlformats.org/officeDocument/2006/relationships" r:embed="rId5">
+            <a:extLst>
+              <a:ext uri="{28A0092B-C50C-407E-A947-70E740481C1C}">
+                <a14:useLocalDpi xmlns:a14="http://schemas.microsoft.com/office/drawing/2010/main" val="0"/>
+              </a:ext>
+              <a:ext uri="{96DAC541-7B7A-43D3-8B79-37D633B846F1}">
+                <asvg:svgBlip xmlns:asvg="http://schemas.microsoft.com/office/drawing/2016/SVG/main" r:embed="rId6"/>
+              </a:ext>
+            </a:extLst>
+          </a:blip>
+          <a:stretch>
+            <a:fillRect/>
+          </a:stretch>
+        </a:blipFill>
+      </dgm:spPr>
+      <dgm:extLst>
+        <a:ext uri="{E40237B7-FDA0-4F09-8148-C483321AD2D9}">
+          <dgm14:cNvPr xmlns:dgm14="http://schemas.microsoft.com/office/drawing/2010/diagram" id="0" name="" descr="Laptop"/>
+        </a:ext>
+      </dgm:extLst>
+    </dgm:pt>
+    <dgm:pt modelId="{E7E4F0CC-E544-47FC-9A55-0D77D53DEEE1}" type="pres">
+      <dgm:prSet presAssocID="{CD23E59F-07E5-40D9-9D1C-5E53648B96E9}" presName="spaceRect" presStyleCnt="0"/>
+      <dgm:spPr/>
+    </dgm:pt>
+    <dgm:pt modelId="{FA792F96-9D2D-4970-BE4F-36DF94CEA07B}" type="pres">
+      <dgm:prSet presAssocID="{CD23E59F-07E5-40D9-9D1C-5E53648B96E9}" presName="textRect" presStyleLbl="revTx" presStyleIdx="2" presStyleCnt="3">
         <dgm:presLayoutVars>
           <dgm:chMax val="1"/>
           <dgm:chPref val="1"/>
@@ -6512,6 +7547,8 @@
   </dgm:ptLst>
   <dgm:cxnLst>
     <dgm:cxn modelId="{9B685302-0769-40E6-ABBA-2B573BB1A457}" type="presOf" srcId="{97240E20-2759-4727-ADA7-E3E346834566}" destId="{E6158261-7C27-4F71-A0B0-66D6C37E8B25}" srcOrd="0" destOrd="0" presId="urn:microsoft.com/office/officeart/2018/5/layout/IconCircleLabelList"/>
+    <dgm:cxn modelId="{1D7BB902-00D3-4393-A029-0367BF344D4E}" type="presOf" srcId="{CD23E59F-07E5-40D9-9D1C-5E53648B96E9}" destId="{FA792F96-9D2D-4970-BE4F-36DF94CEA07B}" srcOrd="0" destOrd="0" presId="urn:microsoft.com/office/officeart/2018/5/layout/IconCircleLabelList"/>
+    <dgm:cxn modelId="{2E4F3C1A-EF73-42A3-8FEE-F768413DBCD9}" srcId="{97240E20-2759-4727-ADA7-E3E346834566}" destId="{CD23E59F-07E5-40D9-9D1C-5E53648B96E9}" srcOrd="2" destOrd="0" parTransId="{C5AD6D7B-6BB8-447A-83B6-4594C3713D58}" sibTransId="{7787BB58-6902-4013-AF59-5CFBB9FB1785}"/>
     <dgm:cxn modelId="{0DA87845-8464-444E-A6FF-F71BEAB65C70}" srcId="{97240E20-2759-4727-ADA7-E3E346834566}" destId="{12E6873A-BE87-4778-A125-3B2B92ED9AA0}" srcOrd="1" destOrd="0" parTransId="{2BAEF5EA-A6E7-4E44-809C-434ACC9C3925}" sibTransId="{5EF5EB5B-99CC-4E76-B606-F49440F0C249}"/>
     <dgm:cxn modelId="{F9017586-7B30-41B6-868F-DDD738CFBE31}" srcId="{97240E20-2759-4727-ADA7-E3E346834566}" destId="{C7EECC15-A402-43CA-AF6D-6FD0127B2AD8}" srcOrd="0" destOrd="0" parTransId="{3262C986-B290-461A-88C5-01151DC6B450}" sibTransId="{CD0DC99B-30CF-4CE2-A107-3CDECE781440}"/>
     <dgm:cxn modelId="{3CEE64C0-DF66-4605-855F-E3F898889694}" type="presOf" srcId="{12E6873A-BE87-4778-A125-3B2B92ED9AA0}" destId="{0E91A8EE-4976-4F3E-8C70-00F505DA68B4}" srcOrd="0" destOrd="0" presId="urn:microsoft.com/office/officeart/2018/5/layout/IconCircleLabelList"/>
@@ -6527,6 +7564,416 @@
     <dgm:cxn modelId="{EBFD2FDD-D123-4AF9-A0F5-323A076E0E84}" type="presParOf" srcId="{1EFCD15B-31ED-45DE-97EE-EFAE094A559E}" destId="{C71778B6-D29C-4067-8D10-55CE139FC14D}" srcOrd="1" destOrd="0" presId="urn:microsoft.com/office/officeart/2018/5/layout/IconCircleLabelList"/>
     <dgm:cxn modelId="{268B3FD4-8CA3-4F0A-9A7E-10672CCE06C1}" type="presParOf" srcId="{1EFCD15B-31ED-45DE-97EE-EFAE094A559E}" destId="{94321E83-7ACC-4ACB-B45E-42CE724028A3}" srcOrd="2" destOrd="0" presId="urn:microsoft.com/office/officeart/2018/5/layout/IconCircleLabelList"/>
     <dgm:cxn modelId="{15F7A8A6-E6D9-479D-A278-830CE3A5E8AC}" type="presParOf" srcId="{1EFCD15B-31ED-45DE-97EE-EFAE094A559E}" destId="{0E91A8EE-4976-4F3E-8C70-00F505DA68B4}" srcOrd="3" destOrd="0" presId="urn:microsoft.com/office/officeart/2018/5/layout/IconCircleLabelList"/>
+    <dgm:cxn modelId="{CCCDF745-10F0-422F-92E6-BD309C2A349F}" type="presParOf" srcId="{E6158261-7C27-4F71-A0B0-66D6C37E8B25}" destId="{C51918C8-FE35-4C2B-A8FE-088D6BEAD9DC}" srcOrd="3" destOrd="0" presId="urn:microsoft.com/office/officeart/2018/5/layout/IconCircleLabelList"/>
+    <dgm:cxn modelId="{A7589371-2783-4DD2-A17B-515D0AD3CBAD}" type="presParOf" srcId="{E6158261-7C27-4F71-A0B0-66D6C37E8B25}" destId="{45E5A42B-8EFB-4986-8E8D-ABAAC1842FD4}" srcOrd="4" destOrd="0" presId="urn:microsoft.com/office/officeart/2018/5/layout/IconCircleLabelList"/>
+    <dgm:cxn modelId="{9594FEA2-ACF1-4952-B88C-CF2CBCC924D6}" type="presParOf" srcId="{45E5A42B-8EFB-4986-8E8D-ABAAC1842FD4}" destId="{5F27640C-6DD8-4378-87F0-C91FF8FBBA5A}" srcOrd="0" destOrd="0" presId="urn:microsoft.com/office/officeart/2018/5/layout/IconCircleLabelList"/>
+    <dgm:cxn modelId="{1CB8BEB8-CCAE-4C9C-9A77-9D6B06D229E5}" type="presParOf" srcId="{45E5A42B-8EFB-4986-8E8D-ABAAC1842FD4}" destId="{6E7720AB-BA23-4554-BE30-EE3F3C08E7C1}" srcOrd="1" destOrd="0" presId="urn:microsoft.com/office/officeart/2018/5/layout/IconCircleLabelList"/>
+    <dgm:cxn modelId="{21E08B7C-7912-4AC0-A8CB-8F3AF1262F7E}" type="presParOf" srcId="{45E5A42B-8EFB-4986-8E8D-ABAAC1842FD4}" destId="{E7E4F0CC-E544-47FC-9A55-0D77D53DEEE1}" srcOrd="2" destOrd="0" presId="urn:microsoft.com/office/officeart/2018/5/layout/IconCircleLabelList"/>
+    <dgm:cxn modelId="{CBF44F3D-D22E-4AF9-AD9F-A0DD091523A8}" type="presParOf" srcId="{45E5A42B-8EFB-4986-8E8D-ABAAC1842FD4}" destId="{FA792F96-9D2D-4970-BE4F-36DF94CEA07B}" srcOrd="3" destOrd="0" presId="urn:microsoft.com/office/officeart/2018/5/layout/IconCircleLabelList"/>
+  </dgm:cxnLst>
+  <dgm:bg/>
+  <dgm:whole/>
+  <dgm:extLst>
+    <a:ext uri="http://schemas.microsoft.com/office/drawing/2008/diagram">
+      <dsp:dataModelExt xmlns:dsp="http://schemas.microsoft.com/office/drawing/2008/diagram" relId="rId6" minVer="http://schemas.openxmlformats.org/drawingml/2006/diagram"/>
+    </a:ext>
+  </dgm:extLst>
+</dgm:dataModel>
+</file>
+
+<file path=ppt/diagrams/data7.xml><?xml version="1.0" encoding="utf-8"?>
+<dgm:dataModel xmlns:dgm="http://schemas.openxmlformats.org/drawingml/2006/diagram" xmlns:a="http://schemas.openxmlformats.org/drawingml/2006/main">
+  <dgm:ptLst>
+    <dgm:pt modelId="{05E70CD1-E6E5-42B9-A64B-31FDE79344CE}" type="doc">
+      <dgm:prSet loTypeId="urn:microsoft.com/office/officeart/2018/2/layout/IconLabelList" loCatId="icon" qsTypeId="urn:microsoft.com/office/officeart/2005/8/quickstyle/simple1" qsCatId="simple" csTypeId="urn:microsoft.com/office/officeart/2018/5/colors/Iconchunking_neutralbg_colorful1" csCatId="colorful" phldr="1"/>
+      <dgm:spPr/>
+      <dgm:t>
+        <a:bodyPr/>
+        <a:lstStyle/>
+        <a:p>
+          <a:endParaRPr lang="en-US"/>
+        </a:p>
+      </dgm:t>
+    </dgm:pt>
+    <dgm:pt modelId="{62E811DA-2090-44FD-8CB0-F1958B0B0998}">
+      <dgm:prSet/>
+      <dgm:spPr/>
+      <dgm:t>
+        <a:bodyPr/>
+        <a:lstStyle/>
+        <a:p>
+          <a:r>
+            <a:rPr lang="en-GB"/>
+            <a:t>The end goal of my artifact is to ultimately give developers an easy way to testing their LLM’s for up and coming security vulnerabilities</a:t>
+          </a:r>
+          <a:endParaRPr lang="en-US"/>
+        </a:p>
+      </dgm:t>
+    </dgm:pt>
+    <dgm:pt modelId="{CA2B0103-EA86-43EC-9FC5-2B47F9A00C18}" type="parTrans" cxnId="{95E04A9A-61FE-4AAA-A283-114271CACCB7}">
+      <dgm:prSet/>
+      <dgm:spPr/>
+      <dgm:t>
+        <a:bodyPr/>
+        <a:lstStyle/>
+        <a:p>
+          <a:endParaRPr lang="en-US"/>
+        </a:p>
+      </dgm:t>
+    </dgm:pt>
+    <dgm:pt modelId="{DD5FA38C-A309-4F81-AFD1-86E4D70C96E1}" type="sibTrans" cxnId="{95E04A9A-61FE-4AAA-A283-114271CACCB7}">
+      <dgm:prSet/>
+      <dgm:spPr/>
+      <dgm:t>
+        <a:bodyPr/>
+        <a:lstStyle/>
+        <a:p>
+          <a:endParaRPr lang="en-US"/>
+        </a:p>
+      </dgm:t>
+    </dgm:pt>
+    <dgm:pt modelId="{B4B8C314-F12D-4152-84CB-E10E6DA19F05}">
+      <dgm:prSet/>
+      <dgm:spPr/>
+      <dgm:t>
+        <a:bodyPr/>
+        <a:lstStyle/>
+        <a:p>
+          <a:r>
+            <a:rPr lang="en-GB"/>
+            <a:t>As part of this I aim to maximise the number of vulnerabilities we look at, at least 5</a:t>
+          </a:r>
+          <a:endParaRPr lang="en-US"/>
+        </a:p>
+      </dgm:t>
+    </dgm:pt>
+    <dgm:pt modelId="{87588A84-DC57-406C-A108-CFCC4004FC6C}" type="parTrans" cxnId="{96FF27EC-7279-47C7-8765-175639C726AD}">
+      <dgm:prSet/>
+      <dgm:spPr/>
+      <dgm:t>
+        <a:bodyPr/>
+        <a:lstStyle/>
+        <a:p>
+          <a:endParaRPr lang="en-US"/>
+        </a:p>
+      </dgm:t>
+    </dgm:pt>
+    <dgm:pt modelId="{0CBD7366-E5EA-4B52-A3D3-14B2192789CD}" type="sibTrans" cxnId="{96FF27EC-7279-47C7-8765-175639C726AD}">
+      <dgm:prSet/>
+      <dgm:spPr/>
+      <dgm:t>
+        <a:bodyPr/>
+        <a:lstStyle/>
+        <a:p>
+          <a:endParaRPr lang="en-US"/>
+        </a:p>
+      </dgm:t>
+    </dgm:pt>
+    <dgm:pt modelId="{49622A44-E84D-449F-82FF-4B86C0858FAF}">
+      <dgm:prSet/>
+      <dgm:spPr/>
+      <dgm:t>
+        <a:bodyPr/>
+        <a:lstStyle/>
+        <a:p>
+          <a:r>
+            <a:rPr lang="en-GB"/>
+            <a:t>It should have vulnerabilities isolated to be developer friendly</a:t>
+          </a:r>
+          <a:endParaRPr lang="en-US"/>
+        </a:p>
+      </dgm:t>
+    </dgm:pt>
+    <dgm:pt modelId="{B50A235C-5DBC-4A35-9D47-FB02C7BA5E5F}" type="parTrans" cxnId="{FE1E83B1-E26E-4B7A-BEE7-5ABDD962E969}">
+      <dgm:prSet/>
+      <dgm:spPr/>
+      <dgm:t>
+        <a:bodyPr/>
+        <a:lstStyle/>
+        <a:p>
+          <a:endParaRPr lang="en-US"/>
+        </a:p>
+      </dgm:t>
+    </dgm:pt>
+    <dgm:pt modelId="{C51CA92E-62B7-4570-BCB4-504D57B15F11}" type="sibTrans" cxnId="{FE1E83B1-E26E-4B7A-BEE7-5ABDD962E969}">
+      <dgm:prSet/>
+      <dgm:spPr/>
+      <dgm:t>
+        <a:bodyPr/>
+        <a:lstStyle/>
+        <a:p>
+          <a:endParaRPr lang="en-US"/>
+        </a:p>
+      </dgm:t>
+    </dgm:pt>
+    <dgm:pt modelId="{CCBE1C8F-1253-4A91-BF14-1E592FB15910}">
+      <dgm:prSet/>
+      <dgm:spPr/>
+      <dgm:t>
+        <a:bodyPr/>
+        <a:lstStyle/>
+        <a:p>
+          <a:r>
+            <a:rPr lang="en-GB"/>
+            <a:t>There should be appropriate instructions</a:t>
+          </a:r>
+          <a:endParaRPr lang="en-US"/>
+        </a:p>
+      </dgm:t>
+    </dgm:pt>
+    <dgm:pt modelId="{443BAE56-1CDD-4FA0-AD8C-DDD84AC5F852}" type="parTrans" cxnId="{331BA1BD-9874-448C-B7B9-A7666D774F6F}">
+      <dgm:prSet/>
+      <dgm:spPr/>
+      <dgm:t>
+        <a:bodyPr/>
+        <a:lstStyle/>
+        <a:p>
+          <a:endParaRPr lang="en-US"/>
+        </a:p>
+      </dgm:t>
+    </dgm:pt>
+    <dgm:pt modelId="{45FA320C-F0C4-459F-B9A7-11B3233967D5}" type="sibTrans" cxnId="{331BA1BD-9874-448C-B7B9-A7666D774F6F}">
+      <dgm:prSet/>
+      <dgm:spPr/>
+      <dgm:t>
+        <a:bodyPr/>
+        <a:lstStyle/>
+        <a:p>
+          <a:endParaRPr lang="en-US"/>
+        </a:p>
+      </dgm:t>
+    </dgm:pt>
+    <dgm:pt modelId="{8D1682A6-4714-441B-BC20-45AF0D777170}" type="pres">
+      <dgm:prSet presAssocID="{05E70CD1-E6E5-42B9-A64B-31FDE79344CE}" presName="root" presStyleCnt="0">
+        <dgm:presLayoutVars>
+          <dgm:dir/>
+          <dgm:resizeHandles val="exact"/>
+        </dgm:presLayoutVars>
+      </dgm:prSet>
+      <dgm:spPr/>
+    </dgm:pt>
+    <dgm:pt modelId="{D018DF1D-3166-4C49-9BD1-818FFEC758B9}" type="pres">
+      <dgm:prSet presAssocID="{62E811DA-2090-44FD-8CB0-F1958B0B0998}" presName="compNode" presStyleCnt="0"/>
+      <dgm:spPr/>
+    </dgm:pt>
+    <dgm:pt modelId="{9406E64E-34FB-4A08-A87A-D98A8AF37FAA}" type="pres">
+      <dgm:prSet presAssocID="{62E811DA-2090-44FD-8CB0-F1958B0B0998}" presName="iconRect" presStyleLbl="node1" presStyleIdx="0" presStyleCnt="4"/>
+      <dgm:spPr>
+        <a:blipFill>
+          <a:blip xmlns:r="http://schemas.openxmlformats.org/officeDocument/2006/relationships" r:embed="rId1">
+            <a:extLst>
+              <a:ext uri="{28A0092B-C50C-407E-A947-70E740481C1C}">
+                <a14:useLocalDpi xmlns:a14="http://schemas.microsoft.com/office/drawing/2010/main" val="0"/>
+              </a:ext>
+              <a:ext uri="{96DAC541-7B7A-43D3-8B79-37D633B846F1}">
+                <asvg:svgBlip xmlns:asvg="http://schemas.microsoft.com/office/drawing/2016/SVG/main" r:embed="rId2"/>
+              </a:ext>
+            </a:extLst>
+          </a:blip>
+          <a:stretch>
+            <a:fillRect/>
+          </a:stretch>
+        </a:blipFill>
+        <a:ln>
+          <a:noFill/>
+        </a:ln>
+      </dgm:spPr>
+      <dgm:extLst>
+        <a:ext uri="{E40237B7-FDA0-4F09-8148-C483321AD2D9}">
+          <dgm14:cNvPr xmlns:dgm14="http://schemas.microsoft.com/office/drawing/2010/diagram" id="0" name="" descr="Processor"/>
+        </a:ext>
+      </dgm:extLst>
+    </dgm:pt>
+    <dgm:pt modelId="{E3556981-8584-463C-9BA8-C6BAF24B75E6}" type="pres">
+      <dgm:prSet presAssocID="{62E811DA-2090-44FD-8CB0-F1958B0B0998}" presName="spaceRect" presStyleCnt="0"/>
+      <dgm:spPr/>
+    </dgm:pt>
+    <dgm:pt modelId="{B2A420F5-6352-4D03-909A-998EB329CD9D}" type="pres">
+      <dgm:prSet presAssocID="{62E811DA-2090-44FD-8CB0-F1958B0B0998}" presName="textRect" presStyleLbl="revTx" presStyleIdx="0" presStyleCnt="4">
+        <dgm:presLayoutVars>
+          <dgm:chMax val="1"/>
+          <dgm:chPref val="1"/>
+        </dgm:presLayoutVars>
+      </dgm:prSet>
+      <dgm:spPr/>
+    </dgm:pt>
+    <dgm:pt modelId="{84107393-0898-46A5-AE51-67037D678321}" type="pres">
+      <dgm:prSet presAssocID="{DD5FA38C-A309-4F81-AFD1-86E4D70C96E1}" presName="sibTrans" presStyleCnt="0"/>
+      <dgm:spPr/>
+    </dgm:pt>
+    <dgm:pt modelId="{C8A6F388-D740-4DA1-9503-2BFEFFB05BD6}" type="pres">
+      <dgm:prSet presAssocID="{B4B8C314-F12D-4152-84CB-E10E6DA19F05}" presName="compNode" presStyleCnt="0"/>
+      <dgm:spPr/>
+    </dgm:pt>
+    <dgm:pt modelId="{C73A4C9B-6D4E-4E4F-AAD7-632AA2DBF84E}" type="pres">
+      <dgm:prSet presAssocID="{B4B8C314-F12D-4152-84CB-E10E6DA19F05}" presName="iconRect" presStyleLbl="node1" presStyleIdx="1" presStyleCnt="4"/>
+      <dgm:spPr>
+        <a:blipFill>
+          <a:blip xmlns:r="http://schemas.openxmlformats.org/officeDocument/2006/relationships" r:embed="rId3">
+            <a:extLst>
+              <a:ext uri="{28A0092B-C50C-407E-A947-70E740481C1C}">
+                <a14:useLocalDpi xmlns:a14="http://schemas.microsoft.com/office/drawing/2010/main" val="0"/>
+              </a:ext>
+              <a:ext uri="{96DAC541-7B7A-43D3-8B79-37D633B846F1}">
+                <asvg:svgBlip xmlns:asvg="http://schemas.microsoft.com/office/drawing/2016/SVG/main" r:embed="rId4"/>
+              </a:ext>
+            </a:extLst>
+          </a:blip>
+          <a:stretch>
+            <a:fillRect/>
+          </a:stretch>
+        </a:blipFill>
+        <a:ln>
+          <a:noFill/>
+        </a:ln>
+      </dgm:spPr>
+      <dgm:extLst>
+        <a:ext uri="{E40237B7-FDA0-4F09-8148-C483321AD2D9}">
+          <dgm14:cNvPr xmlns:dgm14="http://schemas.microsoft.com/office/drawing/2010/diagram" id="0" name="" descr="Bullseye"/>
+        </a:ext>
+      </dgm:extLst>
+    </dgm:pt>
+    <dgm:pt modelId="{73919CC2-7E3C-4AB9-9E1F-1C0267212FE4}" type="pres">
+      <dgm:prSet presAssocID="{B4B8C314-F12D-4152-84CB-E10E6DA19F05}" presName="spaceRect" presStyleCnt="0"/>
+      <dgm:spPr/>
+    </dgm:pt>
+    <dgm:pt modelId="{586C61C7-2E3C-416D-87C4-101C46FFDB92}" type="pres">
+      <dgm:prSet presAssocID="{B4B8C314-F12D-4152-84CB-E10E6DA19F05}" presName="textRect" presStyleLbl="revTx" presStyleIdx="1" presStyleCnt="4">
+        <dgm:presLayoutVars>
+          <dgm:chMax val="1"/>
+          <dgm:chPref val="1"/>
+        </dgm:presLayoutVars>
+      </dgm:prSet>
+      <dgm:spPr/>
+    </dgm:pt>
+    <dgm:pt modelId="{9880EF00-AB6A-4FDA-996A-89080FBFC8E1}" type="pres">
+      <dgm:prSet presAssocID="{0CBD7366-E5EA-4B52-A3D3-14B2192789CD}" presName="sibTrans" presStyleCnt="0"/>
+      <dgm:spPr/>
+    </dgm:pt>
+    <dgm:pt modelId="{89DE17D4-1E0E-40D2-9832-034BD25B7A98}" type="pres">
+      <dgm:prSet presAssocID="{49622A44-E84D-449F-82FF-4B86C0858FAF}" presName="compNode" presStyleCnt="0"/>
+      <dgm:spPr/>
+    </dgm:pt>
+    <dgm:pt modelId="{45C95526-D118-43A5-8CC3-CA3B77ADFEB1}" type="pres">
+      <dgm:prSet presAssocID="{49622A44-E84D-449F-82FF-4B86C0858FAF}" presName="iconRect" presStyleLbl="node1" presStyleIdx="2" presStyleCnt="4"/>
+      <dgm:spPr>
+        <a:blipFill>
+          <a:blip xmlns:r="http://schemas.openxmlformats.org/officeDocument/2006/relationships" r:embed="rId5">
+            <a:extLst>
+              <a:ext uri="{28A0092B-C50C-407E-A947-70E740481C1C}">
+                <a14:useLocalDpi xmlns:a14="http://schemas.microsoft.com/office/drawing/2010/main" val="0"/>
+              </a:ext>
+              <a:ext uri="{96DAC541-7B7A-43D3-8B79-37D633B846F1}">
+                <asvg:svgBlip xmlns:asvg="http://schemas.microsoft.com/office/drawing/2016/SVG/main" r:embed="rId6"/>
+              </a:ext>
+            </a:extLst>
+          </a:blip>
+          <a:stretch>
+            <a:fillRect/>
+          </a:stretch>
+        </a:blipFill>
+        <a:ln>
+          <a:noFill/>
+        </a:ln>
+      </dgm:spPr>
+      <dgm:extLst>
+        <a:ext uri="{E40237B7-FDA0-4F09-8148-C483321AD2D9}">
+          <dgm14:cNvPr xmlns:dgm14="http://schemas.microsoft.com/office/drawing/2010/diagram" id="0" name="" descr="Warning"/>
+        </a:ext>
+      </dgm:extLst>
+    </dgm:pt>
+    <dgm:pt modelId="{292736C8-A663-4AE5-95AE-1135A7766E54}" type="pres">
+      <dgm:prSet presAssocID="{49622A44-E84D-449F-82FF-4B86C0858FAF}" presName="spaceRect" presStyleCnt="0"/>
+      <dgm:spPr/>
+    </dgm:pt>
+    <dgm:pt modelId="{1A77DA38-9F73-4B1A-BC22-FFCD5DCD6F62}" type="pres">
+      <dgm:prSet presAssocID="{49622A44-E84D-449F-82FF-4B86C0858FAF}" presName="textRect" presStyleLbl="revTx" presStyleIdx="2" presStyleCnt="4">
+        <dgm:presLayoutVars>
+          <dgm:chMax val="1"/>
+          <dgm:chPref val="1"/>
+        </dgm:presLayoutVars>
+      </dgm:prSet>
+      <dgm:spPr/>
+    </dgm:pt>
+    <dgm:pt modelId="{05DFB78E-3EAB-4152-BDDE-6D466272D37C}" type="pres">
+      <dgm:prSet presAssocID="{C51CA92E-62B7-4570-BCB4-504D57B15F11}" presName="sibTrans" presStyleCnt="0"/>
+      <dgm:spPr/>
+    </dgm:pt>
+    <dgm:pt modelId="{2D43AC31-E03E-44B0-8255-60B6D4E3ABF8}" type="pres">
+      <dgm:prSet presAssocID="{CCBE1C8F-1253-4A91-BF14-1E592FB15910}" presName="compNode" presStyleCnt="0"/>
+      <dgm:spPr/>
+    </dgm:pt>
+    <dgm:pt modelId="{36138E50-6454-49D2-B873-2AE068DB8A29}" type="pres">
+      <dgm:prSet presAssocID="{CCBE1C8F-1253-4A91-BF14-1E592FB15910}" presName="iconRect" presStyleLbl="node1" presStyleIdx="3" presStyleCnt="4"/>
+      <dgm:spPr>
+        <a:blipFill>
+          <a:blip xmlns:r="http://schemas.openxmlformats.org/officeDocument/2006/relationships" r:embed="rId7">
+            <a:extLst>
+              <a:ext uri="{28A0092B-C50C-407E-A947-70E740481C1C}">
+                <a14:useLocalDpi xmlns:a14="http://schemas.microsoft.com/office/drawing/2010/main" val="0"/>
+              </a:ext>
+              <a:ext uri="{96DAC541-7B7A-43D3-8B79-37D633B846F1}">
+                <asvg:svgBlip xmlns:asvg="http://schemas.microsoft.com/office/drawing/2016/SVG/main" r:embed="rId8"/>
+              </a:ext>
+            </a:extLst>
+          </a:blip>
+          <a:stretch>
+            <a:fillRect/>
+          </a:stretch>
+        </a:blipFill>
+        <a:ln>
+          <a:noFill/>
+        </a:ln>
+      </dgm:spPr>
+      <dgm:extLst>
+        <a:ext uri="{E40237B7-FDA0-4F09-8148-C483321AD2D9}">
+          <dgm14:cNvPr xmlns:dgm14="http://schemas.microsoft.com/office/drawing/2010/diagram" id="0" name="" descr="Checkmark"/>
+        </a:ext>
+      </dgm:extLst>
+    </dgm:pt>
+    <dgm:pt modelId="{3C9C519C-2796-4621-AE18-956B2606E672}" type="pres">
+      <dgm:prSet presAssocID="{CCBE1C8F-1253-4A91-BF14-1E592FB15910}" presName="spaceRect" presStyleCnt="0"/>
+      <dgm:spPr/>
+    </dgm:pt>
+    <dgm:pt modelId="{D707A982-DA4D-4FE4-A657-31145B1E2997}" type="pres">
+      <dgm:prSet presAssocID="{CCBE1C8F-1253-4A91-BF14-1E592FB15910}" presName="textRect" presStyleLbl="revTx" presStyleIdx="3" presStyleCnt="4">
+        <dgm:presLayoutVars>
+          <dgm:chMax val="1"/>
+          <dgm:chPref val="1"/>
+        </dgm:presLayoutVars>
+      </dgm:prSet>
+      <dgm:spPr/>
+    </dgm:pt>
+  </dgm:ptLst>
+  <dgm:cxnLst>
+    <dgm:cxn modelId="{15B8D70C-2C3F-4706-AA36-A730FCC3BFA8}" type="presOf" srcId="{B4B8C314-F12D-4152-84CB-E10E6DA19F05}" destId="{586C61C7-2E3C-416D-87C4-101C46FFDB92}" srcOrd="0" destOrd="0" presId="urn:microsoft.com/office/officeart/2018/2/layout/IconLabelList"/>
+    <dgm:cxn modelId="{38D55E80-28F9-4B36-8452-CE9EE1F31938}" type="presOf" srcId="{05E70CD1-E6E5-42B9-A64B-31FDE79344CE}" destId="{8D1682A6-4714-441B-BC20-45AF0D777170}" srcOrd="0" destOrd="0" presId="urn:microsoft.com/office/officeart/2018/2/layout/IconLabelList"/>
+    <dgm:cxn modelId="{95E04A9A-61FE-4AAA-A283-114271CACCB7}" srcId="{05E70CD1-E6E5-42B9-A64B-31FDE79344CE}" destId="{62E811DA-2090-44FD-8CB0-F1958B0B0998}" srcOrd="0" destOrd="0" parTransId="{CA2B0103-EA86-43EC-9FC5-2B47F9A00C18}" sibTransId="{DD5FA38C-A309-4F81-AFD1-86E4D70C96E1}"/>
+    <dgm:cxn modelId="{92D2ADA6-BCA8-4DFA-8412-7D3944D16FDF}" type="presOf" srcId="{62E811DA-2090-44FD-8CB0-F1958B0B0998}" destId="{B2A420F5-6352-4D03-909A-998EB329CD9D}" srcOrd="0" destOrd="0" presId="urn:microsoft.com/office/officeart/2018/2/layout/IconLabelList"/>
+    <dgm:cxn modelId="{FE1E83B1-E26E-4B7A-BEE7-5ABDD962E969}" srcId="{05E70CD1-E6E5-42B9-A64B-31FDE79344CE}" destId="{49622A44-E84D-449F-82FF-4B86C0858FAF}" srcOrd="2" destOrd="0" parTransId="{B50A235C-5DBC-4A35-9D47-FB02C7BA5E5F}" sibTransId="{C51CA92E-62B7-4570-BCB4-504D57B15F11}"/>
+    <dgm:cxn modelId="{D45C19BB-0F61-4BC0-BC3B-BB268D72763A}" type="presOf" srcId="{49622A44-E84D-449F-82FF-4B86C0858FAF}" destId="{1A77DA38-9F73-4B1A-BC22-FFCD5DCD6F62}" srcOrd="0" destOrd="0" presId="urn:microsoft.com/office/officeart/2018/2/layout/IconLabelList"/>
+    <dgm:cxn modelId="{331BA1BD-9874-448C-B7B9-A7666D774F6F}" srcId="{05E70CD1-E6E5-42B9-A64B-31FDE79344CE}" destId="{CCBE1C8F-1253-4A91-BF14-1E592FB15910}" srcOrd="3" destOrd="0" parTransId="{443BAE56-1CDD-4FA0-AD8C-DDD84AC5F852}" sibTransId="{45FA320C-F0C4-459F-B9A7-11B3233967D5}"/>
+    <dgm:cxn modelId="{E3F546DD-B0C1-4258-8474-E75452179118}" type="presOf" srcId="{CCBE1C8F-1253-4A91-BF14-1E592FB15910}" destId="{D707A982-DA4D-4FE4-A657-31145B1E2997}" srcOrd="0" destOrd="0" presId="urn:microsoft.com/office/officeart/2018/2/layout/IconLabelList"/>
+    <dgm:cxn modelId="{96FF27EC-7279-47C7-8765-175639C726AD}" srcId="{05E70CD1-E6E5-42B9-A64B-31FDE79344CE}" destId="{B4B8C314-F12D-4152-84CB-E10E6DA19F05}" srcOrd="1" destOrd="0" parTransId="{87588A84-DC57-406C-A108-CFCC4004FC6C}" sibTransId="{0CBD7366-E5EA-4B52-A3D3-14B2192789CD}"/>
+    <dgm:cxn modelId="{6396F761-E731-4C7F-AE2A-818539723D9B}" type="presParOf" srcId="{8D1682A6-4714-441B-BC20-45AF0D777170}" destId="{D018DF1D-3166-4C49-9BD1-818FFEC758B9}" srcOrd="0" destOrd="0" presId="urn:microsoft.com/office/officeart/2018/2/layout/IconLabelList"/>
+    <dgm:cxn modelId="{C8691D32-C41C-4096-8911-E9299410673F}" type="presParOf" srcId="{D018DF1D-3166-4C49-9BD1-818FFEC758B9}" destId="{9406E64E-34FB-4A08-A87A-D98A8AF37FAA}" srcOrd="0" destOrd="0" presId="urn:microsoft.com/office/officeart/2018/2/layout/IconLabelList"/>
+    <dgm:cxn modelId="{EB14C311-C0A9-431B-84EC-E1B024F758FE}" type="presParOf" srcId="{D018DF1D-3166-4C49-9BD1-818FFEC758B9}" destId="{E3556981-8584-463C-9BA8-C6BAF24B75E6}" srcOrd="1" destOrd="0" presId="urn:microsoft.com/office/officeart/2018/2/layout/IconLabelList"/>
+    <dgm:cxn modelId="{9FC029AA-1D13-403F-91EF-73553FF4EF84}" type="presParOf" srcId="{D018DF1D-3166-4C49-9BD1-818FFEC758B9}" destId="{B2A420F5-6352-4D03-909A-998EB329CD9D}" srcOrd="2" destOrd="0" presId="urn:microsoft.com/office/officeart/2018/2/layout/IconLabelList"/>
+    <dgm:cxn modelId="{AB7918EF-D6F2-4A31-BE6C-8EAD2AD2E147}" type="presParOf" srcId="{8D1682A6-4714-441B-BC20-45AF0D777170}" destId="{84107393-0898-46A5-AE51-67037D678321}" srcOrd="1" destOrd="0" presId="urn:microsoft.com/office/officeart/2018/2/layout/IconLabelList"/>
+    <dgm:cxn modelId="{C7D030D0-E595-4904-B0C2-D061458F509D}" type="presParOf" srcId="{8D1682A6-4714-441B-BC20-45AF0D777170}" destId="{C8A6F388-D740-4DA1-9503-2BFEFFB05BD6}" srcOrd="2" destOrd="0" presId="urn:microsoft.com/office/officeart/2018/2/layout/IconLabelList"/>
+    <dgm:cxn modelId="{EBBBE681-5A0D-40CB-8534-0F93657ADA43}" type="presParOf" srcId="{C8A6F388-D740-4DA1-9503-2BFEFFB05BD6}" destId="{C73A4C9B-6D4E-4E4F-AAD7-632AA2DBF84E}" srcOrd="0" destOrd="0" presId="urn:microsoft.com/office/officeart/2018/2/layout/IconLabelList"/>
+    <dgm:cxn modelId="{1D9ADB4A-5D12-49FE-A75A-8E6BB5154A60}" type="presParOf" srcId="{C8A6F388-D740-4DA1-9503-2BFEFFB05BD6}" destId="{73919CC2-7E3C-4AB9-9E1F-1C0267212FE4}" srcOrd="1" destOrd="0" presId="urn:microsoft.com/office/officeart/2018/2/layout/IconLabelList"/>
+    <dgm:cxn modelId="{5AE1C228-DBFE-4D0D-B21F-7B2C36212A0D}" type="presParOf" srcId="{C8A6F388-D740-4DA1-9503-2BFEFFB05BD6}" destId="{586C61C7-2E3C-416D-87C4-101C46FFDB92}" srcOrd="2" destOrd="0" presId="urn:microsoft.com/office/officeart/2018/2/layout/IconLabelList"/>
+    <dgm:cxn modelId="{5C9608DE-E8E1-49DD-B3D3-9650FD7F4C20}" type="presParOf" srcId="{8D1682A6-4714-441B-BC20-45AF0D777170}" destId="{9880EF00-AB6A-4FDA-996A-89080FBFC8E1}" srcOrd="3" destOrd="0" presId="urn:microsoft.com/office/officeart/2018/2/layout/IconLabelList"/>
+    <dgm:cxn modelId="{B52AEB66-86B7-49B9-BA81-FD55151F4F18}" type="presParOf" srcId="{8D1682A6-4714-441B-BC20-45AF0D777170}" destId="{89DE17D4-1E0E-40D2-9832-034BD25B7A98}" srcOrd="4" destOrd="0" presId="urn:microsoft.com/office/officeart/2018/2/layout/IconLabelList"/>
+    <dgm:cxn modelId="{D9487AA7-7E37-4191-88B8-7A22F1F2778F}" type="presParOf" srcId="{89DE17D4-1E0E-40D2-9832-034BD25B7A98}" destId="{45C95526-D118-43A5-8CC3-CA3B77ADFEB1}" srcOrd="0" destOrd="0" presId="urn:microsoft.com/office/officeart/2018/2/layout/IconLabelList"/>
+    <dgm:cxn modelId="{6D813388-B703-4968-B375-7F2A1A1ED580}" type="presParOf" srcId="{89DE17D4-1E0E-40D2-9832-034BD25B7A98}" destId="{292736C8-A663-4AE5-95AE-1135A7766E54}" srcOrd="1" destOrd="0" presId="urn:microsoft.com/office/officeart/2018/2/layout/IconLabelList"/>
+    <dgm:cxn modelId="{62B8A836-9D29-465E-8F96-3BC8ABAD16D9}" type="presParOf" srcId="{89DE17D4-1E0E-40D2-9832-034BD25B7A98}" destId="{1A77DA38-9F73-4B1A-BC22-FFCD5DCD6F62}" srcOrd="2" destOrd="0" presId="urn:microsoft.com/office/officeart/2018/2/layout/IconLabelList"/>
+    <dgm:cxn modelId="{994B6F03-9FCA-48F4-A7B1-128C46125859}" type="presParOf" srcId="{8D1682A6-4714-441B-BC20-45AF0D777170}" destId="{05DFB78E-3EAB-4152-BDDE-6D466272D37C}" srcOrd="5" destOrd="0" presId="urn:microsoft.com/office/officeart/2018/2/layout/IconLabelList"/>
+    <dgm:cxn modelId="{E115A779-00FC-4400-9AEC-5416C03D36EB}" type="presParOf" srcId="{8D1682A6-4714-441B-BC20-45AF0D777170}" destId="{2D43AC31-E03E-44B0-8255-60B6D4E3ABF8}" srcOrd="6" destOrd="0" presId="urn:microsoft.com/office/officeart/2018/2/layout/IconLabelList"/>
+    <dgm:cxn modelId="{6B819FCE-275E-4CDA-98DC-3C9103E32708}" type="presParOf" srcId="{2D43AC31-E03E-44B0-8255-60B6D4E3ABF8}" destId="{36138E50-6454-49D2-B873-2AE068DB8A29}" srcOrd="0" destOrd="0" presId="urn:microsoft.com/office/officeart/2018/2/layout/IconLabelList"/>
+    <dgm:cxn modelId="{2445DAE8-C8AC-46B0-BA91-DB7A1C9FE209}" type="presParOf" srcId="{2D43AC31-E03E-44B0-8255-60B6D4E3ABF8}" destId="{3C9C519C-2796-4621-AE18-956B2606E672}" srcOrd="1" destOrd="0" presId="urn:microsoft.com/office/officeart/2018/2/layout/IconLabelList"/>
+    <dgm:cxn modelId="{9D29A23B-F629-4100-A62B-5CCACA51B672}" type="presParOf" srcId="{2D43AC31-E03E-44B0-8255-60B6D4E3ABF8}" destId="{D707A982-DA4D-4FE4-A657-31145B1E2997}" srcOrd="2" destOrd="0" presId="urn:microsoft.com/office/officeart/2018/2/layout/IconLabelList"/>
   </dgm:cxnLst>
   <dgm:bg/>
   <dgm:whole/>
@@ -7983,8 +9430,8 @@
       </dsp:nvSpPr>
       <dsp:spPr>
         <a:xfrm>
-          <a:off x="2250914" y="296402"/>
-          <a:ext cx="2196000" cy="2196000"/>
+          <a:off x="718664" y="453902"/>
+          <a:ext cx="1955812" cy="1955812"/>
         </a:xfrm>
         <a:prstGeom prst="ellipse">
           <a:avLst/>
@@ -8022,8 +9469,8 @@
       </dsp:nvSpPr>
       <dsp:spPr>
         <a:xfrm>
-          <a:off x="2718914" y="764402"/>
-          <a:ext cx="1260000" cy="1260000"/>
+          <a:off x="1135476" y="870714"/>
+          <a:ext cx="1122187" cy="1122187"/>
         </a:xfrm>
         <a:prstGeom prst="rect">
           <a:avLst/>
@@ -8072,8 +9519,8 @@
       </dsp:nvSpPr>
       <dsp:spPr>
         <a:xfrm>
-          <a:off x="1548914" y="3176402"/>
-          <a:ext cx="3600000" cy="720000"/>
+          <a:off x="93445" y="3018902"/>
+          <a:ext cx="3206250" cy="720000"/>
         </a:xfrm>
         <a:prstGeom prst="rect">
           <a:avLst/>
@@ -8102,9 +9549,9 @@
         </a:bodyPr>
         <a:lstStyle/>
         <a:p>
-          <a:pPr marL="0" lvl="0" indent="0" algn="ctr" defTabSz="533400">
+          <a:pPr marL="0" lvl="0" indent="0" algn="ctr" defTabSz="488950">
             <a:lnSpc>
-              <a:spcPct val="90000"/>
+              <a:spcPct val="100000"/>
             </a:lnSpc>
             <a:spcBef>
               <a:spcPct val="0"/>
@@ -8113,16 +9560,17 @@
               <a:spcPct val="35000"/>
             </a:spcAft>
             <a:buNone/>
+            <a:defRPr cap="all"/>
           </a:pPr>
           <a:r>
-            <a:rPr lang="en-GB" sz="1200" kern="1200" dirty="0">
+            <a:rPr lang="en-GB" sz="1100" kern="1200" cap="none">
               <a:solidFill>
                 <a:schemeClr val="tx1"/>
               </a:solidFill>
             </a:rPr>
             <a:t>Indirect prompt injection can take many forms ranging from attacks targeting data used to write code to malicious prompts in order to gain personal data</a:t>
           </a:r>
-          <a:endParaRPr lang="en-US" sz="1200" kern="1200" dirty="0">
+          <a:endParaRPr lang="en-US" sz="1100" kern="1200" cap="none">
             <a:solidFill>
               <a:schemeClr val="tx1"/>
             </a:solidFill>
@@ -8130,8 +9578,8 @@
         </a:p>
       </dsp:txBody>
       <dsp:txXfrm>
-        <a:off x="1548914" y="3176402"/>
-        <a:ext cx="3600000" cy="720000"/>
+        <a:off x="93445" y="3018902"/>
+        <a:ext cx="3206250" cy="720000"/>
       </dsp:txXfrm>
     </dsp:sp>
     <dsp:sp modelId="{3F752F29-D33F-4B7A-A3A0-F9CFE63ED1FB}">
@@ -8141,8 +9589,8 @@
       </dsp:nvSpPr>
       <dsp:spPr>
         <a:xfrm>
-          <a:off x="6480914" y="296402"/>
-          <a:ext cx="2196000" cy="2196000"/>
+          <a:off x="4486008" y="453902"/>
+          <a:ext cx="1955812" cy="1955812"/>
         </a:xfrm>
         <a:prstGeom prst="ellipse">
           <a:avLst/>
@@ -8180,8 +9628,8 @@
       </dsp:nvSpPr>
       <dsp:spPr>
         <a:xfrm>
-          <a:off x="6948914" y="764402"/>
-          <a:ext cx="1260000" cy="1260000"/>
+          <a:off x="4902820" y="870714"/>
+          <a:ext cx="1122187" cy="1122187"/>
         </a:xfrm>
         <a:prstGeom prst="rect">
           <a:avLst/>
@@ -8230,8 +9678,307 @@
       </dsp:nvSpPr>
       <dsp:spPr>
         <a:xfrm>
-          <a:off x="5778914" y="3176402"/>
-          <a:ext cx="3600000" cy="720000"/>
+          <a:off x="3860789" y="3018902"/>
+          <a:ext cx="3206250" cy="720000"/>
+        </a:xfrm>
+        <a:prstGeom prst="rect">
+          <a:avLst/>
+        </a:prstGeom>
+        <a:noFill/>
+        <a:ln>
+          <a:noFill/>
+        </a:ln>
+        <a:effectLst/>
+      </dsp:spPr>
+      <dsp:style>
+        <a:lnRef idx="0">
+          <a:scrgbClr r="0" g="0" b="0"/>
+        </a:lnRef>
+        <a:fillRef idx="0">
+          <a:scrgbClr r="0" g="0" b="0"/>
+        </a:fillRef>
+        <a:effectRef idx="0">
+          <a:scrgbClr r="0" g="0" b="0"/>
+        </a:effectRef>
+        <a:fontRef idx="minor"/>
+      </dsp:style>
+      <dsp:txBody>
+        <a:bodyPr spcFirstLastPara="0" vert="horz" wrap="square" lIns="0" tIns="0" rIns="0" bIns="0" numCol="1" spcCol="1270" anchor="t" anchorCtr="0">
+          <a:noAutofit/>
+        </a:bodyPr>
+        <a:lstStyle/>
+        <a:p>
+          <a:pPr marL="0" lvl="0" indent="0" algn="ctr" defTabSz="488950">
+            <a:lnSpc>
+              <a:spcPct val="100000"/>
+            </a:lnSpc>
+            <a:spcBef>
+              <a:spcPct val="0"/>
+            </a:spcBef>
+            <a:spcAft>
+              <a:spcPct val="35000"/>
+            </a:spcAft>
+            <a:buNone/>
+            <a:defRPr cap="all"/>
+          </a:pPr>
+          <a:r>
+            <a:rPr lang="en-GB" sz="1100" kern="1200" cap="none">
+              <a:solidFill>
+                <a:schemeClr val="tx1"/>
+              </a:solidFill>
+            </a:rPr>
+            <a:t>Through my project I will be exploring a number of these methods with a focus on web apps and develop methods to test LLM vulnerabilities of them</a:t>
+          </a:r>
+          <a:endParaRPr lang="en-US" sz="1100" kern="1200" cap="none">
+            <a:solidFill>
+              <a:schemeClr val="tx1"/>
+            </a:solidFill>
+          </a:endParaRPr>
+        </a:p>
+      </dsp:txBody>
+      <dsp:txXfrm>
+        <a:off x="3860789" y="3018902"/>
+        <a:ext cx="3206250" cy="720000"/>
+      </dsp:txXfrm>
+    </dsp:sp>
+    <dsp:sp modelId="{5F27640C-6DD8-4378-87F0-C91FF8FBBA5A}">
+      <dsp:nvSpPr>
+        <dsp:cNvPr id="0" name=""/>
+        <dsp:cNvSpPr/>
+      </dsp:nvSpPr>
+      <dsp:spPr>
+        <a:xfrm>
+          <a:off x="8253352" y="453902"/>
+          <a:ext cx="1955812" cy="1955812"/>
+        </a:xfrm>
+        <a:prstGeom prst="ellipse">
+          <a:avLst/>
+        </a:prstGeom>
+        <a:solidFill>
+          <a:schemeClr val="accent4">
+            <a:hueOff val="0"/>
+            <a:satOff val="0"/>
+            <a:lumOff val="0"/>
+            <a:alphaOff val="0"/>
+          </a:schemeClr>
+        </a:solidFill>
+        <a:ln>
+          <a:noFill/>
+        </a:ln>
+        <a:effectLst/>
+      </dsp:spPr>
+      <dsp:style>
+        <a:lnRef idx="0">
+          <a:scrgbClr r="0" g="0" b="0"/>
+        </a:lnRef>
+        <a:fillRef idx="1">
+          <a:scrgbClr r="0" g="0" b="0"/>
+        </a:fillRef>
+        <a:effectRef idx="0">
+          <a:scrgbClr r="0" g="0" b="0"/>
+        </a:effectRef>
+        <a:fontRef idx="minor"/>
+      </dsp:style>
+    </dsp:sp>
+    <dsp:sp modelId="{6E7720AB-BA23-4554-BE30-EE3F3C08E7C1}">
+      <dsp:nvSpPr>
+        <dsp:cNvPr id="0" name=""/>
+        <dsp:cNvSpPr/>
+      </dsp:nvSpPr>
+      <dsp:spPr>
+        <a:xfrm>
+          <a:off x="8670164" y="870714"/>
+          <a:ext cx="1122187" cy="1122187"/>
+        </a:xfrm>
+        <a:prstGeom prst="rect">
+          <a:avLst/>
+        </a:prstGeom>
+        <a:blipFill>
+          <a:blip xmlns:r="http://schemas.openxmlformats.org/officeDocument/2006/relationships" r:embed="rId5">
+            <a:extLst>
+              <a:ext uri="{28A0092B-C50C-407E-A947-70E740481C1C}">
+                <a14:useLocalDpi xmlns:a14="http://schemas.microsoft.com/office/drawing/2010/main" val="0"/>
+              </a:ext>
+              <a:ext uri="{96DAC541-7B7A-43D3-8B79-37D633B846F1}">
+                <asvg:svgBlip xmlns:asvg="http://schemas.microsoft.com/office/drawing/2016/SVG/main" r:embed="rId6"/>
+              </a:ext>
+            </a:extLst>
+          </a:blip>
+          <a:stretch>
+            <a:fillRect/>
+          </a:stretch>
+        </a:blipFill>
+        <a:ln w="19050" cap="flat" cmpd="sng" algn="ctr">
+          <a:solidFill>
+            <a:schemeClr val="lt1">
+              <a:alpha val="0"/>
+              <a:hueOff val="0"/>
+              <a:satOff val="0"/>
+              <a:lumOff val="0"/>
+              <a:alphaOff val="0"/>
+            </a:schemeClr>
+          </a:solidFill>
+          <a:prstDash val="solid"/>
+          <a:miter lim="800000"/>
+        </a:ln>
+        <a:effectLst/>
+      </dsp:spPr>
+      <dsp:style>
+        <a:lnRef idx="2">
+          <a:scrgbClr r="0" g="0" b="0"/>
+        </a:lnRef>
+        <a:fillRef idx="1">
+          <a:scrgbClr r="0" g="0" b="0"/>
+        </a:fillRef>
+        <a:effectRef idx="0">
+          <a:scrgbClr r="0" g="0" b="0"/>
+        </a:effectRef>
+        <a:fontRef idx="minor">
+          <a:schemeClr val="lt1"/>
+        </a:fontRef>
+      </dsp:style>
+    </dsp:sp>
+    <dsp:sp modelId="{FA792F96-9D2D-4970-BE4F-36DF94CEA07B}">
+      <dsp:nvSpPr>
+        <dsp:cNvPr id="0" name=""/>
+        <dsp:cNvSpPr/>
+      </dsp:nvSpPr>
+      <dsp:spPr>
+        <a:xfrm>
+          <a:off x="7628133" y="3018902"/>
+          <a:ext cx="3206250" cy="720000"/>
+        </a:xfrm>
+        <a:prstGeom prst="rect">
+          <a:avLst/>
+        </a:prstGeom>
+        <a:noFill/>
+        <a:ln>
+          <a:noFill/>
+        </a:ln>
+        <a:effectLst/>
+      </dsp:spPr>
+      <dsp:style>
+        <a:lnRef idx="0">
+          <a:scrgbClr r="0" g="0" b="0"/>
+        </a:lnRef>
+        <a:fillRef idx="0">
+          <a:scrgbClr r="0" g="0" b="0"/>
+        </a:fillRef>
+        <a:effectRef idx="0">
+          <a:scrgbClr r="0" g="0" b="0"/>
+        </a:effectRef>
+        <a:fontRef idx="minor"/>
+      </dsp:style>
+      <dsp:txBody>
+        <a:bodyPr spcFirstLastPara="0" vert="horz" wrap="square" lIns="0" tIns="0" rIns="0" bIns="0" numCol="1" spcCol="1270" anchor="t" anchorCtr="0">
+          <a:noAutofit/>
+        </a:bodyPr>
+        <a:lstStyle/>
+        <a:p>
+          <a:pPr marL="0" lvl="0" indent="0" algn="ctr" defTabSz="488950">
+            <a:lnSpc>
+              <a:spcPct val="100000"/>
+            </a:lnSpc>
+            <a:spcBef>
+              <a:spcPct val="0"/>
+            </a:spcBef>
+            <a:spcAft>
+              <a:spcPct val="35000"/>
+            </a:spcAft>
+            <a:buNone/>
+            <a:defRPr cap="all"/>
+          </a:pPr>
+          <a:r>
+            <a:rPr lang="en-GB" sz="1100" kern="1200" cap="none" dirty="0">
+              <a:solidFill>
+                <a:schemeClr val="tx1"/>
+              </a:solidFill>
+            </a:rPr>
+            <a:t>This will lead onto my artifact aim of producing a web tool for developers which can allow for easy testing of LLM’s for security vulnerabilities</a:t>
+          </a:r>
+          <a:endParaRPr lang="en-US" sz="1100" kern="1200" cap="none" dirty="0">
+            <a:solidFill>
+              <a:schemeClr val="tx1"/>
+            </a:solidFill>
+          </a:endParaRPr>
+        </a:p>
+      </dsp:txBody>
+      <dsp:txXfrm>
+        <a:off x="7628133" y="3018902"/>
+        <a:ext cx="3206250" cy="720000"/>
+      </dsp:txXfrm>
+    </dsp:sp>
+  </dsp:spTree>
+</dsp:drawing>
+</file>
+
+<file path=ppt/diagrams/drawing7.xml><?xml version="1.0" encoding="utf-8"?>
+<dsp:drawing xmlns:dgm="http://schemas.openxmlformats.org/drawingml/2006/diagram" xmlns:dsp="http://schemas.microsoft.com/office/drawing/2008/diagram" xmlns:a="http://schemas.openxmlformats.org/drawingml/2006/main">
+  <dsp:spTree>
+    <dsp:nvGrpSpPr>
+      <dsp:cNvPr id="0" name=""/>
+      <dsp:cNvGrpSpPr/>
+    </dsp:nvGrpSpPr>
+    <dsp:grpSpPr/>
+    <dsp:sp modelId="{9406E64E-34FB-4A08-A87A-D98A8AF37FAA}">
+      <dsp:nvSpPr>
+        <dsp:cNvPr id="0" name=""/>
+        <dsp:cNvSpPr/>
+      </dsp:nvSpPr>
+      <dsp:spPr>
+        <a:xfrm>
+          <a:off x="752566" y="1045320"/>
+          <a:ext cx="1066720" cy="1066720"/>
+        </a:xfrm>
+        <a:prstGeom prst="rect">
+          <a:avLst/>
+        </a:prstGeom>
+        <a:blipFill>
+          <a:blip xmlns:r="http://schemas.openxmlformats.org/officeDocument/2006/relationships" r:embed="rId1">
+            <a:extLst>
+              <a:ext uri="{28A0092B-C50C-407E-A947-70E740481C1C}">
+                <a14:useLocalDpi xmlns:a14="http://schemas.microsoft.com/office/drawing/2010/main" val="0"/>
+              </a:ext>
+              <a:ext uri="{96DAC541-7B7A-43D3-8B79-37D633B846F1}">
+                <asvg:svgBlip xmlns:asvg="http://schemas.microsoft.com/office/drawing/2016/SVG/main" r:embed="rId2"/>
+              </a:ext>
+            </a:extLst>
+          </a:blip>
+          <a:stretch>
+            <a:fillRect/>
+          </a:stretch>
+        </a:blipFill>
+        <a:ln w="19050" cap="flat" cmpd="sng" algn="ctr">
+          <a:noFill/>
+          <a:prstDash val="solid"/>
+          <a:miter lim="800000"/>
+        </a:ln>
+        <a:effectLst/>
+      </dsp:spPr>
+      <dsp:style>
+        <a:lnRef idx="2">
+          <a:scrgbClr r="0" g="0" b="0"/>
+        </a:lnRef>
+        <a:fillRef idx="1">
+          <a:scrgbClr r="0" g="0" b="0"/>
+        </a:fillRef>
+        <a:effectRef idx="0">
+          <a:scrgbClr r="0" g="0" b="0"/>
+        </a:effectRef>
+        <a:fontRef idx="minor">
+          <a:schemeClr val="lt1"/>
+        </a:fontRef>
+      </dsp:style>
+    </dsp:sp>
+    <dsp:sp modelId="{B2A420F5-6352-4D03-909A-998EB329CD9D}">
+      <dsp:nvSpPr>
+        <dsp:cNvPr id="0" name=""/>
+        <dsp:cNvSpPr/>
+      </dsp:nvSpPr>
+      <dsp:spPr>
+        <a:xfrm>
+          <a:off x="100682" y="2427484"/>
+          <a:ext cx="2370489" cy="720000"/>
         </a:xfrm>
         <a:prstGeom prst="rect">
           <a:avLst/>
@@ -8273,23 +10020,348 @@
             <a:buNone/>
           </a:pPr>
           <a:r>
-            <a:rPr lang="en-GB" sz="1200" kern="1200" dirty="0">
-              <a:solidFill>
-                <a:schemeClr val="tx1"/>
-              </a:solidFill>
-            </a:rPr>
-            <a:t>Through my project I will be exploring a number of these methods with a focus on web apps and develop methods to test LLM vulnerabilities of them</a:t>
+            <a:rPr lang="en-GB" sz="1200" kern="1200"/>
+            <a:t>The end goal of my artifact is to ultimately give developers an easy way to testing their LLM’s for up and coming security vulnerabilities</a:t>
           </a:r>
-          <a:endParaRPr lang="en-US" sz="1200" kern="1200" dirty="0">
-            <a:solidFill>
-              <a:schemeClr val="tx1"/>
-            </a:solidFill>
-          </a:endParaRPr>
+          <a:endParaRPr lang="en-US" sz="1200" kern="1200"/>
         </a:p>
       </dsp:txBody>
       <dsp:txXfrm>
-        <a:off x="5778914" y="3176402"/>
-        <a:ext cx="3600000" cy="720000"/>
+        <a:off x="100682" y="2427484"/>
+        <a:ext cx="2370489" cy="720000"/>
+      </dsp:txXfrm>
+    </dsp:sp>
+    <dsp:sp modelId="{C73A4C9B-6D4E-4E4F-AAD7-632AA2DBF84E}">
+      <dsp:nvSpPr>
+        <dsp:cNvPr id="0" name=""/>
+        <dsp:cNvSpPr/>
+      </dsp:nvSpPr>
+      <dsp:spPr>
+        <a:xfrm>
+          <a:off x="3537891" y="1045320"/>
+          <a:ext cx="1066720" cy="1066720"/>
+        </a:xfrm>
+        <a:prstGeom prst="rect">
+          <a:avLst/>
+        </a:prstGeom>
+        <a:blipFill>
+          <a:blip xmlns:r="http://schemas.openxmlformats.org/officeDocument/2006/relationships" r:embed="rId3">
+            <a:extLst>
+              <a:ext uri="{28A0092B-C50C-407E-A947-70E740481C1C}">
+                <a14:useLocalDpi xmlns:a14="http://schemas.microsoft.com/office/drawing/2010/main" val="0"/>
+              </a:ext>
+              <a:ext uri="{96DAC541-7B7A-43D3-8B79-37D633B846F1}">
+                <asvg:svgBlip xmlns:asvg="http://schemas.microsoft.com/office/drawing/2016/SVG/main" r:embed="rId4"/>
+              </a:ext>
+            </a:extLst>
+          </a:blip>
+          <a:stretch>
+            <a:fillRect/>
+          </a:stretch>
+        </a:blipFill>
+        <a:ln w="19050" cap="flat" cmpd="sng" algn="ctr">
+          <a:noFill/>
+          <a:prstDash val="solid"/>
+          <a:miter lim="800000"/>
+        </a:ln>
+        <a:effectLst/>
+      </dsp:spPr>
+      <dsp:style>
+        <a:lnRef idx="2">
+          <a:scrgbClr r="0" g="0" b="0"/>
+        </a:lnRef>
+        <a:fillRef idx="1">
+          <a:scrgbClr r="0" g="0" b="0"/>
+        </a:fillRef>
+        <a:effectRef idx="0">
+          <a:scrgbClr r="0" g="0" b="0"/>
+        </a:effectRef>
+        <a:fontRef idx="minor">
+          <a:schemeClr val="lt1"/>
+        </a:fontRef>
+      </dsp:style>
+    </dsp:sp>
+    <dsp:sp modelId="{586C61C7-2E3C-416D-87C4-101C46FFDB92}">
+      <dsp:nvSpPr>
+        <dsp:cNvPr id="0" name=""/>
+        <dsp:cNvSpPr/>
+      </dsp:nvSpPr>
+      <dsp:spPr>
+        <a:xfrm>
+          <a:off x="2886007" y="2427484"/>
+          <a:ext cx="2370489" cy="720000"/>
+        </a:xfrm>
+        <a:prstGeom prst="rect">
+          <a:avLst/>
+        </a:prstGeom>
+        <a:noFill/>
+        <a:ln>
+          <a:noFill/>
+        </a:ln>
+        <a:effectLst/>
+      </dsp:spPr>
+      <dsp:style>
+        <a:lnRef idx="0">
+          <a:scrgbClr r="0" g="0" b="0"/>
+        </a:lnRef>
+        <a:fillRef idx="0">
+          <a:scrgbClr r="0" g="0" b="0"/>
+        </a:fillRef>
+        <a:effectRef idx="0">
+          <a:scrgbClr r="0" g="0" b="0"/>
+        </a:effectRef>
+        <a:fontRef idx="minor"/>
+      </dsp:style>
+      <dsp:txBody>
+        <a:bodyPr spcFirstLastPara="0" vert="horz" wrap="square" lIns="0" tIns="0" rIns="0" bIns="0" numCol="1" spcCol="1270" anchor="t" anchorCtr="0">
+          <a:noAutofit/>
+        </a:bodyPr>
+        <a:lstStyle/>
+        <a:p>
+          <a:pPr marL="0" lvl="0" indent="0" algn="ctr" defTabSz="533400">
+            <a:lnSpc>
+              <a:spcPct val="90000"/>
+            </a:lnSpc>
+            <a:spcBef>
+              <a:spcPct val="0"/>
+            </a:spcBef>
+            <a:spcAft>
+              <a:spcPct val="35000"/>
+            </a:spcAft>
+            <a:buNone/>
+          </a:pPr>
+          <a:r>
+            <a:rPr lang="en-GB" sz="1200" kern="1200"/>
+            <a:t>As part of this I aim to maximise the number of vulnerabilities we look at, at least 5</a:t>
+          </a:r>
+          <a:endParaRPr lang="en-US" sz="1200" kern="1200"/>
+        </a:p>
+      </dsp:txBody>
+      <dsp:txXfrm>
+        <a:off x="2886007" y="2427484"/>
+        <a:ext cx="2370489" cy="720000"/>
+      </dsp:txXfrm>
+    </dsp:sp>
+    <dsp:sp modelId="{45C95526-D118-43A5-8CC3-CA3B77ADFEB1}">
+      <dsp:nvSpPr>
+        <dsp:cNvPr id="0" name=""/>
+        <dsp:cNvSpPr/>
+      </dsp:nvSpPr>
+      <dsp:spPr>
+        <a:xfrm>
+          <a:off x="6323216" y="1045320"/>
+          <a:ext cx="1066720" cy="1066720"/>
+        </a:xfrm>
+        <a:prstGeom prst="rect">
+          <a:avLst/>
+        </a:prstGeom>
+        <a:blipFill>
+          <a:blip xmlns:r="http://schemas.openxmlformats.org/officeDocument/2006/relationships" r:embed="rId5">
+            <a:extLst>
+              <a:ext uri="{28A0092B-C50C-407E-A947-70E740481C1C}">
+                <a14:useLocalDpi xmlns:a14="http://schemas.microsoft.com/office/drawing/2010/main" val="0"/>
+              </a:ext>
+              <a:ext uri="{96DAC541-7B7A-43D3-8B79-37D633B846F1}">
+                <asvg:svgBlip xmlns:asvg="http://schemas.microsoft.com/office/drawing/2016/SVG/main" r:embed="rId6"/>
+              </a:ext>
+            </a:extLst>
+          </a:blip>
+          <a:stretch>
+            <a:fillRect/>
+          </a:stretch>
+        </a:blipFill>
+        <a:ln w="19050" cap="flat" cmpd="sng" algn="ctr">
+          <a:noFill/>
+          <a:prstDash val="solid"/>
+          <a:miter lim="800000"/>
+        </a:ln>
+        <a:effectLst/>
+      </dsp:spPr>
+      <dsp:style>
+        <a:lnRef idx="2">
+          <a:scrgbClr r="0" g="0" b="0"/>
+        </a:lnRef>
+        <a:fillRef idx="1">
+          <a:scrgbClr r="0" g="0" b="0"/>
+        </a:fillRef>
+        <a:effectRef idx="0">
+          <a:scrgbClr r="0" g="0" b="0"/>
+        </a:effectRef>
+        <a:fontRef idx="minor">
+          <a:schemeClr val="lt1"/>
+        </a:fontRef>
+      </dsp:style>
+    </dsp:sp>
+    <dsp:sp modelId="{1A77DA38-9F73-4B1A-BC22-FFCD5DCD6F62}">
+      <dsp:nvSpPr>
+        <dsp:cNvPr id="0" name=""/>
+        <dsp:cNvSpPr/>
+      </dsp:nvSpPr>
+      <dsp:spPr>
+        <a:xfrm>
+          <a:off x="5671332" y="2427484"/>
+          <a:ext cx="2370489" cy="720000"/>
+        </a:xfrm>
+        <a:prstGeom prst="rect">
+          <a:avLst/>
+        </a:prstGeom>
+        <a:noFill/>
+        <a:ln>
+          <a:noFill/>
+        </a:ln>
+        <a:effectLst/>
+      </dsp:spPr>
+      <dsp:style>
+        <a:lnRef idx="0">
+          <a:scrgbClr r="0" g="0" b="0"/>
+        </a:lnRef>
+        <a:fillRef idx="0">
+          <a:scrgbClr r="0" g="0" b="0"/>
+        </a:fillRef>
+        <a:effectRef idx="0">
+          <a:scrgbClr r="0" g="0" b="0"/>
+        </a:effectRef>
+        <a:fontRef idx="minor"/>
+      </dsp:style>
+      <dsp:txBody>
+        <a:bodyPr spcFirstLastPara="0" vert="horz" wrap="square" lIns="0" tIns="0" rIns="0" bIns="0" numCol="1" spcCol="1270" anchor="t" anchorCtr="0">
+          <a:noAutofit/>
+        </a:bodyPr>
+        <a:lstStyle/>
+        <a:p>
+          <a:pPr marL="0" lvl="0" indent="0" algn="ctr" defTabSz="533400">
+            <a:lnSpc>
+              <a:spcPct val="90000"/>
+            </a:lnSpc>
+            <a:spcBef>
+              <a:spcPct val="0"/>
+            </a:spcBef>
+            <a:spcAft>
+              <a:spcPct val="35000"/>
+            </a:spcAft>
+            <a:buNone/>
+          </a:pPr>
+          <a:r>
+            <a:rPr lang="en-GB" sz="1200" kern="1200"/>
+            <a:t>It should have vulnerabilities isolated to be developer friendly</a:t>
+          </a:r>
+          <a:endParaRPr lang="en-US" sz="1200" kern="1200"/>
+        </a:p>
+      </dsp:txBody>
+      <dsp:txXfrm>
+        <a:off x="5671332" y="2427484"/>
+        <a:ext cx="2370489" cy="720000"/>
+      </dsp:txXfrm>
+    </dsp:sp>
+    <dsp:sp modelId="{36138E50-6454-49D2-B873-2AE068DB8A29}">
+      <dsp:nvSpPr>
+        <dsp:cNvPr id="0" name=""/>
+        <dsp:cNvSpPr/>
+      </dsp:nvSpPr>
+      <dsp:spPr>
+        <a:xfrm>
+          <a:off x="9108541" y="1045320"/>
+          <a:ext cx="1066720" cy="1066720"/>
+        </a:xfrm>
+        <a:prstGeom prst="rect">
+          <a:avLst/>
+        </a:prstGeom>
+        <a:blipFill>
+          <a:blip xmlns:r="http://schemas.openxmlformats.org/officeDocument/2006/relationships" r:embed="rId7">
+            <a:extLst>
+              <a:ext uri="{28A0092B-C50C-407E-A947-70E740481C1C}">
+                <a14:useLocalDpi xmlns:a14="http://schemas.microsoft.com/office/drawing/2010/main" val="0"/>
+              </a:ext>
+              <a:ext uri="{96DAC541-7B7A-43D3-8B79-37D633B846F1}">
+                <asvg:svgBlip xmlns:asvg="http://schemas.microsoft.com/office/drawing/2016/SVG/main" r:embed="rId8"/>
+              </a:ext>
+            </a:extLst>
+          </a:blip>
+          <a:stretch>
+            <a:fillRect/>
+          </a:stretch>
+        </a:blipFill>
+        <a:ln w="19050" cap="flat" cmpd="sng" algn="ctr">
+          <a:noFill/>
+          <a:prstDash val="solid"/>
+          <a:miter lim="800000"/>
+        </a:ln>
+        <a:effectLst/>
+      </dsp:spPr>
+      <dsp:style>
+        <a:lnRef idx="2">
+          <a:scrgbClr r="0" g="0" b="0"/>
+        </a:lnRef>
+        <a:fillRef idx="1">
+          <a:scrgbClr r="0" g="0" b="0"/>
+        </a:fillRef>
+        <a:effectRef idx="0">
+          <a:scrgbClr r="0" g="0" b="0"/>
+        </a:effectRef>
+        <a:fontRef idx="minor">
+          <a:schemeClr val="lt1"/>
+        </a:fontRef>
+      </dsp:style>
+    </dsp:sp>
+    <dsp:sp modelId="{D707A982-DA4D-4FE4-A657-31145B1E2997}">
+      <dsp:nvSpPr>
+        <dsp:cNvPr id="0" name=""/>
+        <dsp:cNvSpPr/>
+      </dsp:nvSpPr>
+      <dsp:spPr>
+        <a:xfrm>
+          <a:off x="8456657" y="2427484"/>
+          <a:ext cx="2370489" cy="720000"/>
+        </a:xfrm>
+        <a:prstGeom prst="rect">
+          <a:avLst/>
+        </a:prstGeom>
+        <a:noFill/>
+        <a:ln>
+          <a:noFill/>
+        </a:ln>
+        <a:effectLst/>
+      </dsp:spPr>
+      <dsp:style>
+        <a:lnRef idx="0">
+          <a:scrgbClr r="0" g="0" b="0"/>
+        </a:lnRef>
+        <a:fillRef idx="0">
+          <a:scrgbClr r="0" g="0" b="0"/>
+        </a:fillRef>
+        <a:effectRef idx="0">
+          <a:scrgbClr r="0" g="0" b="0"/>
+        </a:effectRef>
+        <a:fontRef idx="minor"/>
+      </dsp:style>
+      <dsp:txBody>
+        <a:bodyPr spcFirstLastPara="0" vert="horz" wrap="square" lIns="0" tIns="0" rIns="0" bIns="0" numCol="1" spcCol="1270" anchor="t" anchorCtr="0">
+          <a:noAutofit/>
+        </a:bodyPr>
+        <a:lstStyle/>
+        <a:p>
+          <a:pPr marL="0" lvl="0" indent="0" algn="ctr" defTabSz="533400">
+            <a:lnSpc>
+              <a:spcPct val="90000"/>
+            </a:lnSpc>
+            <a:spcBef>
+              <a:spcPct val="0"/>
+            </a:spcBef>
+            <a:spcAft>
+              <a:spcPct val="35000"/>
+            </a:spcAft>
+            <a:buNone/>
+          </a:pPr>
+          <a:r>
+            <a:rPr lang="en-GB" sz="1200" kern="1200"/>
+            <a:t>There should be appropriate instructions</a:t>
+          </a:r>
+          <a:endParaRPr lang="en-US" sz="1200" kern="1200"/>
+        </a:p>
+      </dsp:txBody>
+      <dsp:txXfrm>
+        <a:off x="8456657" y="2427484"/>
+        <a:ext cx="2370489" cy="720000"/>
       </dsp:txXfrm>
     </dsp:sp>
   </dsp:spTree>
@@ -9417,6 +11489,196 @@
 </dgm:layoutDef>
 </file>
 
+<file path=ppt/diagrams/layout7.xml><?xml version="1.0" encoding="utf-8"?>
+<dgm:layoutDef xmlns:dgm="http://schemas.openxmlformats.org/drawingml/2006/diagram" xmlns:a="http://schemas.openxmlformats.org/drawingml/2006/main" uniqueId="urn:microsoft.com/office/officeart/2018/2/layout/IconLabelList">
+  <dgm:title val="Icon Label List"/>
+  <dgm:desc val="Use to show non-sequential or grouped chunks of information accompanied by a related visuals. Works best with icons or small pictures with short text captions."/>
+  <dgm:catLst>
+    <dgm:cat type="icon" pri="500"/>
+  </dgm:catLst>
+  <dgm:sampData useDef="1">
+    <dgm:dataModel>
+      <dgm:ptLst/>
+      <dgm:bg/>
+      <dgm:whole/>
+    </dgm:dataModel>
+  </dgm:sampData>
+  <dgm:styleData useDef="1">
+    <dgm:dataModel>
+      <dgm:ptLst/>
+      <dgm:bg/>
+      <dgm:whole/>
+    </dgm:dataModel>
+  </dgm:styleData>
+  <dgm:clrData useDef="1">
+    <dgm:dataModel>
+      <dgm:ptLst/>
+      <dgm:bg/>
+      <dgm:whole/>
+    </dgm:dataModel>
+  </dgm:clrData>
+  <dgm:layoutNode name="root">
+    <dgm:varLst>
+      <dgm:dir/>
+      <dgm:resizeHandles val="exact"/>
+    </dgm:varLst>
+    <dgm:choose name="Name0">
+      <dgm:if name="Name1" axis="self" func="var" arg="dir" op="equ" val="norm">
+        <dgm:alg type="snake">
+          <dgm:param type="grDir" val="tL"/>
+          <dgm:param type="flowDir" val="row"/>
+          <dgm:param type="contDir" val="sameDir"/>
+          <dgm:param type="off" val="ctr"/>
+          <dgm:param type="vertAlign" val="mid"/>
+          <dgm:param type="horzAlign" val="ctr"/>
+        </dgm:alg>
+      </dgm:if>
+      <dgm:else name="Name2">
+        <dgm:alg type="snake">
+          <dgm:param type="grDir" val="tR"/>
+          <dgm:param type="flowDir" val="row"/>
+          <dgm:param type="contDir" val="sameDir"/>
+          <dgm:param type="off" val="ctr"/>
+          <dgm:param type="vertAlign" val="mid"/>
+          <dgm:param type="horzAlign" val="ctr"/>
+        </dgm:alg>
+      </dgm:else>
+    </dgm:choose>
+    <dgm:shape xmlns:r="http://schemas.openxmlformats.org/officeDocument/2006/relationships" r:blip="">
+      <dgm:adjLst/>
+    </dgm:shape>
+    <dgm:presOf/>
+    <dgm:choose name="Name3">
+      <dgm:if name="Name4" axis="ch" ptType="node" func="cnt" op="lte" val="2">
+        <dgm:constrLst>
+          <dgm:constr type="h" for="ch" forName="compNode" refType="h" fact="0.4"/>
+          <dgm:constr type="w" for="ch" forName="compNode" val="120"/>
+          <dgm:constr type="w" for="ch" forName="sibTrans" refType="w" refFor="ch" refForName="compNode" fact="0.175"/>
+          <dgm:constr type="sp" refType="w" refFor="ch" refForName="compNode" op="equ" fact="0.25"/>
+          <dgm:constr type="primFontSz" for="des" ptType="node" op="equ" val="50"/>
+          <dgm:constr type="h" for="des" forName="compNode" op="equ"/>
+          <dgm:constr type="h" for="des" forName="textRect" op="equ"/>
+        </dgm:constrLst>
+      </dgm:if>
+      <dgm:if name="Name5" axis="ch" ptType="node" func="cnt" op="lte" val="4">
+        <dgm:constrLst>
+          <dgm:constr type="h" for="ch" forName="compNode" refType="h" fact="0.4"/>
+          <dgm:constr type="w" for="ch" forName="compNode" refType="w"/>
+          <dgm:constr type="w" for="ch" forName="sibTrans" refType="w" refFor="ch" refForName="compNode" fact="0.175"/>
+          <dgm:constr type="sp" refType="w" refFor="ch" refForName="compNode" op="equ" fact="0.25"/>
+          <dgm:constr type="primFontSz" for="des" ptType="node" op="equ" val="36"/>
+          <dgm:constr type="h" for="des" forName="compNode" op="equ"/>
+          <dgm:constr type="h" for="des" forName="textRect" op="equ"/>
+        </dgm:constrLst>
+      </dgm:if>
+      <dgm:else name="Name6">
+        <dgm:constrLst>
+          <dgm:constr type="h" for="ch" forName="compNode" refType="h" fact="0.4"/>
+          <dgm:constr type="w" for="ch" forName="compNode" refType="w"/>
+          <dgm:constr type="w" for="ch" forName="sibTrans" refType="w" refFor="ch" refForName="compNode" fact="0.175"/>
+          <dgm:constr type="sp" refType="w" refFor="ch" refForName="compNode" op="equ" fact="0.25"/>
+          <dgm:constr type="primFontSz" for="des" ptType="node" op="equ" val="24"/>
+          <dgm:constr type="h" for="des" forName="compNode" op="equ"/>
+          <dgm:constr type="h" for="des" forName="textRect" op="equ"/>
+        </dgm:constrLst>
+      </dgm:else>
+    </dgm:choose>
+    <dgm:ruleLst>
+      <dgm:rule type="w" for="ch" forName="compNode" val="50" fact="NaN" max="NaN"/>
+    </dgm:ruleLst>
+    <dgm:forEach name="Name7" axis="ch" ptType="node">
+      <dgm:layoutNode name="compNode">
+        <dgm:alg type="composite"/>
+        <dgm:shape xmlns:r="http://schemas.openxmlformats.org/officeDocument/2006/relationships" r:blip="">
+          <dgm:adjLst/>
+        </dgm:shape>
+        <dgm:presOf axis="self"/>
+        <dgm:constrLst>
+          <dgm:constr type="w" for="ch" forName="iconRect" refType="w" fact="0.45"/>
+          <dgm:constr type="h" for="ch" forName="iconRect" refType="w" refFor="ch" refForName="iconRect"/>
+          <dgm:constr type="ctrX" for="ch" forName="iconRect" refType="w" fact="0.5"/>
+          <dgm:constr type="t" for="ch" forName="iconRect"/>
+          <dgm:constr type="h" for="ch" forName="spaceRect" refType="h" fact="0.15"/>
+          <dgm:constr type="w" for="ch" forName="spaceRect" refType="w"/>
+          <dgm:constr type="l" for="ch" forName="spaceRect"/>
+          <dgm:constr type="t" for="ch" forName="spaceRect" refType="b" refFor="ch" refForName="iconRect"/>
+          <dgm:constr type="h" for="ch" forName="textRect" val="20"/>
+          <dgm:constr type="w" for="ch" forName="textRect" refType="w"/>
+          <dgm:constr type="l" for="ch" forName="textRect"/>
+          <dgm:constr type="t" for="ch" forName="textRect" refType="b" refFor="ch" refForName="spaceRect"/>
+        </dgm:constrLst>
+        <dgm:ruleLst>
+          <dgm:rule type="h" val="INF" fact="NaN" max="NaN"/>
+        </dgm:ruleLst>
+        <dgm:layoutNode name="iconRect" styleLbl="node1">
+          <dgm:alg type="sp"/>
+          <dgm:shape xmlns:r="http://schemas.openxmlformats.org/officeDocument/2006/relationships" type="rect" r:blip="" blipPhldr="1">
+            <dgm:adjLst/>
+          </dgm:shape>
+          <dgm:presOf/>
+          <dgm:constrLst/>
+          <dgm:ruleLst/>
+        </dgm:layoutNode>
+        <dgm:layoutNode name="spaceRect">
+          <dgm:alg type="sp"/>
+          <dgm:shape xmlns:r="http://schemas.openxmlformats.org/officeDocument/2006/relationships" r:blip="">
+            <dgm:adjLst/>
+          </dgm:shape>
+          <dgm:presOf/>
+          <dgm:constrLst/>
+          <dgm:ruleLst/>
+        </dgm:layoutNode>
+        <dgm:layoutNode name="textRect" styleLbl="revTx">
+          <dgm:varLst>
+            <dgm:chMax val="1"/>
+            <dgm:chPref val="1"/>
+          </dgm:varLst>
+          <dgm:alg type="tx">
+            <dgm:param type="txAnchorVert" val="t"/>
+          </dgm:alg>
+          <dgm:shape xmlns:r="http://schemas.openxmlformats.org/officeDocument/2006/relationships" type="rect" r:blip="">
+            <dgm:adjLst/>
+          </dgm:shape>
+          <dgm:presOf axis="self" ptType="node"/>
+          <dgm:constrLst>
+            <dgm:constr type="lMarg"/>
+            <dgm:constr type="rMarg"/>
+            <dgm:constr type="tMarg"/>
+            <dgm:constr type="bMarg"/>
+          </dgm:constrLst>
+          <dgm:ruleLst>
+            <dgm:rule type="primFontSz" val="11" fact="NaN" max="NaN"/>
+            <dgm:rule type="h" val="INF" fact="NaN" max="NaN"/>
+          </dgm:ruleLst>
+        </dgm:layoutNode>
+      </dgm:layoutNode>
+      <dgm:forEach name="Name8" axis="followSib" ptType="sibTrans" cnt="1">
+        <dgm:layoutNode name="sibTrans">
+          <dgm:alg type="sp"/>
+          <dgm:shape xmlns:r="http://schemas.openxmlformats.org/officeDocument/2006/relationships" r:blip="">
+            <dgm:adjLst/>
+          </dgm:shape>
+          <dgm:presOf axis="self"/>
+          <dgm:constrLst/>
+          <dgm:ruleLst/>
+        </dgm:layoutNode>
+      </dgm:forEach>
+    </dgm:forEach>
+  </dgm:layoutNode>
+  <dgm:extLst>
+    <a:ext uri="{68A01E43-0DF5-4B5B-8FA6-DAF915123BFB}">
+      <dgm1612:lstStyle xmlns:dgm1612="http://schemas.microsoft.com/office/drawing/2016/12/diagram">
+        <a:lvl1pPr>
+          <a:lnSpc>
+            <a:spcPct val="100000"/>
+          </a:lnSpc>
+        </a:lvl1pPr>
+      </dgm1612:lstStyle>
+    </a:ext>
+  </dgm:extLst>
+</dgm:layoutDef>
+</file>
+
 <file path=ppt/diagrams/quickStyle1.xml><?xml version="1.0" encoding="utf-8"?>
 <dgm:styleDef xmlns:dgm="http://schemas.openxmlformats.org/drawingml/2006/diagram" xmlns:a="http://schemas.openxmlformats.org/drawingml/2006/main" uniqueId="urn:microsoft.com/office/officeart/2005/8/quickstyle/simple1">
   <dgm:title val=""/>
@@ -14588,6 +16850,1040 @@
 </file>
 
 <file path=ppt/diagrams/quickStyle6.xml><?xml version="1.0" encoding="utf-8"?>
+<dgm:styleDef xmlns:dgm="http://schemas.openxmlformats.org/drawingml/2006/diagram" xmlns:a="http://schemas.openxmlformats.org/drawingml/2006/main" uniqueId="urn:microsoft.com/office/officeart/2005/8/quickstyle/simple1">
+  <dgm:title val=""/>
+  <dgm:desc val=""/>
+  <dgm:catLst>
+    <dgm:cat type="simple" pri="10100"/>
+  </dgm:catLst>
+  <dgm:scene3d>
+    <a:camera prst="orthographicFront"/>
+    <a:lightRig rig="threePt" dir="t"/>
+  </dgm:scene3d>
+  <dgm:styleLbl name="node0">
+    <dgm:scene3d>
+      <a:camera prst="orthographicFront"/>
+      <a:lightRig rig="threePt" dir="t"/>
+    </dgm:scene3d>
+    <dgm:sp3d/>
+    <dgm:txPr/>
+    <dgm:style>
+      <a:lnRef idx="2">
+        <a:scrgbClr r="0" g="0" b="0"/>
+      </a:lnRef>
+      <a:fillRef idx="1">
+        <a:scrgbClr r="0" g="0" b="0"/>
+      </a:fillRef>
+      <a:effectRef idx="0">
+        <a:scrgbClr r="0" g="0" b="0"/>
+      </a:effectRef>
+      <a:fontRef idx="minor">
+        <a:schemeClr val="lt1"/>
+      </a:fontRef>
+    </dgm:style>
+  </dgm:styleLbl>
+  <dgm:styleLbl name="lnNode1">
+    <dgm:scene3d>
+      <a:camera prst="orthographicFront"/>
+      <a:lightRig rig="threePt" dir="t"/>
+    </dgm:scene3d>
+    <dgm:sp3d/>
+    <dgm:txPr/>
+    <dgm:style>
+      <a:lnRef idx="2">
+        <a:scrgbClr r="0" g="0" b="0"/>
+      </a:lnRef>
+      <a:fillRef idx="1">
+        <a:scrgbClr r="0" g="0" b="0"/>
+      </a:fillRef>
+      <a:effectRef idx="0">
+        <a:scrgbClr r="0" g="0" b="0"/>
+      </a:effectRef>
+      <a:fontRef idx="minor">
+        <a:schemeClr val="lt1"/>
+      </a:fontRef>
+    </dgm:style>
+  </dgm:styleLbl>
+  <dgm:styleLbl name="vennNode1">
+    <dgm:scene3d>
+      <a:camera prst="orthographicFront"/>
+      <a:lightRig rig="threePt" dir="t"/>
+    </dgm:scene3d>
+    <dgm:sp3d/>
+    <dgm:txPr/>
+    <dgm:style>
+      <a:lnRef idx="2">
+        <a:scrgbClr r="0" g="0" b="0"/>
+      </a:lnRef>
+      <a:fillRef idx="1">
+        <a:scrgbClr r="0" g="0" b="0"/>
+      </a:fillRef>
+      <a:effectRef idx="0">
+        <a:scrgbClr r="0" g="0" b="0"/>
+      </a:effectRef>
+      <a:fontRef idx="minor">
+        <a:schemeClr val="tx1"/>
+      </a:fontRef>
+    </dgm:style>
+  </dgm:styleLbl>
+  <dgm:styleLbl name="alignNode1">
+    <dgm:scene3d>
+      <a:camera prst="orthographicFront"/>
+      <a:lightRig rig="threePt" dir="t"/>
+    </dgm:scene3d>
+    <dgm:sp3d/>
+    <dgm:txPr/>
+    <dgm:style>
+      <a:lnRef idx="2">
+        <a:scrgbClr r="0" g="0" b="0"/>
+      </a:lnRef>
+      <a:fillRef idx="1">
+        <a:scrgbClr r="0" g="0" b="0"/>
+      </a:fillRef>
+      <a:effectRef idx="0">
+        <a:scrgbClr r="0" g="0" b="0"/>
+      </a:effectRef>
+      <a:fontRef idx="minor">
+        <a:schemeClr val="lt1"/>
+      </a:fontRef>
+    </dgm:style>
+  </dgm:styleLbl>
+  <dgm:styleLbl name="node1">
+    <dgm:scene3d>
+      <a:camera prst="orthographicFront"/>
+      <a:lightRig rig="threePt" dir="t"/>
+    </dgm:scene3d>
+    <dgm:sp3d/>
+    <dgm:txPr/>
+    <dgm:style>
+      <a:lnRef idx="2">
+        <a:scrgbClr r="0" g="0" b="0"/>
+      </a:lnRef>
+      <a:fillRef idx="1">
+        <a:scrgbClr r="0" g="0" b="0"/>
+      </a:fillRef>
+      <a:effectRef idx="0">
+        <a:scrgbClr r="0" g="0" b="0"/>
+      </a:effectRef>
+      <a:fontRef idx="minor">
+        <a:schemeClr val="lt1"/>
+      </a:fontRef>
+    </dgm:style>
+  </dgm:styleLbl>
+  <dgm:styleLbl name="node2">
+    <dgm:scene3d>
+      <a:camera prst="orthographicFront"/>
+      <a:lightRig rig="threePt" dir="t"/>
+    </dgm:scene3d>
+    <dgm:sp3d/>
+    <dgm:txPr/>
+    <dgm:style>
+      <a:lnRef idx="2">
+        <a:scrgbClr r="0" g="0" b="0"/>
+      </a:lnRef>
+      <a:fillRef idx="1">
+        <a:scrgbClr r="0" g="0" b="0"/>
+      </a:fillRef>
+      <a:effectRef idx="0">
+        <a:scrgbClr r="0" g="0" b="0"/>
+      </a:effectRef>
+      <a:fontRef idx="minor">
+        <a:schemeClr val="lt1"/>
+      </a:fontRef>
+    </dgm:style>
+  </dgm:styleLbl>
+  <dgm:styleLbl name="node3">
+    <dgm:scene3d>
+      <a:camera prst="orthographicFront"/>
+      <a:lightRig rig="threePt" dir="t"/>
+    </dgm:scene3d>
+    <dgm:sp3d/>
+    <dgm:txPr/>
+    <dgm:style>
+      <a:lnRef idx="2">
+        <a:scrgbClr r="0" g="0" b="0"/>
+      </a:lnRef>
+      <a:fillRef idx="1">
+        <a:scrgbClr r="0" g="0" b="0"/>
+      </a:fillRef>
+      <a:effectRef idx="0">
+        <a:scrgbClr r="0" g="0" b="0"/>
+      </a:effectRef>
+      <a:fontRef idx="minor">
+        <a:schemeClr val="lt1"/>
+      </a:fontRef>
+    </dgm:style>
+  </dgm:styleLbl>
+  <dgm:styleLbl name="node4">
+    <dgm:scene3d>
+      <a:camera prst="orthographicFront"/>
+      <a:lightRig rig="threePt" dir="t"/>
+    </dgm:scene3d>
+    <dgm:sp3d/>
+    <dgm:txPr/>
+    <dgm:style>
+      <a:lnRef idx="2">
+        <a:scrgbClr r="0" g="0" b="0"/>
+      </a:lnRef>
+      <a:fillRef idx="1">
+        <a:scrgbClr r="0" g="0" b="0"/>
+      </a:fillRef>
+      <a:effectRef idx="0">
+        <a:scrgbClr r="0" g="0" b="0"/>
+      </a:effectRef>
+      <a:fontRef idx="minor">
+        <a:schemeClr val="lt1"/>
+      </a:fontRef>
+    </dgm:style>
+  </dgm:styleLbl>
+  <dgm:styleLbl name="fgImgPlace1">
+    <dgm:scene3d>
+      <a:camera prst="orthographicFront"/>
+      <a:lightRig rig="threePt" dir="t"/>
+    </dgm:scene3d>
+    <dgm:sp3d/>
+    <dgm:txPr/>
+    <dgm:style>
+      <a:lnRef idx="2">
+        <a:scrgbClr r="0" g="0" b="0"/>
+      </a:lnRef>
+      <a:fillRef idx="1">
+        <a:scrgbClr r="0" g="0" b="0"/>
+      </a:fillRef>
+      <a:effectRef idx="0">
+        <a:scrgbClr r="0" g="0" b="0"/>
+      </a:effectRef>
+      <a:fontRef idx="minor"/>
+    </dgm:style>
+  </dgm:styleLbl>
+  <dgm:styleLbl name="alignImgPlace1">
+    <dgm:scene3d>
+      <a:camera prst="orthographicFront"/>
+      <a:lightRig rig="threePt" dir="t"/>
+    </dgm:scene3d>
+    <dgm:sp3d/>
+    <dgm:txPr/>
+    <dgm:style>
+      <a:lnRef idx="2">
+        <a:scrgbClr r="0" g="0" b="0"/>
+      </a:lnRef>
+      <a:fillRef idx="1">
+        <a:scrgbClr r="0" g="0" b="0"/>
+      </a:fillRef>
+      <a:effectRef idx="0">
+        <a:scrgbClr r="0" g="0" b="0"/>
+      </a:effectRef>
+      <a:fontRef idx="minor"/>
+    </dgm:style>
+  </dgm:styleLbl>
+  <dgm:styleLbl name="bgImgPlace1">
+    <dgm:scene3d>
+      <a:camera prst="orthographicFront"/>
+      <a:lightRig rig="threePt" dir="t"/>
+    </dgm:scene3d>
+    <dgm:sp3d/>
+    <dgm:txPr/>
+    <dgm:style>
+      <a:lnRef idx="2">
+        <a:scrgbClr r="0" g="0" b="0"/>
+      </a:lnRef>
+      <a:fillRef idx="1">
+        <a:scrgbClr r="0" g="0" b="0"/>
+      </a:fillRef>
+      <a:effectRef idx="0">
+        <a:scrgbClr r="0" g="0" b="0"/>
+      </a:effectRef>
+      <a:fontRef idx="minor"/>
+    </dgm:style>
+  </dgm:styleLbl>
+  <dgm:styleLbl name="sibTrans2D1">
+    <dgm:scene3d>
+      <a:camera prst="orthographicFront"/>
+      <a:lightRig rig="threePt" dir="t"/>
+    </dgm:scene3d>
+    <dgm:sp3d/>
+    <dgm:txPr/>
+    <dgm:style>
+      <a:lnRef idx="0">
+        <a:scrgbClr r="0" g="0" b="0"/>
+      </a:lnRef>
+      <a:fillRef idx="1">
+        <a:scrgbClr r="0" g="0" b="0"/>
+      </a:fillRef>
+      <a:effectRef idx="0">
+        <a:scrgbClr r="0" g="0" b="0"/>
+      </a:effectRef>
+      <a:fontRef idx="minor">
+        <a:schemeClr val="lt1"/>
+      </a:fontRef>
+    </dgm:style>
+  </dgm:styleLbl>
+  <dgm:styleLbl name="fgSibTrans2D1">
+    <dgm:scene3d>
+      <a:camera prst="orthographicFront"/>
+      <a:lightRig rig="threePt" dir="t"/>
+    </dgm:scene3d>
+    <dgm:sp3d/>
+    <dgm:txPr/>
+    <dgm:style>
+      <a:lnRef idx="0">
+        <a:scrgbClr r="0" g="0" b="0"/>
+      </a:lnRef>
+      <a:fillRef idx="1">
+        <a:scrgbClr r="0" g="0" b="0"/>
+      </a:fillRef>
+      <a:effectRef idx="0">
+        <a:scrgbClr r="0" g="0" b="0"/>
+      </a:effectRef>
+      <a:fontRef idx="minor">
+        <a:schemeClr val="lt1"/>
+      </a:fontRef>
+    </dgm:style>
+  </dgm:styleLbl>
+  <dgm:styleLbl name="bgSibTrans2D1">
+    <dgm:scene3d>
+      <a:camera prst="orthographicFront"/>
+      <a:lightRig rig="threePt" dir="t"/>
+    </dgm:scene3d>
+    <dgm:sp3d/>
+    <dgm:txPr/>
+    <dgm:style>
+      <a:lnRef idx="0">
+        <a:scrgbClr r="0" g="0" b="0"/>
+      </a:lnRef>
+      <a:fillRef idx="1">
+        <a:scrgbClr r="0" g="0" b="0"/>
+      </a:fillRef>
+      <a:effectRef idx="0">
+        <a:scrgbClr r="0" g="0" b="0"/>
+      </a:effectRef>
+      <a:fontRef idx="minor">
+        <a:schemeClr val="lt1"/>
+      </a:fontRef>
+    </dgm:style>
+  </dgm:styleLbl>
+  <dgm:styleLbl name="sibTrans1D1">
+    <dgm:scene3d>
+      <a:camera prst="orthographicFront"/>
+      <a:lightRig rig="threePt" dir="t"/>
+    </dgm:scene3d>
+    <dgm:sp3d/>
+    <dgm:txPr/>
+    <dgm:style>
+      <a:lnRef idx="1">
+        <a:scrgbClr r="0" g="0" b="0"/>
+      </a:lnRef>
+      <a:fillRef idx="0">
+        <a:scrgbClr r="0" g="0" b="0"/>
+      </a:fillRef>
+      <a:effectRef idx="0">
+        <a:scrgbClr r="0" g="0" b="0"/>
+      </a:effectRef>
+      <a:fontRef idx="minor"/>
+    </dgm:style>
+  </dgm:styleLbl>
+  <dgm:styleLbl name="callout">
+    <dgm:scene3d>
+      <a:camera prst="orthographicFront"/>
+      <a:lightRig rig="threePt" dir="t"/>
+    </dgm:scene3d>
+    <dgm:sp3d/>
+    <dgm:txPr/>
+    <dgm:style>
+      <a:lnRef idx="2">
+        <a:scrgbClr r="0" g="0" b="0"/>
+      </a:lnRef>
+      <a:fillRef idx="1">
+        <a:scrgbClr r="0" g="0" b="0"/>
+      </a:fillRef>
+      <a:effectRef idx="0">
+        <a:scrgbClr r="0" g="0" b="0"/>
+      </a:effectRef>
+      <a:fontRef idx="minor"/>
+    </dgm:style>
+  </dgm:styleLbl>
+  <dgm:styleLbl name="asst0">
+    <dgm:scene3d>
+      <a:camera prst="orthographicFront"/>
+      <a:lightRig rig="threePt" dir="t"/>
+    </dgm:scene3d>
+    <dgm:sp3d/>
+    <dgm:txPr/>
+    <dgm:style>
+      <a:lnRef idx="2">
+        <a:scrgbClr r="0" g="0" b="0"/>
+      </a:lnRef>
+      <a:fillRef idx="1">
+        <a:scrgbClr r="0" g="0" b="0"/>
+      </a:fillRef>
+      <a:effectRef idx="0">
+        <a:scrgbClr r="0" g="0" b="0"/>
+      </a:effectRef>
+      <a:fontRef idx="minor">
+        <a:schemeClr val="lt1"/>
+      </a:fontRef>
+    </dgm:style>
+  </dgm:styleLbl>
+  <dgm:styleLbl name="asst1">
+    <dgm:scene3d>
+      <a:camera prst="orthographicFront"/>
+      <a:lightRig rig="threePt" dir="t"/>
+    </dgm:scene3d>
+    <dgm:sp3d/>
+    <dgm:txPr/>
+    <dgm:style>
+      <a:lnRef idx="2">
+        <a:scrgbClr r="0" g="0" b="0"/>
+      </a:lnRef>
+      <a:fillRef idx="1">
+        <a:scrgbClr r="0" g="0" b="0"/>
+      </a:fillRef>
+      <a:effectRef idx="0">
+        <a:scrgbClr r="0" g="0" b="0"/>
+      </a:effectRef>
+      <a:fontRef idx="minor">
+        <a:schemeClr val="lt1"/>
+      </a:fontRef>
+    </dgm:style>
+  </dgm:styleLbl>
+  <dgm:styleLbl name="asst2">
+    <dgm:scene3d>
+      <a:camera prst="orthographicFront"/>
+      <a:lightRig rig="threePt" dir="t"/>
+    </dgm:scene3d>
+    <dgm:sp3d/>
+    <dgm:txPr/>
+    <dgm:style>
+      <a:lnRef idx="2">
+        <a:scrgbClr r="0" g="0" b="0"/>
+      </a:lnRef>
+      <a:fillRef idx="1">
+        <a:scrgbClr r="0" g="0" b="0"/>
+      </a:fillRef>
+      <a:effectRef idx="0">
+        <a:scrgbClr r="0" g="0" b="0"/>
+      </a:effectRef>
+      <a:fontRef idx="minor">
+        <a:schemeClr val="lt1"/>
+      </a:fontRef>
+    </dgm:style>
+  </dgm:styleLbl>
+  <dgm:styleLbl name="asst3">
+    <dgm:scene3d>
+      <a:camera prst="orthographicFront"/>
+      <a:lightRig rig="threePt" dir="t"/>
+    </dgm:scene3d>
+    <dgm:sp3d/>
+    <dgm:txPr/>
+    <dgm:style>
+      <a:lnRef idx="2">
+        <a:scrgbClr r="0" g="0" b="0"/>
+      </a:lnRef>
+      <a:fillRef idx="1">
+        <a:scrgbClr r="0" g="0" b="0"/>
+      </a:fillRef>
+      <a:effectRef idx="0">
+        <a:scrgbClr r="0" g="0" b="0"/>
+      </a:effectRef>
+      <a:fontRef idx="minor">
+        <a:schemeClr val="lt1"/>
+      </a:fontRef>
+    </dgm:style>
+  </dgm:styleLbl>
+  <dgm:styleLbl name="asst4">
+    <dgm:scene3d>
+      <a:camera prst="orthographicFront"/>
+      <a:lightRig rig="threePt" dir="t"/>
+    </dgm:scene3d>
+    <dgm:sp3d/>
+    <dgm:txPr/>
+    <dgm:style>
+      <a:lnRef idx="2">
+        <a:scrgbClr r="0" g="0" b="0"/>
+      </a:lnRef>
+      <a:fillRef idx="1">
+        <a:scrgbClr r="0" g="0" b="0"/>
+      </a:fillRef>
+      <a:effectRef idx="0">
+        <a:scrgbClr r="0" g="0" b="0"/>
+      </a:effectRef>
+      <a:fontRef idx="minor">
+        <a:schemeClr val="lt1"/>
+      </a:fontRef>
+    </dgm:style>
+  </dgm:styleLbl>
+  <dgm:styleLbl name="parChTrans2D1">
+    <dgm:scene3d>
+      <a:camera prst="orthographicFront"/>
+      <a:lightRig rig="threePt" dir="t"/>
+    </dgm:scene3d>
+    <dgm:sp3d/>
+    <dgm:txPr/>
+    <dgm:style>
+      <a:lnRef idx="2">
+        <a:scrgbClr r="0" g="0" b="0"/>
+      </a:lnRef>
+      <a:fillRef idx="1">
+        <a:scrgbClr r="0" g="0" b="0"/>
+      </a:fillRef>
+      <a:effectRef idx="0">
+        <a:scrgbClr r="0" g="0" b="0"/>
+      </a:effectRef>
+      <a:fontRef idx="minor">
+        <a:schemeClr val="lt1"/>
+      </a:fontRef>
+    </dgm:style>
+  </dgm:styleLbl>
+  <dgm:styleLbl name="parChTrans2D2">
+    <dgm:scene3d>
+      <a:camera prst="orthographicFront"/>
+      <a:lightRig rig="threePt" dir="t"/>
+    </dgm:scene3d>
+    <dgm:sp3d/>
+    <dgm:txPr/>
+    <dgm:style>
+      <a:lnRef idx="2">
+        <a:scrgbClr r="0" g="0" b="0"/>
+      </a:lnRef>
+      <a:fillRef idx="1">
+        <a:scrgbClr r="0" g="0" b="0"/>
+      </a:fillRef>
+      <a:effectRef idx="0">
+        <a:scrgbClr r="0" g="0" b="0"/>
+      </a:effectRef>
+      <a:fontRef idx="minor">
+        <a:schemeClr val="lt1"/>
+      </a:fontRef>
+    </dgm:style>
+  </dgm:styleLbl>
+  <dgm:styleLbl name="parChTrans2D3">
+    <dgm:scene3d>
+      <a:camera prst="orthographicFront"/>
+      <a:lightRig rig="threePt" dir="t"/>
+    </dgm:scene3d>
+    <dgm:sp3d/>
+    <dgm:txPr/>
+    <dgm:style>
+      <a:lnRef idx="2">
+        <a:scrgbClr r="0" g="0" b="0"/>
+      </a:lnRef>
+      <a:fillRef idx="1">
+        <a:scrgbClr r="0" g="0" b="0"/>
+      </a:fillRef>
+      <a:effectRef idx="0">
+        <a:scrgbClr r="0" g="0" b="0"/>
+      </a:effectRef>
+      <a:fontRef idx="minor">
+        <a:schemeClr val="lt1"/>
+      </a:fontRef>
+    </dgm:style>
+  </dgm:styleLbl>
+  <dgm:styleLbl name="parChTrans2D4">
+    <dgm:scene3d>
+      <a:camera prst="orthographicFront"/>
+      <a:lightRig rig="threePt" dir="t"/>
+    </dgm:scene3d>
+    <dgm:sp3d/>
+    <dgm:txPr/>
+    <dgm:style>
+      <a:lnRef idx="2">
+        <a:scrgbClr r="0" g="0" b="0"/>
+      </a:lnRef>
+      <a:fillRef idx="1">
+        <a:scrgbClr r="0" g="0" b="0"/>
+      </a:fillRef>
+      <a:effectRef idx="0">
+        <a:scrgbClr r="0" g="0" b="0"/>
+      </a:effectRef>
+      <a:fontRef idx="minor">
+        <a:schemeClr val="lt1"/>
+      </a:fontRef>
+    </dgm:style>
+  </dgm:styleLbl>
+  <dgm:styleLbl name="parChTrans1D1">
+    <dgm:scene3d>
+      <a:camera prst="orthographicFront"/>
+      <a:lightRig rig="threePt" dir="t"/>
+    </dgm:scene3d>
+    <dgm:sp3d/>
+    <dgm:txPr/>
+    <dgm:style>
+      <a:lnRef idx="2">
+        <a:scrgbClr r="0" g="0" b="0"/>
+      </a:lnRef>
+      <a:fillRef idx="0">
+        <a:scrgbClr r="0" g="0" b="0"/>
+      </a:fillRef>
+      <a:effectRef idx="0">
+        <a:scrgbClr r="0" g="0" b="0"/>
+      </a:effectRef>
+      <a:fontRef idx="minor"/>
+    </dgm:style>
+  </dgm:styleLbl>
+  <dgm:styleLbl name="parChTrans1D2">
+    <dgm:scene3d>
+      <a:camera prst="orthographicFront"/>
+      <a:lightRig rig="threePt" dir="t"/>
+    </dgm:scene3d>
+    <dgm:sp3d/>
+    <dgm:txPr/>
+    <dgm:style>
+      <a:lnRef idx="2">
+        <a:scrgbClr r="0" g="0" b="0"/>
+      </a:lnRef>
+      <a:fillRef idx="0">
+        <a:scrgbClr r="0" g="0" b="0"/>
+      </a:fillRef>
+      <a:effectRef idx="0">
+        <a:scrgbClr r="0" g="0" b="0"/>
+      </a:effectRef>
+      <a:fontRef idx="minor"/>
+    </dgm:style>
+  </dgm:styleLbl>
+  <dgm:styleLbl name="parChTrans1D3">
+    <dgm:scene3d>
+      <a:camera prst="orthographicFront"/>
+      <a:lightRig rig="threePt" dir="t"/>
+    </dgm:scene3d>
+    <dgm:sp3d/>
+    <dgm:txPr/>
+    <dgm:style>
+      <a:lnRef idx="2">
+        <a:scrgbClr r="0" g="0" b="0"/>
+      </a:lnRef>
+      <a:fillRef idx="0">
+        <a:scrgbClr r="0" g="0" b="0"/>
+      </a:fillRef>
+      <a:effectRef idx="0">
+        <a:scrgbClr r="0" g="0" b="0"/>
+      </a:effectRef>
+      <a:fontRef idx="minor"/>
+    </dgm:style>
+  </dgm:styleLbl>
+  <dgm:styleLbl name="parChTrans1D4">
+    <dgm:scene3d>
+      <a:camera prst="orthographicFront"/>
+      <a:lightRig rig="threePt" dir="t"/>
+    </dgm:scene3d>
+    <dgm:sp3d/>
+    <dgm:txPr/>
+    <dgm:style>
+      <a:lnRef idx="2">
+        <a:scrgbClr r="0" g="0" b="0"/>
+      </a:lnRef>
+      <a:fillRef idx="0">
+        <a:scrgbClr r="0" g="0" b="0"/>
+      </a:fillRef>
+      <a:effectRef idx="0">
+        <a:scrgbClr r="0" g="0" b="0"/>
+      </a:effectRef>
+      <a:fontRef idx="minor"/>
+    </dgm:style>
+  </dgm:styleLbl>
+  <dgm:styleLbl name="fgAcc1">
+    <dgm:scene3d>
+      <a:camera prst="orthographicFront"/>
+      <a:lightRig rig="threePt" dir="t"/>
+    </dgm:scene3d>
+    <dgm:sp3d/>
+    <dgm:txPr/>
+    <dgm:style>
+      <a:lnRef idx="2">
+        <a:scrgbClr r="0" g="0" b="0"/>
+      </a:lnRef>
+      <a:fillRef idx="1">
+        <a:scrgbClr r="0" g="0" b="0"/>
+      </a:fillRef>
+      <a:effectRef idx="0">
+        <a:scrgbClr r="0" g="0" b="0"/>
+      </a:effectRef>
+      <a:fontRef idx="minor"/>
+    </dgm:style>
+  </dgm:styleLbl>
+  <dgm:styleLbl name="conFgAcc1">
+    <dgm:scene3d>
+      <a:camera prst="orthographicFront"/>
+      <a:lightRig rig="threePt" dir="t"/>
+    </dgm:scene3d>
+    <dgm:sp3d/>
+    <dgm:txPr/>
+    <dgm:style>
+      <a:lnRef idx="2">
+        <a:scrgbClr r="0" g="0" b="0"/>
+      </a:lnRef>
+      <a:fillRef idx="1">
+        <a:scrgbClr r="0" g="0" b="0"/>
+      </a:fillRef>
+      <a:effectRef idx="0">
+        <a:scrgbClr r="0" g="0" b="0"/>
+      </a:effectRef>
+      <a:fontRef idx="minor"/>
+    </dgm:style>
+  </dgm:styleLbl>
+  <dgm:styleLbl name="alignAcc1">
+    <dgm:scene3d>
+      <a:camera prst="orthographicFront"/>
+      <a:lightRig rig="threePt" dir="t"/>
+    </dgm:scene3d>
+    <dgm:sp3d/>
+    <dgm:txPr/>
+    <dgm:style>
+      <a:lnRef idx="2">
+        <a:scrgbClr r="0" g="0" b="0"/>
+      </a:lnRef>
+      <a:fillRef idx="1">
+        <a:scrgbClr r="0" g="0" b="0"/>
+      </a:fillRef>
+      <a:effectRef idx="0">
+        <a:scrgbClr r="0" g="0" b="0"/>
+      </a:effectRef>
+      <a:fontRef idx="minor"/>
+    </dgm:style>
+  </dgm:styleLbl>
+  <dgm:styleLbl name="trAlignAcc1">
+    <dgm:scene3d>
+      <a:camera prst="orthographicFront"/>
+      <a:lightRig rig="threePt" dir="t"/>
+    </dgm:scene3d>
+    <dgm:sp3d/>
+    <dgm:txPr/>
+    <dgm:style>
+      <a:lnRef idx="1">
+        <a:scrgbClr r="0" g="0" b="0"/>
+      </a:lnRef>
+      <a:fillRef idx="1">
+        <a:scrgbClr r="0" g="0" b="0"/>
+      </a:fillRef>
+      <a:effectRef idx="0">
+        <a:scrgbClr r="0" g="0" b="0"/>
+      </a:effectRef>
+      <a:fontRef idx="minor"/>
+    </dgm:style>
+  </dgm:styleLbl>
+  <dgm:styleLbl name="bgAcc1">
+    <dgm:scene3d>
+      <a:camera prst="orthographicFront"/>
+      <a:lightRig rig="threePt" dir="t"/>
+    </dgm:scene3d>
+    <dgm:sp3d/>
+    <dgm:txPr/>
+    <dgm:style>
+      <a:lnRef idx="2">
+        <a:scrgbClr r="0" g="0" b="0"/>
+      </a:lnRef>
+      <a:fillRef idx="1">
+        <a:scrgbClr r="0" g="0" b="0"/>
+      </a:fillRef>
+      <a:effectRef idx="0">
+        <a:scrgbClr r="0" g="0" b="0"/>
+      </a:effectRef>
+      <a:fontRef idx="minor"/>
+    </dgm:style>
+  </dgm:styleLbl>
+  <dgm:styleLbl name="solidFgAcc1">
+    <dgm:scene3d>
+      <a:camera prst="orthographicFront"/>
+      <a:lightRig rig="threePt" dir="t"/>
+    </dgm:scene3d>
+    <dgm:sp3d/>
+    <dgm:txPr/>
+    <dgm:style>
+      <a:lnRef idx="2">
+        <a:scrgbClr r="0" g="0" b="0"/>
+      </a:lnRef>
+      <a:fillRef idx="1">
+        <a:scrgbClr r="0" g="0" b="0"/>
+      </a:fillRef>
+      <a:effectRef idx="0">
+        <a:scrgbClr r="0" g="0" b="0"/>
+      </a:effectRef>
+      <a:fontRef idx="minor"/>
+    </dgm:style>
+  </dgm:styleLbl>
+  <dgm:styleLbl name="solidAlignAcc1">
+    <dgm:scene3d>
+      <a:camera prst="orthographicFront"/>
+      <a:lightRig rig="threePt" dir="t"/>
+    </dgm:scene3d>
+    <dgm:sp3d/>
+    <dgm:txPr/>
+    <dgm:style>
+      <a:lnRef idx="2">
+        <a:scrgbClr r="0" g="0" b="0"/>
+      </a:lnRef>
+      <a:fillRef idx="1">
+        <a:scrgbClr r="0" g="0" b="0"/>
+      </a:fillRef>
+      <a:effectRef idx="0">
+        <a:scrgbClr r="0" g="0" b="0"/>
+      </a:effectRef>
+      <a:fontRef idx="minor"/>
+    </dgm:style>
+  </dgm:styleLbl>
+  <dgm:styleLbl name="solidBgAcc1">
+    <dgm:scene3d>
+      <a:camera prst="orthographicFront"/>
+      <a:lightRig rig="threePt" dir="t"/>
+    </dgm:scene3d>
+    <dgm:sp3d/>
+    <dgm:txPr/>
+    <dgm:style>
+      <a:lnRef idx="2">
+        <a:scrgbClr r="0" g="0" b="0"/>
+      </a:lnRef>
+      <a:fillRef idx="1">
+        <a:scrgbClr r="0" g="0" b="0"/>
+      </a:fillRef>
+      <a:effectRef idx="0">
+        <a:scrgbClr r="0" g="0" b="0"/>
+      </a:effectRef>
+      <a:fontRef idx="minor"/>
+    </dgm:style>
+  </dgm:styleLbl>
+  <dgm:styleLbl name="fgAccFollowNode1">
+    <dgm:scene3d>
+      <a:camera prst="orthographicFront"/>
+      <a:lightRig rig="threePt" dir="t"/>
+    </dgm:scene3d>
+    <dgm:sp3d/>
+    <dgm:txPr/>
+    <dgm:style>
+      <a:lnRef idx="2">
+        <a:scrgbClr r="0" g="0" b="0"/>
+      </a:lnRef>
+      <a:fillRef idx="1">
+        <a:scrgbClr r="0" g="0" b="0"/>
+      </a:fillRef>
+      <a:effectRef idx="0">
+        <a:scrgbClr r="0" g="0" b="0"/>
+      </a:effectRef>
+      <a:fontRef idx="minor"/>
+    </dgm:style>
+  </dgm:styleLbl>
+  <dgm:styleLbl name="alignAccFollowNode1">
+    <dgm:scene3d>
+      <a:camera prst="orthographicFront"/>
+      <a:lightRig rig="threePt" dir="t"/>
+    </dgm:scene3d>
+    <dgm:sp3d/>
+    <dgm:txPr/>
+    <dgm:style>
+      <a:lnRef idx="2">
+        <a:scrgbClr r="0" g="0" b="0"/>
+      </a:lnRef>
+      <a:fillRef idx="1">
+        <a:scrgbClr r="0" g="0" b="0"/>
+      </a:fillRef>
+      <a:effectRef idx="0">
+        <a:scrgbClr r="0" g="0" b="0"/>
+      </a:effectRef>
+      <a:fontRef idx="minor"/>
+    </dgm:style>
+  </dgm:styleLbl>
+  <dgm:styleLbl name="bgAccFollowNode1">
+    <dgm:scene3d>
+      <a:camera prst="orthographicFront"/>
+      <a:lightRig rig="threePt" dir="t"/>
+    </dgm:scene3d>
+    <dgm:sp3d/>
+    <dgm:txPr/>
+    <dgm:style>
+      <a:lnRef idx="2">
+        <a:scrgbClr r="0" g="0" b="0"/>
+      </a:lnRef>
+      <a:fillRef idx="1">
+        <a:scrgbClr r="0" g="0" b="0"/>
+      </a:fillRef>
+      <a:effectRef idx="0">
+        <a:scrgbClr r="0" g="0" b="0"/>
+      </a:effectRef>
+      <a:fontRef idx="minor"/>
+    </dgm:style>
+  </dgm:styleLbl>
+  <dgm:styleLbl name="fgAcc0">
+    <dgm:scene3d>
+      <a:camera prst="orthographicFront"/>
+      <a:lightRig rig="threePt" dir="t"/>
+    </dgm:scene3d>
+    <dgm:sp3d/>
+    <dgm:txPr/>
+    <dgm:style>
+      <a:lnRef idx="2">
+        <a:scrgbClr r="0" g="0" b="0"/>
+      </a:lnRef>
+      <a:fillRef idx="1">
+        <a:scrgbClr r="0" g="0" b="0"/>
+      </a:fillRef>
+      <a:effectRef idx="0">
+        <a:scrgbClr r="0" g="0" b="0"/>
+      </a:effectRef>
+      <a:fontRef idx="minor"/>
+    </dgm:style>
+  </dgm:styleLbl>
+  <dgm:styleLbl name="fgAcc2">
+    <dgm:scene3d>
+      <a:camera prst="orthographicFront"/>
+      <a:lightRig rig="threePt" dir="t"/>
+    </dgm:scene3d>
+    <dgm:sp3d/>
+    <dgm:txPr/>
+    <dgm:style>
+      <a:lnRef idx="2">
+        <a:scrgbClr r="0" g="0" b="0"/>
+      </a:lnRef>
+      <a:fillRef idx="1">
+        <a:scrgbClr r="0" g="0" b="0"/>
+      </a:fillRef>
+      <a:effectRef idx="0">
+        <a:scrgbClr r="0" g="0" b="0"/>
+      </a:effectRef>
+      <a:fontRef idx="minor"/>
+    </dgm:style>
+  </dgm:styleLbl>
+  <dgm:styleLbl name="fgAcc3">
+    <dgm:scene3d>
+      <a:camera prst="orthographicFront"/>
+      <a:lightRig rig="threePt" dir="t"/>
+    </dgm:scene3d>
+    <dgm:sp3d/>
+    <dgm:txPr/>
+    <dgm:style>
+      <a:lnRef idx="2">
+        <a:scrgbClr r="0" g="0" b="0"/>
+      </a:lnRef>
+      <a:fillRef idx="1">
+        <a:scrgbClr r="0" g="0" b="0"/>
+      </a:fillRef>
+      <a:effectRef idx="0">
+        <a:scrgbClr r="0" g="0" b="0"/>
+      </a:effectRef>
+      <a:fontRef idx="minor"/>
+    </dgm:style>
+  </dgm:styleLbl>
+  <dgm:styleLbl name="fgAcc4">
+    <dgm:scene3d>
+      <a:camera prst="orthographicFront"/>
+      <a:lightRig rig="threePt" dir="t"/>
+    </dgm:scene3d>
+    <dgm:sp3d/>
+    <dgm:txPr/>
+    <dgm:style>
+      <a:lnRef idx="2">
+        <a:scrgbClr r="0" g="0" b="0"/>
+      </a:lnRef>
+      <a:fillRef idx="1">
+        <a:scrgbClr r="0" g="0" b="0"/>
+      </a:fillRef>
+      <a:effectRef idx="0">
+        <a:scrgbClr r="0" g="0" b="0"/>
+      </a:effectRef>
+      <a:fontRef idx="minor"/>
+    </dgm:style>
+  </dgm:styleLbl>
+  <dgm:styleLbl name="bgShp">
+    <dgm:scene3d>
+      <a:camera prst="orthographicFront"/>
+      <a:lightRig rig="threePt" dir="t"/>
+    </dgm:scene3d>
+    <dgm:sp3d/>
+    <dgm:txPr/>
+    <dgm:style>
+      <a:lnRef idx="0">
+        <a:scrgbClr r="0" g="0" b="0"/>
+      </a:lnRef>
+      <a:fillRef idx="1">
+        <a:scrgbClr r="0" g="0" b="0"/>
+      </a:fillRef>
+      <a:effectRef idx="0">
+        <a:scrgbClr r="0" g="0" b="0"/>
+      </a:effectRef>
+      <a:fontRef idx="minor"/>
+    </dgm:style>
+  </dgm:styleLbl>
+  <dgm:styleLbl name="dkBgShp">
+    <dgm:scene3d>
+      <a:camera prst="orthographicFront"/>
+      <a:lightRig rig="threePt" dir="t"/>
+    </dgm:scene3d>
+    <dgm:sp3d/>
+    <dgm:txPr/>
+    <dgm:style>
+      <a:lnRef idx="0">
+        <a:scrgbClr r="0" g="0" b="0"/>
+      </a:lnRef>
+      <a:fillRef idx="1">
+        <a:scrgbClr r="0" g="0" b="0"/>
+      </a:fillRef>
+      <a:effectRef idx="0">
+        <a:scrgbClr r="0" g="0" b="0"/>
+      </a:effectRef>
+      <a:fontRef idx="minor"/>
+    </dgm:style>
+  </dgm:styleLbl>
+  <dgm:styleLbl name="trBgShp">
+    <dgm:scene3d>
+      <a:camera prst="orthographicFront"/>
+      <a:lightRig rig="threePt" dir="t"/>
+    </dgm:scene3d>
+    <dgm:sp3d/>
+    <dgm:txPr/>
+    <dgm:style>
+      <a:lnRef idx="0">
+        <a:scrgbClr r="0" g="0" b="0"/>
+      </a:lnRef>
+      <a:fillRef idx="1">
+        <a:scrgbClr r="0" g="0" b="0"/>
+      </a:fillRef>
+      <a:effectRef idx="0">
+        <a:scrgbClr r="0" g="0" b="0"/>
+      </a:effectRef>
+      <a:fontRef idx="minor"/>
+    </dgm:style>
+  </dgm:styleLbl>
+  <dgm:styleLbl name="fgShp">
+    <dgm:scene3d>
+      <a:camera prst="orthographicFront"/>
+      <a:lightRig rig="threePt" dir="t"/>
+    </dgm:scene3d>
+    <dgm:sp3d/>
+    <dgm:txPr/>
+    <dgm:style>
+      <a:lnRef idx="2">
+        <a:scrgbClr r="0" g="0" b="0"/>
+      </a:lnRef>
+      <a:fillRef idx="1">
+        <a:scrgbClr r="0" g="0" b="0"/>
+      </a:fillRef>
+      <a:effectRef idx="0">
+        <a:scrgbClr r="0" g="0" b="0"/>
+      </a:effectRef>
+      <a:fontRef idx="minor"/>
+    </dgm:style>
+  </dgm:styleLbl>
+  <dgm:styleLbl name="revTx">
+    <dgm:scene3d>
+      <a:camera prst="orthographicFront"/>
+      <a:lightRig rig="threePt" dir="t"/>
+    </dgm:scene3d>
+    <dgm:sp3d/>
+    <dgm:txPr/>
+    <dgm:style>
+      <a:lnRef idx="0">
+        <a:scrgbClr r="0" g="0" b="0"/>
+      </a:lnRef>
+      <a:fillRef idx="0">
+        <a:scrgbClr r="0" g="0" b="0"/>
+      </a:fillRef>
+      <a:effectRef idx="0">
+        <a:scrgbClr r="0" g="0" b="0"/>
+      </a:effectRef>
+      <a:fontRef idx="minor"/>
+    </dgm:style>
+  </dgm:styleLbl>
+</dgm:styleDef>
+</file>
+
+<file path=ppt/diagrams/quickStyle7.xml><?xml version="1.0" encoding="utf-8"?>
 <dgm:styleDef xmlns:dgm="http://schemas.openxmlformats.org/drawingml/2006/diagram" xmlns:a="http://schemas.openxmlformats.org/drawingml/2006/main" uniqueId="urn:microsoft.com/office/officeart/2005/8/quickstyle/simple1">
   <dgm:title val=""/>
   <dgm:desc val=""/>
@@ -15703,7 +18999,7 @@
           <a:p>
             <a:fld id="{E82056A7-0DE2-42B3-9F2F-FD46DCCA1F32}" type="datetimeFigureOut">
               <a:rPr lang="en-GB" smtClean="0"/>
-              <a:t>12/02/2026</a:t>
+              <a:t>16/02/2026</a:t>
             </a:fld>
             <a:endParaRPr lang="en-GB"/>
           </a:p>
@@ -15738,7 +19034,7 @@
           <a:bodyPr vert="horz" lIns="91440" tIns="45720" rIns="91440" bIns="45720" rtlCol="0" anchor="ctr"/>
           <a:lstStyle/>
           <a:p>
-            <a:endParaRPr lang="en-GB"/>
+            <a:endParaRPr lang="en-GB" dirty="0"/>
           </a:p>
         </p:txBody>
       </p:sp>
@@ -16036,7 +19332,7 @@
           <a:p>
             <a:fld id="{2DF6F117-21E8-4489-846A-9C2CF9259BE5}" type="slidenum">
               <a:rPr lang="en-GB" smtClean="0"/>
-              <a:t>11</a:t>
+              <a:t>12</a:t>
             </a:fld>
             <a:endParaRPr lang="en-GB"/>
           </a:p>
@@ -16204,7 +19500,7 @@
           <a:p>
             <a:fld id="{A2EFFBEB-722F-4692-B85C-F4E7F9767597}" type="datetimeFigureOut">
               <a:rPr lang="en-GB" smtClean="0"/>
-              <a:t>12/02/2026</a:t>
+              <a:t>16/02/2026</a:t>
             </a:fld>
             <a:endParaRPr lang="en-GB"/>
           </a:p>
@@ -16404,7 +19700,7 @@
           <a:p>
             <a:fld id="{A2EFFBEB-722F-4692-B85C-F4E7F9767597}" type="datetimeFigureOut">
               <a:rPr lang="en-GB" smtClean="0"/>
-              <a:t>12/02/2026</a:t>
+              <a:t>16/02/2026</a:t>
             </a:fld>
             <a:endParaRPr lang="en-GB"/>
           </a:p>
@@ -16614,7 +19910,7 @@
           <a:p>
             <a:fld id="{A2EFFBEB-722F-4692-B85C-F4E7F9767597}" type="datetimeFigureOut">
               <a:rPr lang="en-GB" smtClean="0"/>
-              <a:t>12/02/2026</a:t>
+              <a:t>16/02/2026</a:t>
             </a:fld>
             <a:endParaRPr lang="en-GB"/>
           </a:p>
@@ -16814,7 +20110,7 @@
           <a:p>
             <a:fld id="{A2EFFBEB-722F-4692-B85C-F4E7F9767597}" type="datetimeFigureOut">
               <a:rPr lang="en-GB" smtClean="0"/>
-              <a:t>12/02/2026</a:t>
+              <a:t>16/02/2026</a:t>
             </a:fld>
             <a:endParaRPr lang="en-GB"/>
           </a:p>
@@ -17090,7 +20386,7 @@
           <a:p>
             <a:fld id="{A2EFFBEB-722F-4692-B85C-F4E7F9767597}" type="datetimeFigureOut">
               <a:rPr lang="en-GB" smtClean="0"/>
-              <a:t>12/02/2026</a:t>
+              <a:t>16/02/2026</a:t>
             </a:fld>
             <a:endParaRPr lang="en-GB"/>
           </a:p>
@@ -17358,7 +20654,7 @@
           <a:p>
             <a:fld id="{A2EFFBEB-722F-4692-B85C-F4E7F9767597}" type="datetimeFigureOut">
               <a:rPr lang="en-GB" smtClean="0"/>
-              <a:t>12/02/2026</a:t>
+              <a:t>16/02/2026</a:t>
             </a:fld>
             <a:endParaRPr lang="en-GB"/>
           </a:p>
@@ -17773,7 +21069,7 @@
           <a:p>
             <a:fld id="{A2EFFBEB-722F-4692-B85C-F4E7F9767597}" type="datetimeFigureOut">
               <a:rPr lang="en-GB" smtClean="0"/>
-              <a:t>12/02/2026</a:t>
+              <a:t>16/02/2026</a:t>
             </a:fld>
             <a:endParaRPr lang="en-GB"/>
           </a:p>
@@ -17915,7 +21211,7 @@
           <a:p>
             <a:fld id="{A2EFFBEB-722F-4692-B85C-F4E7F9767597}" type="datetimeFigureOut">
               <a:rPr lang="en-GB" smtClean="0"/>
-              <a:t>12/02/2026</a:t>
+              <a:t>16/02/2026</a:t>
             </a:fld>
             <a:endParaRPr lang="en-GB"/>
           </a:p>
@@ -18028,7 +21324,7 @@
           <a:p>
             <a:fld id="{A2EFFBEB-722F-4692-B85C-F4E7F9767597}" type="datetimeFigureOut">
               <a:rPr lang="en-GB" smtClean="0"/>
-              <a:t>12/02/2026</a:t>
+              <a:t>16/02/2026</a:t>
             </a:fld>
             <a:endParaRPr lang="en-GB"/>
           </a:p>
@@ -18341,7 +21637,7 @@
           <a:p>
             <a:fld id="{A2EFFBEB-722F-4692-B85C-F4E7F9767597}" type="datetimeFigureOut">
               <a:rPr lang="en-GB" smtClean="0"/>
-              <a:t>12/02/2026</a:t>
+              <a:t>16/02/2026</a:t>
             </a:fld>
             <a:endParaRPr lang="en-GB"/>
           </a:p>
@@ -18630,7 +21926,7 @@
           <a:p>
             <a:fld id="{A2EFFBEB-722F-4692-B85C-F4E7F9767597}" type="datetimeFigureOut">
               <a:rPr lang="en-GB" smtClean="0"/>
-              <a:t>12/02/2026</a:t>
+              <a:t>16/02/2026</a:t>
             </a:fld>
             <a:endParaRPr lang="en-GB"/>
           </a:p>
@@ -18797,38 +22093,38 @@
           <a:p>
             <a:pPr lvl="0"/>
             <a:r>
-              <a:rPr lang="en-US"/>
+              <a:rPr lang="en-US" dirty="0"/>
               <a:t>Click to edit Master text styles</a:t>
             </a:r>
           </a:p>
           <a:p>
             <a:pPr lvl="1"/>
             <a:r>
-              <a:rPr lang="en-US"/>
+              <a:rPr lang="en-US" dirty="0"/>
               <a:t>Second level</a:t>
             </a:r>
           </a:p>
           <a:p>
             <a:pPr lvl="2"/>
             <a:r>
-              <a:rPr lang="en-US"/>
+              <a:rPr lang="en-US" dirty="0"/>
               <a:t>Third level</a:t>
             </a:r>
           </a:p>
           <a:p>
             <a:pPr lvl="3"/>
             <a:r>
-              <a:rPr lang="en-US"/>
+              <a:rPr lang="en-US" dirty="0"/>
               <a:t>Fourth level</a:t>
             </a:r>
           </a:p>
           <a:p>
             <a:pPr lvl="4"/>
             <a:r>
-              <a:rPr lang="en-US"/>
+              <a:rPr lang="en-US" dirty="0"/>
               <a:t>Fifth level</a:t>
             </a:r>
-            <a:endParaRPr lang="en-GB"/>
+            <a:endParaRPr lang="en-GB" dirty="0"/>
           </a:p>
         </p:txBody>
       </p:sp>
@@ -18873,7 +22169,7 @@
           <a:p>
             <a:fld id="{A2EFFBEB-722F-4692-B85C-F4E7F9767597}" type="datetimeFigureOut">
               <a:rPr lang="en-GB" smtClean="0"/>
-              <a:t>12/02/2026</a:t>
+              <a:t>16/02/2026</a:t>
             </a:fld>
             <a:endParaRPr lang="en-GB"/>
           </a:p>
@@ -20262,7 +23558,7 @@
             <p:ph idx="1"/>
             <p:extLst>
               <p:ext uri="{D42A27DB-BD31-4B8C-83A1-F6EECF244321}">
-                <p14:modId xmlns:p14="http://schemas.microsoft.com/office/powerpoint/2010/main" val="52424799"/>
+                <p14:modId xmlns:p14="http://schemas.microsoft.com/office/powerpoint/2010/main" val="906308968"/>
               </p:ext>
             </p:extLst>
           </p:nvPr>
@@ -20291,6 +23587,416 @@
 </file>
 
 <file path=ppt/slides/slide11.xml><?xml version="1.0" encoding="utf-8"?>
+<p:sld xmlns:a="http://schemas.openxmlformats.org/drawingml/2006/main" xmlns:r="http://schemas.openxmlformats.org/officeDocument/2006/relationships" xmlns:p="http://schemas.openxmlformats.org/presentationml/2006/main">
+  <p:cSld>
+    <p:bg>
+      <p:bgPr>
+        <a:solidFill>
+          <a:schemeClr val="bg1"/>
+        </a:solidFill>
+        <a:effectLst/>
+      </p:bgPr>
+    </p:bg>
+    <p:spTree>
+      <p:nvGrpSpPr>
+        <p:cNvPr id="1" name=""/>
+        <p:cNvGrpSpPr/>
+        <p:nvPr/>
+      </p:nvGrpSpPr>
+      <p:grpSpPr>
+        <a:xfrm>
+          <a:off x="0" y="0"/>
+          <a:ext cx="0" cy="0"/>
+          <a:chOff x="0" y="0"/>
+          <a:chExt cx="0" cy="0"/>
+        </a:xfrm>
+      </p:grpSpPr>
+      <p:sp useBgFill="1">
+        <p:nvSpPr>
+          <p:cNvPr id="29" name="Rectangle 28">
+            <a:extLst>
+              <a:ext uri="{FF2B5EF4-FFF2-40B4-BE49-F238E27FC236}">
+                <a16:creationId xmlns:a16="http://schemas.microsoft.com/office/drawing/2014/main" id="{BACC6370-2D7E-4714-9D71-7542949D7D5D}"/>
+              </a:ext>
+              <a:ext uri="{C183D7F6-B498-43B3-948B-1728B52AA6E4}">
+                <adec:decorative xmlns:adec="http://schemas.microsoft.com/office/drawing/2017/decorative" val="1"/>
+              </a:ext>
+            </a:extLst>
+          </p:cNvPr>
+          <p:cNvSpPr>
+            <a:spLocks noGrp="1" noRot="1" noChangeAspect="1" noMove="1" noResize="1" noEditPoints="1" noAdjustHandles="1" noChangeArrowheads="1" noChangeShapeType="1" noTextEdit="1"/>
+          </p:cNvSpPr>
+          <p:nvPr>
+            <p:extLst>
+              <p:ext uri="{386F3935-93C4-4BCD-93E2-E3B085C9AB24}">
+                <p16:designElem xmlns:p16="http://schemas.microsoft.com/office/powerpoint/2015/main" val="1"/>
+              </p:ext>
+            </p:extLst>
+          </p:nvPr>
+        </p:nvSpPr>
+        <p:spPr>
+          <a:xfrm>
+            <a:off x="0" y="0"/>
+            <a:ext cx="12192000" cy="6858000"/>
+          </a:xfrm>
+          <a:prstGeom prst="rect">
+            <a:avLst/>
+          </a:prstGeom>
+          <a:ln w="12700" cap="flat" cmpd="sng" algn="ctr">
+            <a:noFill/>
+            <a:prstDash val="solid"/>
+            <a:miter lim="800000"/>
+          </a:ln>
+          <a:effectLst/>
+          <a:extLst>
+            <a:ext uri="{91240B29-F687-4F45-9708-019B960494DF}">
+              <a14:hiddenLine xmlns:a14="http://schemas.microsoft.com/office/drawing/2010/main" w="12700" cap="flat" cmpd="sng" algn="ctr">
+                <a:solidFill>
+                  <a:schemeClr val="accent1">
+                    <a:shade val="50000"/>
+                  </a:schemeClr>
+                </a:solidFill>
+                <a:prstDash val="solid"/>
+                <a:miter lim="800000"/>
+              </a14:hiddenLine>
+            </a:ext>
+          </a:extLst>
+        </p:spPr>
+        <p:style>
+          <a:lnRef idx="2">
+            <a:schemeClr val="accent1">
+              <a:shade val="50000"/>
+            </a:schemeClr>
+          </a:lnRef>
+          <a:fillRef idx="1">
+            <a:schemeClr val="accent1"/>
+          </a:fillRef>
+          <a:effectRef idx="0">
+            <a:schemeClr val="accent1"/>
+          </a:effectRef>
+          <a:fontRef idx="minor">
+            <a:schemeClr val="lt1"/>
+          </a:fontRef>
+        </p:style>
+        <p:txBody>
+          <a:bodyPr rtlCol="0" anchor="ctr"/>
+          <a:lstStyle/>
+          <a:p>
+            <a:pPr algn="ctr"/>
+            <a:endParaRPr lang="en-US"/>
+          </a:p>
+        </p:txBody>
+      </p:sp>
+      <p:sp>
+        <p:nvSpPr>
+          <p:cNvPr id="30" name="Rectangle 29">
+            <a:extLst>
+              <a:ext uri="{FF2B5EF4-FFF2-40B4-BE49-F238E27FC236}">
+                <a16:creationId xmlns:a16="http://schemas.microsoft.com/office/drawing/2014/main" id="{F68B3F68-107C-434F-AA38-110D5EA91B85}"/>
+              </a:ext>
+              <a:ext uri="{C183D7F6-B498-43B3-948B-1728B52AA6E4}">
+                <adec:decorative xmlns:adec="http://schemas.microsoft.com/office/drawing/2017/decorative" val="1"/>
+              </a:ext>
+            </a:extLst>
+          </p:cNvPr>
+          <p:cNvSpPr>
+            <a:spLocks noGrp="1" noRot="1" noChangeAspect="1" noMove="1" noResize="1" noEditPoints="1" noAdjustHandles="1" noChangeArrowheads="1" noChangeShapeType="1" noTextEdit="1"/>
+          </p:cNvSpPr>
+          <p:nvPr>
+            <p:extLst>
+              <p:ext uri="{386F3935-93C4-4BCD-93E2-E3B085C9AB24}">
+                <p16:designElem xmlns:p16="http://schemas.microsoft.com/office/powerpoint/2015/main" val="1"/>
+              </p:ext>
+            </p:extLst>
+          </p:nvPr>
+        </p:nvSpPr>
+        <p:spPr>
+          <a:xfrm flipH="1">
+            <a:off x="2" y="0"/>
+            <a:ext cx="12191998" cy="1575955"/>
+          </a:xfrm>
+          <a:prstGeom prst="rect">
+            <a:avLst/>
+          </a:prstGeom>
+          <a:gradFill>
+            <a:gsLst>
+              <a:gs pos="0">
+                <a:srgbClr val="000000">
+                  <a:alpha val="96000"/>
+                </a:srgbClr>
+              </a:gs>
+              <a:gs pos="100000">
+                <a:schemeClr val="accent1">
+                  <a:lumMod val="75000"/>
+                </a:schemeClr>
+              </a:gs>
+            </a:gsLst>
+            <a:lin ang="8400000" scaled="0"/>
+          </a:gradFill>
+          <a:ln>
+            <a:noFill/>
+          </a:ln>
+        </p:spPr>
+        <p:style>
+          <a:lnRef idx="2">
+            <a:schemeClr val="accent1">
+              <a:shade val="50000"/>
+            </a:schemeClr>
+          </a:lnRef>
+          <a:fillRef idx="1">
+            <a:schemeClr val="accent1"/>
+          </a:fillRef>
+          <a:effectRef idx="0">
+            <a:schemeClr val="accent1"/>
+          </a:effectRef>
+          <a:fontRef idx="minor">
+            <a:schemeClr val="lt1"/>
+          </a:fontRef>
+        </p:style>
+        <p:txBody>
+          <a:bodyPr rtlCol="0" anchor="ctr"/>
+          <a:lstStyle/>
+          <a:p>
+            <a:pPr algn="ctr"/>
+            <a:endParaRPr lang="en-US"/>
+          </a:p>
+        </p:txBody>
+      </p:sp>
+      <p:sp>
+        <p:nvSpPr>
+          <p:cNvPr id="31" name="Rectangle 30">
+            <a:extLst>
+              <a:ext uri="{FF2B5EF4-FFF2-40B4-BE49-F238E27FC236}">
+                <a16:creationId xmlns:a16="http://schemas.microsoft.com/office/drawing/2014/main" id="{AAD0DBB9-1A4B-4391-81D4-CB19F9AB918A}"/>
+              </a:ext>
+              <a:ext uri="{C183D7F6-B498-43B3-948B-1728B52AA6E4}">
+                <adec:decorative xmlns:adec="http://schemas.microsoft.com/office/drawing/2017/decorative" val="1"/>
+              </a:ext>
+            </a:extLst>
+          </p:cNvPr>
+          <p:cNvSpPr>
+            <a:spLocks noGrp="1" noRot="1" noChangeAspect="1" noMove="1" noResize="1" noEditPoints="1" noAdjustHandles="1" noChangeArrowheads="1" noChangeShapeType="1" noTextEdit="1"/>
+          </p:cNvSpPr>
+          <p:nvPr>
+            <p:extLst>
+              <p:ext uri="{386F3935-93C4-4BCD-93E2-E3B085C9AB24}">
+                <p16:designElem xmlns:p16="http://schemas.microsoft.com/office/powerpoint/2015/main" val="1"/>
+              </p:ext>
+            </p:extLst>
+          </p:nvPr>
+        </p:nvSpPr>
+        <p:spPr>
+          <a:xfrm rot="10800000" flipH="1">
+            <a:off x="8128857" y="0"/>
+            <a:ext cx="4063143" cy="1576412"/>
+          </a:xfrm>
+          <a:prstGeom prst="rect">
+            <a:avLst/>
+          </a:prstGeom>
+          <a:gradFill>
+            <a:gsLst>
+              <a:gs pos="19000">
+                <a:schemeClr val="accent1">
+                  <a:lumMod val="50000"/>
+                  <a:alpha val="68000"/>
+                </a:schemeClr>
+              </a:gs>
+              <a:gs pos="100000">
+                <a:schemeClr val="accent1">
+                  <a:alpha val="79000"/>
+                </a:schemeClr>
+              </a:gs>
+            </a:gsLst>
+            <a:lin ang="19200000" scaled="0"/>
+          </a:gradFill>
+          <a:ln>
+            <a:noFill/>
+          </a:ln>
+        </p:spPr>
+        <p:style>
+          <a:lnRef idx="2">
+            <a:schemeClr val="accent1">
+              <a:shade val="50000"/>
+            </a:schemeClr>
+          </a:lnRef>
+          <a:fillRef idx="1">
+            <a:schemeClr val="accent1"/>
+          </a:fillRef>
+          <a:effectRef idx="0">
+            <a:schemeClr val="accent1"/>
+          </a:effectRef>
+          <a:fontRef idx="minor">
+            <a:schemeClr val="lt1"/>
+          </a:fontRef>
+        </p:style>
+        <p:txBody>
+          <a:bodyPr rtlCol="0" anchor="ctr"/>
+          <a:lstStyle/>
+          <a:p>
+            <a:pPr algn="ctr"/>
+            <a:endParaRPr lang="en-US"/>
+          </a:p>
+        </p:txBody>
+      </p:sp>
+      <p:sp>
+        <p:nvSpPr>
+          <p:cNvPr id="32" name="Rectangle 31">
+            <a:extLst>
+              <a:ext uri="{FF2B5EF4-FFF2-40B4-BE49-F238E27FC236}">
+                <a16:creationId xmlns:a16="http://schemas.microsoft.com/office/drawing/2014/main" id="{063BBA22-50EA-4C4D-BE05-F1CE4E63AA56}"/>
+              </a:ext>
+              <a:ext uri="{C183D7F6-B498-43B3-948B-1728B52AA6E4}">
+                <adec:decorative xmlns:adec="http://schemas.microsoft.com/office/drawing/2017/decorative" val="1"/>
+              </a:ext>
+            </a:extLst>
+          </p:cNvPr>
+          <p:cNvSpPr>
+            <a:spLocks noGrp="1" noRot="1" noChangeAspect="1" noMove="1" noResize="1" noEditPoints="1" noAdjustHandles="1" noChangeArrowheads="1" noChangeShapeType="1" noTextEdit="1"/>
+          </p:cNvSpPr>
+          <p:nvPr>
+            <p:extLst>
+              <p:ext uri="{386F3935-93C4-4BCD-93E2-E3B085C9AB24}">
+                <p16:designElem xmlns:p16="http://schemas.microsoft.com/office/powerpoint/2015/main" val="1"/>
+              </p:ext>
+            </p:extLst>
+          </p:nvPr>
+        </p:nvSpPr>
+        <p:spPr>
+          <a:xfrm rot="5400000">
+            <a:off x="5307777" y="-5307778"/>
+            <a:ext cx="1576446" cy="12192002"/>
+          </a:xfrm>
+          <a:prstGeom prst="rect">
+            <a:avLst/>
+          </a:prstGeom>
+          <a:gradFill>
+            <a:gsLst>
+              <a:gs pos="23000">
+                <a:schemeClr val="accent1">
+                  <a:alpha val="0"/>
+                </a:schemeClr>
+              </a:gs>
+              <a:gs pos="99000">
+                <a:srgbClr val="000000">
+                  <a:alpha val="74000"/>
+                </a:srgbClr>
+              </a:gs>
+            </a:gsLst>
+            <a:lin ang="20400000" scaled="0"/>
+          </a:gradFill>
+          <a:ln>
+            <a:noFill/>
+          </a:ln>
+        </p:spPr>
+        <p:style>
+          <a:lnRef idx="2">
+            <a:schemeClr val="accent1">
+              <a:shade val="50000"/>
+            </a:schemeClr>
+          </a:lnRef>
+          <a:fillRef idx="1">
+            <a:schemeClr val="accent1"/>
+          </a:fillRef>
+          <a:effectRef idx="0">
+            <a:schemeClr val="accent1"/>
+          </a:effectRef>
+          <a:fontRef idx="minor">
+            <a:schemeClr val="lt1"/>
+          </a:fontRef>
+        </p:style>
+        <p:txBody>
+          <a:bodyPr rtlCol="0" anchor="ctr"/>
+          <a:lstStyle/>
+          <a:p>
+            <a:pPr algn="ctr"/>
+            <a:endParaRPr lang="en-US" dirty="0"/>
+          </a:p>
+        </p:txBody>
+      </p:sp>
+      <p:sp>
+        <p:nvSpPr>
+          <p:cNvPr id="2" name="Title 1">
+            <a:extLst>
+              <a:ext uri="{FF2B5EF4-FFF2-40B4-BE49-F238E27FC236}">
+                <a16:creationId xmlns:a16="http://schemas.microsoft.com/office/drawing/2014/main" id="{5DCBF55D-171A-1631-B835-4E4A528669C5}"/>
+              </a:ext>
+            </a:extLst>
+          </p:cNvPr>
+          <p:cNvSpPr>
+            <a:spLocks noGrp="1"/>
+          </p:cNvSpPr>
+          <p:nvPr>
+            <p:ph type="title"/>
+          </p:nvPr>
+        </p:nvSpPr>
+        <p:spPr>
+          <a:xfrm>
+            <a:off x="1371597" y="348865"/>
+            <a:ext cx="10044023" cy="877729"/>
+          </a:xfrm>
+        </p:spPr>
+        <p:txBody>
+          <a:bodyPr anchor="ctr">
+            <a:normAutofit/>
+          </a:bodyPr>
+          <a:lstStyle/>
+          <a:p>
+            <a:r>
+              <a:rPr lang="en-GB" sz="4000">
+                <a:solidFill>
+                  <a:srgbClr val="FFFFFF"/>
+                </a:solidFill>
+              </a:rPr>
+              <a:t>End goal and requirements</a:t>
+            </a:r>
+          </a:p>
+        </p:txBody>
+      </p:sp>
+      <p:graphicFrame>
+        <p:nvGraphicFramePr>
+          <p:cNvPr id="33" name="Content Placeholder 2">
+            <a:extLst>
+              <a:ext uri="{FF2B5EF4-FFF2-40B4-BE49-F238E27FC236}">
+                <a16:creationId xmlns:a16="http://schemas.microsoft.com/office/drawing/2014/main" id="{7371C22A-A6E3-FCE3-598A-20D533D5EED6}"/>
+              </a:ext>
+            </a:extLst>
+          </p:cNvPr>
+          <p:cNvGraphicFramePr>
+            <a:graphicFrameLocks noGrp="1"/>
+          </p:cNvGraphicFramePr>
+          <p:nvPr>
+            <p:ph idx="1"/>
+            <p:extLst>
+              <p:ext uri="{D42A27DB-BD31-4B8C-83A1-F6EECF244321}">
+                <p14:modId xmlns:p14="http://schemas.microsoft.com/office/powerpoint/2010/main" val="705512644"/>
+              </p:ext>
+            </p:extLst>
+          </p:nvPr>
+        </p:nvGraphicFramePr>
+        <p:xfrm>
+          <a:off x="644056" y="2112579"/>
+          <a:ext cx="10927829" cy="4192805"/>
+        </p:xfrm>
+        <a:graphic>
+          <a:graphicData uri="http://schemas.openxmlformats.org/drawingml/2006/diagram">
+            <dgm:relIds xmlns:dgm="http://schemas.openxmlformats.org/drawingml/2006/diagram" xmlns:r="http://schemas.openxmlformats.org/officeDocument/2006/relationships" r:dm="rId2" r:lo="rId3" r:qs="rId4" r:cs="rId5"/>
+          </a:graphicData>
+        </a:graphic>
+      </p:graphicFrame>
+    </p:spTree>
+    <p:extLst>
+      <p:ext uri="{BB962C8B-B14F-4D97-AF65-F5344CB8AC3E}">
+        <p14:creationId xmlns:p14="http://schemas.microsoft.com/office/powerpoint/2010/main" val="3313795850"/>
+      </p:ext>
+    </p:extLst>
+  </p:cSld>
+  <p:clrMapOvr>
+    <a:masterClrMapping/>
+  </p:clrMapOvr>
+</p:sld>
+</file>
+
+<file path=ppt/slides/slide12.xml><?xml version="1.0" encoding="utf-8"?>
 <p:sld xmlns:a="http://schemas.openxmlformats.org/drawingml/2006/main" xmlns:r="http://schemas.openxmlformats.org/officeDocument/2006/relationships" xmlns:p="http://schemas.openxmlformats.org/presentationml/2006/main">
   <p:cSld>
     <p:bg>
@@ -20804,7 +24510,7 @@
         </p:nvSpPr>
         <p:spPr>
           <a:xfrm>
-            <a:off x="1371601" y="4786744"/>
+            <a:off x="1371600" y="5032417"/>
             <a:ext cx="9448800" cy="1442631"/>
           </a:xfrm>
         </p:spPr>
@@ -20891,7 +24597,7 @@
 </p:sld>
 </file>
 
-<file path=ppt/slides/slide12.xml><?xml version="1.0" encoding="utf-8"?>
+<file path=ppt/slides/slide13.xml><?xml version="1.0" encoding="utf-8"?>
 <p:sld xmlns:a="http://schemas.openxmlformats.org/drawingml/2006/main" xmlns:r="http://schemas.openxmlformats.org/officeDocument/2006/relationships" xmlns:p="http://schemas.openxmlformats.org/presentationml/2006/main">
   <p:cSld>
     <p:bg>
@@ -21589,7 +25295,7 @@
 </p:sld>
 </file>
 
-<file path=ppt/slides/slide13.xml><?xml version="1.0" encoding="utf-8"?>
+<file path=ppt/slides/slide14.xml><?xml version="1.0" encoding="utf-8"?>
 <p:sld xmlns:a="http://schemas.openxmlformats.org/drawingml/2006/main" xmlns:r="http://schemas.openxmlformats.org/officeDocument/2006/relationships" xmlns:p="http://schemas.openxmlformats.org/presentationml/2006/main">
   <p:cSld>
     <p:bg>
@@ -22095,7 +25801,7 @@
 </p:sld>
 </file>
 
-<file path=ppt/slides/slide14.xml><?xml version="1.0" encoding="utf-8"?>
+<file path=ppt/slides/slide15.xml><?xml version="1.0" encoding="utf-8"?>
 <p:sld xmlns:a="http://schemas.openxmlformats.org/drawingml/2006/main" xmlns:r="http://schemas.openxmlformats.org/officeDocument/2006/relationships" xmlns:p="http://schemas.openxmlformats.org/presentationml/2006/main">
   <p:cSld>
     <p:bg>
@@ -22607,7 +26313,7 @@
 </p:sld>
 </file>
 
-<file path=ppt/slides/slide15.xml><?xml version="1.0" encoding="utf-8"?>
+<file path=ppt/slides/slide16.xml><?xml version="1.0" encoding="utf-8"?>
 <p:sld xmlns:a="http://schemas.openxmlformats.org/drawingml/2006/main" xmlns:r="http://schemas.openxmlformats.org/officeDocument/2006/relationships" xmlns:p="http://schemas.openxmlformats.org/presentationml/2006/main">
   <p:cSld>
     <p:bg>
@@ -23305,7 +27011,7 @@
 </p:sld>
 </file>
 
-<file path=ppt/slides/slide16.xml><?xml version="1.0" encoding="utf-8"?>
+<file path=ppt/slides/slide17.xml><?xml version="1.0" encoding="utf-8"?>
 <p:sld xmlns:a="http://schemas.openxmlformats.org/drawingml/2006/main" xmlns:r="http://schemas.openxmlformats.org/officeDocument/2006/relationships" xmlns:p="http://schemas.openxmlformats.org/presentationml/2006/main">
   <p:cSld>
     <p:bg>
@@ -24049,7 +27755,7 @@
 </p:sld>
 </file>
 
-<file path=ppt/slides/slide17.xml><?xml version="1.0" encoding="utf-8"?>
+<file path=ppt/slides/slide18.xml><?xml version="1.0" encoding="utf-8"?>
 <p:sld xmlns:a="http://schemas.openxmlformats.org/drawingml/2006/main" xmlns:r="http://schemas.openxmlformats.org/officeDocument/2006/relationships" xmlns:p="http://schemas.openxmlformats.org/presentationml/2006/main">
   <p:cSld>
     <p:bg>
@@ -24820,7 +28526,7 @@
 </p:sld>
 </file>
 
-<file path=ppt/slides/slide18.xml><?xml version="1.0" encoding="utf-8"?>
+<file path=ppt/slides/slide19.xml><?xml version="1.0" encoding="utf-8"?>
 <p:sld xmlns:a="http://schemas.openxmlformats.org/drawingml/2006/main" xmlns:r="http://schemas.openxmlformats.org/officeDocument/2006/relationships" xmlns:p="http://schemas.openxmlformats.org/presentationml/2006/main">
   <p:cSld>
     <p:bg>
